--- a/assets/readme/examples/master-showcase.pptx
+++ b/assets/readme/examples/master-showcase.pptx
@@ -3161,7 +3161,7 @@
               <a:defRPr/>
             </a:pPr>
             <a:r>
-              <a:rPr lang="en-US" sz="850" b="true" i="false" u="none" strike="noStrike" kern="0">
+              <a:rPr lang="en-US" sz="850" b="false" i="false" u="none" strike="noStrike" kern="0">
                 <a:solidFill>
                   <a:srgbClr val="707480"/>
                 </a:solidFill>
@@ -4009,11 +4009,11 @@
         <p:spPr>
           <a:xfrm>
             <a:off x="431800" y="2964974"/>
-            <a:ext cx="3015259" cy="1839278"/>
+            <a:ext cx="3113938" cy="2003743"/>
           </a:xfrm>
           <a:prstGeom prst="roundRect">
             <a:avLst>
-              <a:gd name="adj" fmla="val 6905"/>
+              <a:gd name="adj" fmla="val 6338"/>
             </a:avLst>
           </a:prstGeom>
           <a:solidFill>
@@ -4033,7 +4033,7 @@
         <p:spPr>
           <a:xfrm>
             <a:off x="431800" y="2964974"/>
-            <a:ext cx="0" cy="1839278"/>
+            <a:ext cx="0" cy="2003743"/>
           </a:xfrm>
           <a:prstGeom prst="line">
             <a:avLst/>
@@ -4079,7 +4079,7 @@
               <a:defRPr/>
             </a:pPr>
             <a:r>
-              <a:rPr lang="en-US" sz="1100" b="true" i="false" u="none" strike="noStrike" kern="0">
+              <a:rPr lang="en-US" sz="1100" b="false" i="false" u="none" strike="noStrike" kern="0">
                 <a:solidFill>
                   <a:srgbClr val="222632"/>
                 </a:solidFill>
@@ -4100,7 +4100,7 @@
         <p:spPr>
           <a:xfrm>
             <a:off x="635000" y="3340299"/>
-            <a:ext cx="2343607" cy="164465"/>
+            <a:ext cx="2481758" cy="164465"/>
           </a:xfrm>
           <a:prstGeom prst="rect">
             <a:avLst/>
@@ -4203,7 +4203,7 @@
                 </a:solidFill>
                 <a:latin typeface="Arial"/>
               </a:rPr>
-              <a:t>675</a:t>
+              <a:t>every</a:t>
             </a:r>
             <a:r>
               <a:rPr lang="en-US" sz="1400" b="true" i="false" u="none" strike="noStrike" kern="0">
@@ -4221,25 +4221,7 @@
                 </a:solidFill>
                 <a:latin typeface="Arial"/>
               </a:rPr>
-              <a:t>/</a:t>
-            </a:r>
-            <a:r>
-              <a:rPr lang="en-US" sz="1400" b="true" i="false" u="none" strike="noStrike" kern="0">
-                <a:solidFill>
-                  <a:srgbClr val="14505F"/>
-                </a:solidFill>
-                <a:latin typeface="Arial"/>
-              </a:rPr>
-              <a:t> </a:t>
-            </a:r>
-            <a:r>
-              <a:rPr lang="en-US" sz="1400" b="true" i="false" u="none" strike="noStrike" kern="0">
-                <a:solidFill>
-                  <a:srgbClr val="14505F"/>
-                </a:solidFill>
-                <a:latin typeface="Arial"/>
-              </a:rPr>
-              <a:t>675</a:t>
+              <a:t>gate</a:t>
             </a:r>
             <a:endParaRPr lang="en-US" sz="1100"/>
           </a:p>
@@ -4254,7 +4236,7 @@
         <p:spPr>
           <a:xfrm>
             <a:off x="635000" y="3504764"/>
-            <a:ext cx="2096110" cy="164465"/>
+            <a:ext cx="1987296" cy="164465"/>
           </a:xfrm>
           <a:prstGeom prst="rect">
             <a:avLst/>
@@ -4285,33 +4267,33 @@
                 </a:solidFill>
                 <a:latin typeface="Arial"/>
               </a:rPr>
-              <a:t>tests</a:t>
-            </a:r>
-            <a:r>
-              <a:rPr lang="en-US" sz="1400" b="true" i="false" u="none" strike="noStrike" kern="0">
-                <a:solidFill>
-                  <a:srgbClr val="14505F"/>
+              <a:t>green</a:t>
+            </a:r>
+            <a:r>
+              <a:rPr lang="en-US" sz="1400" b="false" i="false" u="none" strike="noStrike" kern="0">
+                <a:solidFill>
+                  <a:srgbClr val="000000"/>
                 </a:solidFill>
                 <a:latin typeface="Arial"/>
               </a:rPr>
               <a:t> </a:t>
             </a:r>
             <a:r>
-              <a:rPr lang="en-US" sz="1400" b="true" i="false" u="none" strike="noStrike" kern="0">
-                <a:solidFill>
-                  <a:srgbClr val="14505F"/>
-                </a:solidFill>
-                <a:latin typeface="Arial"/>
-              </a:rPr>
-              <a:t>green</a:t>
-            </a:r>
-            <a:r>
               <a:rPr lang="en-US" sz="1400" b="false" i="false" u="none" strike="noStrike" kern="0">
                 <a:solidFill>
                   <a:srgbClr val="000000"/>
                 </a:solidFill>
                 <a:latin typeface="Arial"/>
               </a:rPr>
+              <a:t>—</a:t>
+            </a:r>
+            <a:r>
+              <a:rPr lang="en-US" sz="1400" b="false" i="false" u="none" strike="noStrike" kern="0">
+                <a:solidFill>
+                  <a:srgbClr val="000000"/>
+                </a:solidFill>
+                <a:latin typeface="Arial"/>
+              </a:rPr>
               <a:t> </a:t>
             </a:r>
             <a:r>
@@ -4321,7 +4303,7 @@
                 </a:solidFill>
                 <a:latin typeface="Arial"/>
               </a:rPr>
-              <a:t>—</a:t>
+              <a:t>release</a:t>
             </a:r>
             <a:r>
               <a:rPr lang="en-US" sz="1400" b="false" i="false" u="none" strike="noStrike" kern="0">
@@ -4339,25 +4321,7 @@
                 </a:solidFill>
                 <a:latin typeface="Arial"/>
               </a:rPr>
-              <a:t>Q2</a:t>
-            </a:r>
-            <a:r>
-              <a:rPr lang="en-US" sz="1400" b="false" i="false" u="none" strike="noStrike" kern="0">
-                <a:solidFill>
-                  <a:srgbClr val="000000"/>
-                </a:solidFill>
-                <a:latin typeface="Arial"/>
-              </a:rPr>
-              <a:t> </a:t>
-            </a:r>
-            <a:r>
-              <a:rPr lang="en-US" sz="1400" b="false" i="false" u="none" strike="noStrike" kern="0">
-                <a:solidFill>
-                  <a:srgbClr val="000000"/>
-                </a:solidFill>
-                <a:latin typeface="Arial"/>
-              </a:rPr>
-              <a:t>release</a:t>
+              <a:t>window</a:t>
             </a:r>
             <a:endParaRPr lang="en-US" sz="1100"/>
           </a:p>
@@ -4372,7 +4336,7 @@
         <p:spPr>
           <a:xfrm>
             <a:off x="635000" y="3669229"/>
-            <a:ext cx="2610129" cy="164465"/>
+            <a:ext cx="2600173" cy="164465"/>
           </a:xfrm>
           <a:prstGeom prst="rect">
             <a:avLst/>
@@ -4403,7 +4367,7 @@
                 </a:solidFill>
                 <a:latin typeface="Arial"/>
               </a:rPr>
-              <a:t>window</a:t>
+              <a:t>confirmed</a:t>
             </a:r>
             <a:r>
               <a:rPr lang="en-US" sz="1400" b="false" i="false" u="none" strike="noStrike" kern="0">
@@ -4421,7 +4385,7 @@
                 </a:solidFill>
                 <a:latin typeface="Arial"/>
               </a:rPr>
-              <a:t>confirmed</a:t>
+              <a:t>for</a:t>
             </a:r>
             <a:r>
               <a:rPr lang="en-US" sz="1400" b="false" i="false" u="none" strike="noStrike" kern="0">
@@ -4439,7 +4403,7 @@
                 </a:solidFill>
                 <a:latin typeface="Arial"/>
               </a:rPr>
-              <a:t>for</a:t>
+              <a:t>the</a:t>
             </a:r>
             <a:r>
               <a:rPr lang="en-US" sz="1400" b="false" i="false" u="none" strike="noStrike" kern="0">
@@ -4457,7 +4421,7 @@
                 </a:solidFill>
                 <a:latin typeface="Arial"/>
               </a:rPr>
-              <a:t>June</a:t>
+              <a:t>current</a:t>
             </a:r>
             <a:r>
               <a:rPr lang="en-US" sz="1400" b="false" i="false" u="sng" strike="noStrike" kern="0">
@@ -4475,7 +4439,7 @@
                 </a:solidFill>
                 <a:latin typeface="Arial"/>
               </a:rPr>
-              <a:t>2026</a:t>
+              <a:t>quarter</a:t>
             </a:r>
             <a:r>
               <a:rPr lang="en-US" sz="1400" b="false" i="false" u="none" strike="noStrike" kern="0">
@@ -4499,7 +4463,7 @@
         <p:spPr>
           <a:xfrm>
             <a:off x="635000" y="3909894"/>
-            <a:ext cx="2412238" cy="164465"/>
+            <a:ext cx="2708808" cy="164465"/>
           </a:xfrm>
           <a:prstGeom prst="rect">
             <a:avLst/>
@@ -4550,6 +4514,24 @@
               </a:rPr>
               <a:t>invoice-template</a:t>
             </a:r>
+            <a:r>
+              <a:rPr lang="en-US" sz="1400" b="false" i="false" u="none" strike="noStrike" kern="0">
+                <a:solidFill>
+                  <a:srgbClr val="000000"/>
+                </a:solidFill>
+                <a:latin typeface="Arial"/>
+              </a:rPr>
+              <a:t> </a:t>
+            </a:r>
+            <a:r>
+              <a:rPr lang="en-US" sz="1400" b="false" i="false" u="none" strike="noStrike" kern="0">
+                <a:solidFill>
+                  <a:srgbClr val="000000"/>
+                </a:solidFill>
+                <a:latin typeface="Arial"/>
+              </a:rPr>
+              <a:t>6.6</a:t>
+            </a:r>
             <a:endParaRPr lang="en-US" sz="1100"/>
           </a:p>
         </p:txBody>
@@ -4563,7 +4545,7 @@
         <p:spPr>
           <a:xfrm>
             <a:off x="635000" y="4074359"/>
-            <a:ext cx="2066773" cy="164465"/>
+            <a:ext cx="1770202" cy="164465"/>
           </a:xfrm>
           <a:prstGeom prst="rect">
             <a:avLst/>
@@ -4594,7 +4576,7 @@
                 </a:solidFill>
                 <a:latin typeface="Arial"/>
               </a:rPr>
-              <a:t>13.4</a:t>
+              <a:t>ms</a:t>
             </a:r>
             <a:r>
               <a:rPr lang="en-US" sz="1400" b="false" i="false" u="none" strike="noStrike" kern="0">
@@ -4612,7 +4594,7 @@
                 </a:solidFill>
                 <a:latin typeface="Arial"/>
               </a:rPr>
-              <a:t>ms</a:t>
+              <a:t>avg,</a:t>
             </a:r>
             <a:r>
               <a:rPr lang="en-US" sz="1400" b="false" i="false" u="none" strike="noStrike" kern="0">
@@ -4630,25 +4612,7 @@
                 </a:solidFill>
                 <a:latin typeface="Arial"/>
               </a:rPr>
-              <a:t>avg,</a:t>
-            </a:r>
-            <a:r>
-              <a:rPr lang="en-US" sz="1400" b="false" i="false" u="none" strike="noStrike" kern="0">
-                <a:solidFill>
-                  <a:srgbClr val="000000"/>
-                </a:solidFill>
-                <a:latin typeface="Arial"/>
-              </a:rPr>
-              <a:t> </a:t>
-            </a:r>
-            <a:r>
-              <a:rPr lang="en-US" sz="1400" b="false" i="false" u="none" strike="noStrike" kern="0">
-                <a:solidFill>
-                  <a:srgbClr val="000000"/>
-                </a:solidFill>
-                <a:latin typeface="Arial"/>
-              </a:rPr>
-              <a:t>75</a:t>
+              <a:t>152</a:t>
             </a:r>
             <a:r>
               <a:rPr lang="en-US" sz="1400" b="false" i="false" u="none" strike="noStrike" kern="0">
@@ -4730,7 +4694,7 @@
                 </a:solidFill>
                 <a:latin typeface="Arial"/>
               </a:rPr>
-              <a:t>36.8</a:t>
+              <a:t>54.2</a:t>
             </a:r>
             <a:r>
               <a:rPr lang="en-US" sz="1400" b="false" i="false" u="none" strike="noStrike" kern="0">
@@ -4784,7 +4748,7 @@
                 </a:solidFill>
                 <a:latin typeface="Arial"/>
               </a:rPr>
-              <a:t>27</a:t>
+              <a:t>18</a:t>
             </a:r>
             <a:endParaRPr lang="en-US" sz="1100"/>
           </a:p>
@@ -4799,7 +4763,7 @@
         <p:spPr>
           <a:xfrm>
             <a:off x="635000" y="4403289"/>
-            <a:ext cx="752297" cy="164465"/>
+            <a:ext cx="1908531" cy="164465"/>
           </a:xfrm>
           <a:prstGeom prst="rect">
             <a:avLst/>
@@ -4832,13 +4796,95 @@
               </a:rPr>
               <a:t>docs/sec.</a:t>
             </a:r>
+            <a:r>
+              <a:rPr lang="en-US" sz="1400" b="false" i="false" u="none" strike="noStrike" kern="0">
+                <a:solidFill>
+                  <a:srgbClr val="000000"/>
+                </a:solidFill>
+                <a:latin typeface="Arial"/>
+              </a:rPr>
+              <a:t> </a:t>
+            </a:r>
+            <a:r>
+              <a:rPr lang="en-US" sz="1400" b="false" i="false" u="none" strike="noStrike" kern="0">
+                <a:solidFill>
+                  <a:srgbClr val="000000"/>
+                </a:solidFill>
+                <a:latin typeface="Arial"/>
+              </a:rPr>
+              <a:t>One</a:t>
+            </a:r>
+            <a:r>
+              <a:rPr lang="en-US" sz="1400" b="false" i="false" u="none" strike="noStrike" kern="0">
+                <a:solidFill>
+                  <a:srgbClr val="000000"/>
+                </a:solidFill>
+                <a:latin typeface="Arial"/>
+              </a:rPr>
+              <a:t> </a:t>
+            </a:r>
+            <a:r>
+              <a:rPr lang="en-US" sz="1400" b="false" i="false" u="none" strike="noStrike" kern="0">
+                <a:solidFill>
+                  <a:srgbClr val="000000"/>
+                </a:solidFill>
+                <a:latin typeface="Arial"/>
+              </a:rPr>
+              <a:t>machine,</a:t>
+            </a:r>
+            <a:endParaRPr lang="en-US" sz="1100"/>
+          </a:p>
+        </p:txBody>
+      </p:sp>
+      <p:sp>
+        <p:nvSpPr>
+          <p:cNvPr name="GraphCompose Text Line" id="24"/>
+          <p:cNvSpPr txBox="true"/>
+          <p:nvPr/>
+        </p:nvSpPr>
+        <p:spPr>
+          <a:xfrm>
+            <a:off x="635000" y="4567754"/>
+            <a:ext cx="959968" cy="164465"/>
+          </a:xfrm>
+          <a:prstGeom prst="rect">
+            <a:avLst/>
+          </a:prstGeom>
+        </p:spPr>
+        <p:txBody>
+          <a:bodyPr anchor="t" rtlCol="false" wrap="none" tIns="0" rIns="0" bIns="0" lIns="0">
+            <a:noAutofit/>
+          </a:bodyPr>
+          <a:lstStyle/>
+          <a:p>
+            <a:pPr algn="l">
+              <a:lnSpc>
+                <a:spcPct val="100000"/>
+              </a:lnSpc>
+              <a:spcBef>
+                <a:spcPct val="0"/>
+              </a:spcBef>
+              <a:spcAft>
+                <a:spcPct val="0"/>
+              </a:spcAft>
+              <a:defRPr/>
+            </a:pPr>
+            <a:r>
+              <a:rPr lang="en-US" sz="1400" b="false" i="false" u="none" strike="noStrike" kern="0">
+                <a:solidFill>
+                  <a:srgbClr val="000000"/>
+                </a:solidFill>
+                <a:latin typeface="Arial"/>
+              </a:rPr>
+              <a:t>2026-07-26.</a:t>
+            </a:r>
             <a:endParaRPr lang="en-US" sz="1100"/>
           </a:p>
         </p:txBody>
       </p:sp>
       <p:grpSp>
         <p:nvGrpSpPr>
-          <p:cNvPr name="Group 24" id="24"/>
+          <p:cNvPr name="Group 25" id="25"/>
           <p:cNvGrpSpPr/>
           <p:nvPr/>
         </p:nvGrpSpPr>
@@ -4852,7 +4898,7 @@
         </p:grpSpPr>
         <p:sp>
           <p:nvSpPr>
-            <p:cNvPr name="AutoShape 25" id="25"/>
+            <p:cNvPr name="AutoShape 26" id="26"/>
             <p:cNvSpPr/>
             <p:nvPr/>
           </p:nvSpPr>
@@ -4876,7 +4922,7 @@
         </p:sp>
         <p:pic>
           <p:nvPicPr>
-            <p:cNvPr name="GraphCompose Clipped Composite" id="26"/>
+            <p:cNvPr name="GraphCompose Clipped Composite" id="27"/>
             <p:cNvPicPr>
               <a:picLocks noChangeAspect="true"/>
             </p:cNvPicPr>
@@ -4901,7 +4947,7 @@
       </p:grpSp>
       <p:sp>
         <p:nvSpPr>
-          <p:cNvPr name="AutoShape 27" id="27"/>
+          <p:cNvPr name="AutoShape 28" id="28"/>
           <p:cNvSpPr/>
           <p:nvPr/>
         </p:nvSpPr>
@@ -4925,7 +4971,7 @@
       </p:sp>
       <p:sp>
         <p:nvSpPr>
-          <p:cNvPr name="GraphCompose Text Line" id="28"/>
+          <p:cNvPr name="GraphCompose Text Line" id="29"/>
           <p:cNvSpPr txBox="true"/>
           <p:nvPr/>
         </p:nvSpPr>
@@ -4957,7 +5003,7 @@
               <a:defRPr/>
             </a:pPr>
             <a:r>
-              <a:rPr lang="en-US" sz="850" b="true" i="false" u="none" strike="noStrike" kern="0">
+              <a:rPr lang="en-US" sz="850" b="false" i="false" u="none" strike="noStrike" kern="0">
                 <a:solidFill>
                   <a:srgbClr val="707480"/>
                 </a:solidFill>
@@ -4971,7 +5017,7 @@
       </p:sp>
       <p:pic>
         <p:nvPicPr>
-          <p:cNvPr name="Picture 29" id="29"/>
+          <p:cNvPr name="Picture 30" id="30"/>
           <p:cNvPicPr>
             <a:picLocks noChangeAspect="true"/>
           </p:cNvPicPr>
@@ -4995,7 +5041,7 @@
       </p:pic>
       <p:sp>
         <p:nvSpPr>
-          <p:cNvPr name="GraphCompose Text Line" id="30"/>
+          <p:cNvPr name="GraphCompose Text Line" id="31"/>
           <p:cNvSpPr txBox="true"/>
           <p:nvPr/>
         </p:nvSpPr>
@@ -5041,7 +5087,7 @@
       </p:sp>
       <p:sp>
         <p:nvSpPr>
-          <p:cNvPr name="GraphCompose Text Line" id="31"/>
+          <p:cNvPr name="GraphCompose Text Line" id="32"/>
           <p:cNvSpPr txBox="true"/>
           <p:nvPr/>
         </p:nvSpPr>
@@ -5087,14 +5133,14 @@
       </p:sp>
       <p:sp>
         <p:nvSpPr>
-          <p:cNvPr name="AutoShape 32" id="32"/>
+          <p:cNvPr name="AutoShape 33" id="33"/>
           <p:cNvSpPr/>
           <p:nvPr/>
         </p:nvSpPr>
         <p:spPr>
           <a:xfrm>
-            <a:off x="431800" y="5139525"/>
-            <a:ext cx="6695008" cy="1530033"/>
+            <a:off x="431800" y="5146516"/>
+            <a:ext cx="6641668" cy="1530033"/>
           </a:xfrm>
           <a:prstGeom prst="roundRect">
             <a:avLst>
@@ -5111,13 +5157,13 @@
       </p:sp>
       <p:cxnSp>
         <p:nvCxnSpPr>
-          <p:cNvPr name="Connector 33" id="33"/>
-          <p:cNvCxnSpPr/>
-          <p:nvPr/>
-        </p:nvCxnSpPr>
-        <p:spPr>
-          <a:xfrm>
-            <a:off x="431800" y="5139525"/>
+          <p:cNvPr name="Connector 34" id="34"/>
+          <p:cNvCxnSpPr/>
+          <p:nvPr/>
+        </p:nvCxnSpPr>
+        <p:spPr>
+          <a:xfrm>
+            <a:off x="431800" y="5146516"/>
             <a:ext cx="0" cy="1530033"/>
           </a:xfrm>
           <a:prstGeom prst="line">
@@ -5132,13 +5178,13 @@
       </p:cxnSp>
       <p:sp>
         <p:nvSpPr>
-          <p:cNvPr name="GraphCompose Text Line" id="34"/>
+          <p:cNvPr name="GraphCompose Text Line" id="35"/>
           <p:cNvSpPr txBox="true"/>
           <p:nvPr/>
         </p:nvSpPr>
         <p:spPr>
           <a:xfrm>
-            <a:off x="635000" y="5302293"/>
+            <a:off x="635000" y="5309284"/>
             <a:ext cx="2029219" cy="199708"/>
           </a:xfrm>
           <a:prstGeom prst="rect">
@@ -5178,14 +5224,14 @@
       </p:sp>
       <p:sp>
         <p:nvSpPr>
-          <p:cNvPr name="GraphCompose Text Line" id="35"/>
+          <p:cNvPr name="GraphCompose Text Line" id="36"/>
           <p:cNvSpPr txBox="true"/>
           <p:nvPr/>
         </p:nvSpPr>
         <p:spPr>
           <a:xfrm>
-            <a:off x="635000" y="5610735"/>
-            <a:ext cx="5805729" cy="164465"/>
+            <a:off x="635000" y="5617727"/>
+            <a:ext cx="5997219" cy="164465"/>
           </a:xfrm>
           <a:prstGeom prst="rect">
             <a:avLst/>
@@ -5216,7 +5262,7 @@
                 </a:solidFill>
                 <a:latin typeface="Arial"/>
               </a:rPr>
-              <a:t>v1.5</a:t>
+              <a:t>The</a:t>
             </a:r>
             <a:r>
               <a:rPr lang="en-US" sz="1400" b="false" i="false" u="none" strike="noStrike" kern="0">
@@ -5234,7 +5280,7 @@
                 </a:solidFill>
                 <a:latin typeface="Arial"/>
               </a:rPr>
-              <a:t>lands</a:t>
+              <a:t>features</a:t>
             </a:r>
             <a:r>
               <a:rPr lang="en-US" sz="1400" b="false" i="false" u="none" strike="noStrike" kern="0">
@@ -5252,7 +5298,7 @@
                 </a:solidFill>
                 <a:latin typeface="Arial"/>
               </a:rPr>
-              <a:t>the</a:t>
+              <a:t>below</a:t>
             </a:r>
             <a:r>
               <a:rPr lang="en-US" sz="1400" b="false" i="false" u="none" strike="noStrike" kern="0">
@@ -5270,7 +5316,7 @@
                 </a:solidFill>
                 <a:latin typeface="Arial"/>
               </a:rPr>
-              <a:t>cinematic</a:t>
+              <a:t>are</a:t>
             </a:r>
             <a:r>
               <a:rPr lang="en-US" sz="1400" b="false" i="false" u="none" strike="noStrike" kern="0">
@@ -5288,7 +5334,7 @@
                 </a:solidFill>
                 <a:latin typeface="Arial"/>
               </a:rPr>
-              <a:t>features</a:t>
+              <a:t>what</a:t>
             </a:r>
             <a:r>
               <a:rPr lang="en-US" sz="1400" b="false" i="false" u="none" strike="noStrike" kern="0">
@@ -5306,7 +5352,7 @@
                 </a:solidFill>
                 <a:latin typeface="Arial"/>
               </a:rPr>
-              <a:t>that</a:t>
+              <a:t>turn</a:t>
             </a:r>
             <a:r>
               <a:rPr lang="en-US" sz="1400" b="false" i="false" u="none" strike="noStrike" kern="0">
@@ -5324,7 +5370,7 @@
                 </a:solidFill>
                 <a:latin typeface="Arial"/>
               </a:rPr>
-              <a:t>turn</a:t>
+              <a:t>GraphCompose</a:t>
             </a:r>
             <a:r>
               <a:rPr lang="en-US" sz="1400" b="false" i="false" u="none" strike="noStrike" kern="0">
@@ -5342,7 +5388,7 @@
                 </a:solidFill>
                 <a:latin typeface="Arial"/>
               </a:rPr>
-              <a:t>GraphCompose</a:t>
+              <a:t>from</a:t>
             </a:r>
             <a:r>
               <a:rPr lang="en-US" sz="1400" b="false" i="false" u="none" strike="noStrike" kern="0">
@@ -5360,7 +5406,7 @@
                 </a:solidFill>
                 <a:latin typeface="Arial"/>
               </a:rPr>
-              <a:t>from</a:t>
+              <a:t>a</a:t>
             </a:r>
             <a:r>
               <a:rPr lang="en-US" sz="1400" b="false" i="false" u="none" strike="noStrike" kern="0">
@@ -5398,20 +5444,38 @@
               </a:rPr>
               <a:t>PDF</a:t>
             </a:r>
+            <a:r>
+              <a:rPr lang="en-US" sz="1400" b="false" i="false" u="none" strike="noStrike" kern="0">
+                <a:solidFill>
+                  <a:srgbClr val="000000"/>
+                </a:solidFill>
+                <a:latin typeface="Arial"/>
+              </a:rPr>
+              <a:t> </a:t>
+            </a:r>
+            <a:r>
+              <a:rPr lang="en-US" sz="1400" b="false" i="false" u="none" strike="noStrike" kern="0">
+                <a:solidFill>
+                  <a:srgbClr val="000000"/>
+                </a:solidFill>
+                <a:latin typeface="Arial"/>
+              </a:rPr>
+              <a:t>layouter"</a:t>
+            </a:r>
             <a:endParaRPr lang="en-US" sz="1100"/>
           </a:p>
         </p:txBody>
       </p:sp>
       <p:sp>
         <p:nvSpPr>
-          <p:cNvPr name="GraphCompose Text Line" id="36"/>
+          <p:cNvPr name="GraphCompose Text Line" id="37"/>
           <p:cNvSpPr txBox="true"/>
           <p:nvPr/>
         </p:nvSpPr>
         <p:spPr>
           <a:xfrm>
-            <a:off x="635000" y="5775200"/>
-            <a:ext cx="6289878" cy="164465"/>
+            <a:off x="635000" y="5782192"/>
+            <a:ext cx="6236538" cy="164465"/>
           </a:xfrm>
           <a:prstGeom prst="rect">
             <a:avLst/>
@@ -5442,7 +5506,7 @@
                 </a:solidFill>
                 <a:latin typeface="Arial"/>
               </a:rPr>
-              <a:t>layouter"</a:t>
+              <a:t>into</a:t>
             </a:r>
             <a:r>
               <a:rPr lang="en-US" sz="1400" b="false" i="false" u="none" strike="noStrike" kern="0">
@@ -5460,7 +5524,7 @@
                 </a:solidFill>
                 <a:latin typeface="Arial"/>
               </a:rPr>
-              <a:t>into</a:t>
+              <a:t>a</a:t>
             </a:r>
             <a:r>
               <a:rPr lang="en-US" sz="1400" b="false" i="false" u="none" strike="noStrike" kern="0">
@@ -5478,7 +5542,7 @@
                 </a:solidFill>
                 <a:latin typeface="Arial"/>
               </a:rPr>
-              <a:t>a</a:t>
+              <a:t>designed-document</a:t>
             </a:r>
             <a:r>
               <a:rPr lang="en-US" sz="1400" b="false" i="false" u="none" strike="noStrike" kern="0">
@@ -5496,7 +5560,7 @@
                 </a:solidFill>
                 <a:latin typeface="Arial"/>
               </a:rPr>
-              <a:t>designed-document</a:t>
+              <a:t>engine:</a:t>
             </a:r>
             <a:r>
               <a:rPr lang="en-US" sz="1400" b="false" i="false" u="none" strike="noStrike" kern="0">
@@ -5508,13 +5572,76 @@
               <a:t> </a:t>
             </a:r>
             <a:r>
+              <a:rPr lang="en-US" sz="1400" b="true" i="false" u="none" strike="noStrike" kern="0">
+                <a:solidFill>
+                  <a:srgbClr val="000000"/>
+                </a:solidFill>
+                <a:latin typeface="Arial"/>
+              </a:rPr>
+              <a:t>shape-as-container</a:t>
+            </a:r>
+            <a:r>
+              <a:rPr lang="en-US" sz="1400" b="true" i="false" u="none" strike="noStrike" kern="0">
+                <a:solidFill>
+                  <a:srgbClr val="000000"/>
+                </a:solidFill>
+                <a:latin typeface="Arial"/>
+              </a:rPr>
+              <a:t> </a:t>
+            </a:r>
+            <a:r>
+              <a:rPr lang="en-US" sz="1400" b="true" i="false" u="none" strike="noStrike" kern="0">
+                <a:solidFill>
+                  <a:srgbClr val="000000"/>
+                </a:solidFill>
+                <a:latin typeface="Arial"/>
+              </a:rPr>
+              <a:t>with</a:t>
+            </a:r>
+            <a:r>
+              <a:rPr lang="en-US" sz="1400" b="true" i="false" u="none" strike="noStrike" kern="0">
+                <a:solidFill>
+                  <a:srgbClr val="000000"/>
+                </a:solidFill>
+                <a:latin typeface="Arial"/>
+              </a:rPr>
+              <a:t> </a:t>
+            </a:r>
+            <a:r>
+              <a:rPr lang="en-US" sz="1400" b="true" i="false" u="none" strike="noStrike" kern="0">
+                <a:solidFill>
+                  <a:srgbClr val="000000"/>
+                </a:solidFill>
+                <a:latin typeface="Arial"/>
+              </a:rPr>
+              <a:t>clip</a:t>
+            </a:r>
+            <a:r>
+              <a:rPr lang="en-US" sz="1400" b="true" i="false" u="none" strike="noStrike" kern="0">
+                <a:solidFill>
+                  <a:srgbClr val="000000"/>
+                </a:solidFill>
+                <a:latin typeface="Arial"/>
+              </a:rPr>
+              <a:t> </a:t>
+            </a:r>
+            <a:r>
+              <a:rPr lang="en-US" sz="1400" b="true" i="false" u="none" strike="noStrike" kern="0">
+                <a:solidFill>
+                  <a:srgbClr val="000000"/>
+                </a:solidFill>
+                <a:latin typeface="Arial"/>
+              </a:rPr>
+              <a:t>path</a:t>
+            </a:r>
+            <a:r>
               <a:rPr lang="en-US" sz="1400" b="false" i="false" u="none" strike="noStrike" kern="0">
                 <a:solidFill>
                   <a:srgbClr val="000000"/>
                 </a:solidFill>
                 <a:latin typeface="Arial"/>
               </a:rPr>
-              <a:t>engine:</a:t>
+              <a:t>,</a:t>
             </a:r>
             <a:r>
               <a:rPr lang="en-US" sz="1400" b="false" i="false" u="none" strike="noStrike" kern="0">
@@ -5532,7 +5659,7 @@
                 </a:solidFill>
                 <a:latin typeface="Arial"/>
               </a:rPr>
-              <a:t>shape-as-container</a:t>
+              <a:t>rotate</a:t>
             </a:r>
             <a:r>
               <a:rPr lang="en-US" sz="1400" b="true" i="false" u="none" strike="noStrike" kern="0">
@@ -5550,43 +5677,7 @@
                 </a:solidFill>
                 <a:latin typeface="Arial"/>
               </a:rPr>
-              <a:t>with</a:t>
-            </a:r>
-            <a:r>
-              <a:rPr lang="en-US" sz="1400" b="true" i="false" u="none" strike="noStrike" kern="0">
-                <a:solidFill>
-                  <a:srgbClr val="000000"/>
-                </a:solidFill>
-                <a:latin typeface="Arial"/>
-              </a:rPr>
-              <a:t> </a:t>
-            </a:r>
-            <a:r>
-              <a:rPr lang="en-US" sz="1400" b="true" i="false" u="none" strike="noStrike" kern="0">
-                <a:solidFill>
-                  <a:srgbClr val="000000"/>
-                </a:solidFill>
-                <a:latin typeface="Arial"/>
-              </a:rPr>
-              <a:t>clip</a:t>
-            </a:r>
-            <a:r>
-              <a:rPr lang="en-US" sz="1400" b="true" i="false" u="none" strike="noStrike" kern="0">
-                <a:solidFill>
-                  <a:srgbClr val="000000"/>
-                </a:solidFill>
-                <a:latin typeface="Arial"/>
-              </a:rPr>
-              <a:t> </a:t>
-            </a:r>
-            <a:r>
-              <a:rPr lang="en-US" sz="1400" b="true" i="false" u="none" strike="noStrike" kern="0">
-                <a:solidFill>
-                  <a:srgbClr val="000000"/>
-                </a:solidFill>
-                <a:latin typeface="Arial"/>
-              </a:rPr>
-              <a:t>path</a:t>
+              <a:t>/</a:t>
             </a:r>
             <a:endParaRPr lang="en-US" sz="1100"/>
           </a:p>
@@ -5594,14 +5685,14 @@
       </p:sp>
       <p:sp>
         <p:nvSpPr>
-          <p:cNvPr name="GraphCompose Text Line" id="37"/>
+          <p:cNvPr name="GraphCompose Text Line" id="38"/>
           <p:cNvSpPr txBox="true"/>
           <p:nvPr/>
         </p:nvSpPr>
         <p:spPr>
           <a:xfrm>
-            <a:off x="635000" y="5939665"/>
-            <a:ext cx="5787060" cy="164465"/>
+            <a:off x="635000" y="5946657"/>
+            <a:ext cx="5619039" cy="164465"/>
           </a:xfrm>
           <a:prstGeom prst="rect">
             <a:avLst/>
@@ -5626,6 +5717,69 @@
               <a:defRPr/>
             </a:pPr>
             <a:r>
+              <a:rPr lang="en-US" sz="1400" b="true" i="false" u="none" strike="noStrike" kern="0">
+                <a:solidFill>
+                  <a:srgbClr val="000000"/>
+                </a:solidFill>
+                <a:latin typeface="Arial"/>
+              </a:rPr>
+              <a:t>scale</a:t>
+            </a:r>
+            <a:r>
+              <a:rPr lang="en-US" sz="1400" b="true" i="false" u="none" strike="noStrike" kern="0">
+                <a:solidFill>
+                  <a:srgbClr val="000000"/>
+                </a:solidFill>
+                <a:latin typeface="Arial"/>
+              </a:rPr>
+              <a:t> </a:t>
+            </a:r>
+            <a:r>
+              <a:rPr lang="en-US" sz="1400" b="true" i="false" u="none" strike="noStrike" kern="0">
+                <a:solidFill>
+                  <a:srgbClr val="000000"/>
+                </a:solidFill>
+                <a:latin typeface="Arial"/>
+              </a:rPr>
+              <a:t>+</a:t>
+            </a:r>
+            <a:r>
+              <a:rPr lang="en-US" sz="1400" b="true" i="false" u="none" strike="noStrike" kern="0">
+                <a:solidFill>
+                  <a:srgbClr val="000000"/>
+                </a:solidFill>
+                <a:latin typeface="Arial"/>
+              </a:rPr>
+              <a:t> </a:t>
+            </a:r>
+            <a:r>
+              <a:rPr lang="en-US" sz="1400" b="true" i="false" u="none" strike="noStrike" kern="0">
+                <a:solidFill>
+                  <a:srgbClr val="000000"/>
+                </a:solidFill>
+                <a:latin typeface="Arial"/>
+              </a:rPr>
+              <a:t>per-layer</a:t>
+            </a:r>
+            <a:r>
+              <a:rPr lang="en-US" sz="1400" b="true" i="false" u="none" strike="noStrike" kern="0">
+                <a:solidFill>
+                  <a:srgbClr val="000000"/>
+                </a:solidFill>
+                <a:latin typeface="Arial"/>
+              </a:rPr>
+              <a:t> </a:t>
+            </a:r>
+            <a:r>
+              <a:rPr lang="en-US" sz="1400" b="true" i="false" u="none" strike="noStrike" kern="0">
+                <a:solidFill>
+                  <a:srgbClr val="000000"/>
+                </a:solidFill>
+                <a:latin typeface="Arial"/>
+              </a:rPr>
+              <a:t>z-index</a:t>
+            </a:r>
+            <a:r>
               <a:rPr lang="en-US" sz="1400" b="false" i="false" u="none" strike="noStrike" kern="0">
                 <a:solidFill>
                   <a:srgbClr val="000000"/>
@@ -5650,7 +5804,7 @@
                 </a:solidFill>
                 <a:latin typeface="Arial"/>
               </a:rPr>
-              <a:t>rotate</a:t>
+              <a:t>advanced</a:t>
             </a:r>
             <a:r>
               <a:rPr lang="en-US" sz="1400" b="true" i="false" u="none" strike="noStrike" kern="0">
@@ -5668,7 +5822,7 @@
                 </a:solidFill>
                 <a:latin typeface="Arial"/>
               </a:rPr>
-              <a:t>/</a:t>
+              <a:t>tables</a:t>
             </a:r>
             <a:r>
               <a:rPr lang="en-US" sz="1400" b="true" i="false" u="none" strike="noStrike" kern="0">
@@ -5686,7 +5840,7 @@
                 </a:solidFill>
                 <a:latin typeface="Arial"/>
               </a:rPr>
-              <a:t>scale</a:t>
+              <a:t>(row</a:t>
             </a:r>
             <a:r>
               <a:rPr lang="en-US" sz="1400" b="true" i="false" u="none" strike="noStrike" kern="0">
@@ -5704,7 +5858,7 @@
                 </a:solidFill>
                 <a:latin typeface="Arial"/>
               </a:rPr>
-              <a:t>+</a:t>
+              <a:t>span,</a:t>
             </a:r>
             <a:r>
               <a:rPr lang="en-US" sz="1400" b="true" i="false" u="none" strike="noStrike" kern="0">
@@ -5722,7 +5876,7 @@
                 </a:solidFill>
                 <a:latin typeface="Arial"/>
               </a:rPr>
-              <a:t>per-layer</a:t>
+              <a:t>zebra,</a:t>
             </a:r>
             <a:r>
               <a:rPr lang="en-US" sz="1400" b="true" i="false" u="none" strike="noStrike" kern="0">
@@ -5740,106 +5894,7 @@
                 </a:solidFill>
                 <a:latin typeface="Arial"/>
               </a:rPr>
-              <a:t>z-index</a:t>
-            </a:r>
-            <a:r>
-              <a:rPr lang="en-US" sz="1400" b="false" i="false" u="none" strike="noStrike" kern="0">
-                <a:solidFill>
-                  <a:srgbClr val="000000"/>
-                </a:solidFill>
-                <a:latin typeface="Arial"/>
-              </a:rPr>
-              <a:t>,</a:t>
-            </a:r>
-            <a:r>
-              <a:rPr lang="en-US" sz="1400" b="false" i="false" u="none" strike="noStrike" kern="0">
-                <a:solidFill>
-                  <a:srgbClr val="000000"/>
-                </a:solidFill>
-                <a:latin typeface="Arial"/>
-              </a:rPr>
-              <a:t> </a:t>
-            </a:r>
-            <a:r>
-              <a:rPr lang="en-US" sz="1400" b="true" i="false" u="none" strike="noStrike" kern="0">
-                <a:solidFill>
-                  <a:srgbClr val="000000"/>
-                </a:solidFill>
-                <a:latin typeface="Arial"/>
-              </a:rPr>
-              <a:t>advanced</a:t>
-            </a:r>
-            <a:r>
-              <a:rPr lang="en-US" sz="1400" b="true" i="false" u="none" strike="noStrike" kern="0">
-                <a:solidFill>
-                  <a:srgbClr val="000000"/>
-                </a:solidFill>
-                <a:latin typeface="Arial"/>
-              </a:rPr>
-              <a:t> </a:t>
-            </a:r>
-            <a:r>
-              <a:rPr lang="en-US" sz="1400" b="true" i="false" u="none" strike="noStrike" kern="0">
-                <a:solidFill>
-                  <a:srgbClr val="000000"/>
-                </a:solidFill>
-                <a:latin typeface="Arial"/>
-              </a:rPr>
-              <a:t>tables</a:t>
-            </a:r>
-            <a:r>
-              <a:rPr lang="en-US" sz="1400" b="true" i="false" u="none" strike="noStrike" kern="0">
-                <a:solidFill>
-                  <a:srgbClr val="000000"/>
-                </a:solidFill>
-                <a:latin typeface="Arial"/>
-              </a:rPr>
-              <a:t> </a:t>
-            </a:r>
-            <a:r>
-              <a:rPr lang="en-US" sz="1400" b="true" i="false" u="none" strike="noStrike" kern="0">
-                <a:solidFill>
-                  <a:srgbClr val="000000"/>
-                </a:solidFill>
-                <a:latin typeface="Arial"/>
-              </a:rPr>
-              <a:t>(row</a:t>
-            </a:r>
-            <a:r>
-              <a:rPr lang="en-US" sz="1400" b="true" i="false" u="none" strike="noStrike" kern="0">
-                <a:solidFill>
-                  <a:srgbClr val="000000"/>
-                </a:solidFill>
-                <a:latin typeface="Arial"/>
-              </a:rPr>
-              <a:t> </a:t>
-            </a:r>
-            <a:r>
-              <a:rPr lang="en-US" sz="1400" b="true" i="false" u="none" strike="noStrike" kern="0">
-                <a:solidFill>
-                  <a:srgbClr val="000000"/>
-                </a:solidFill>
-                <a:latin typeface="Arial"/>
-              </a:rPr>
-              <a:t>span,</a:t>
-            </a:r>
-            <a:r>
-              <a:rPr lang="en-US" sz="1400" b="true" i="false" u="none" strike="noStrike" kern="0">
-                <a:solidFill>
-                  <a:srgbClr val="000000"/>
-                </a:solidFill>
-                <a:latin typeface="Arial"/>
-              </a:rPr>
-              <a:t> </a:t>
-            </a:r>
-            <a:r>
-              <a:rPr lang="en-US" sz="1400" b="true" i="false" u="none" strike="noStrike" kern="0">
-                <a:solidFill>
-                  <a:srgbClr val="000000"/>
-                </a:solidFill>
-                <a:latin typeface="Arial"/>
-              </a:rPr>
-              <a:t>zebra,</a:t>
+              <a:t>totals,</a:t>
             </a:r>
             <a:endParaRPr lang="en-US" sz="1100"/>
           </a:p>
@@ -5847,14 +5902,14 @@
       </p:sp>
       <p:sp>
         <p:nvSpPr>
-          <p:cNvPr name="GraphCompose Text Line" id="38"/>
+          <p:cNvPr name="GraphCompose Text Line" id="39"/>
           <p:cNvSpPr txBox="true"/>
           <p:nvPr/>
         </p:nvSpPr>
         <p:spPr>
           <a:xfrm>
-            <a:off x="635000" y="6104130"/>
-            <a:ext cx="5811241" cy="164465"/>
+            <a:off x="635000" y="6111122"/>
+            <a:ext cx="5238191" cy="164465"/>
           </a:xfrm>
           <a:prstGeom prst="rect">
             <a:avLst/>
@@ -5885,7 +5940,7 @@
                 </a:solidFill>
                 <a:latin typeface="Arial"/>
               </a:rPr>
-              <a:t>totals,</a:t>
+              <a:t>repeating</a:t>
             </a:r>
             <a:r>
               <a:rPr lang="en-US" sz="1400" b="true" i="false" u="none" strike="noStrike" kern="0">
@@ -5903,12 +5958,111 @@
                 </a:solidFill>
                 <a:latin typeface="Arial"/>
               </a:rPr>
-              <a:t>repeating</a:t>
+              <a:t>header)</a:t>
+            </a:r>
+            <a:r>
+              <a:rPr lang="en-US" sz="1400" b="false" i="false" u="none" strike="noStrike" kern="0">
+                <a:solidFill>
+                  <a:srgbClr val="000000"/>
+                </a:solidFill>
+                <a:latin typeface="Arial"/>
+              </a:rPr>
+              <a:t>,</a:t>
+            </a:r>
+            <a:r>
+              <a:rPr lang="en-US" sz="1400" b="false" i="false" u="none" strike="noStrike" kern="0">
+                <a:solidFill>
+                  <a:srgbClr val="000000"/>
+                </a:solidFill>
+                <a:latin typeface="Arial"/>
+              </a:rPr>
+              <a:t> </a:t>
+            </a:r>
+            <a:r>
+              <a:rPr lang="en-US" sz="1400" b="false" i="false" u="none" strike="noStrike" kern="0">
+                <a:solidFill>
+                  <a:srgbClr val="000000"/>
+                </a:solidFill>
+                <a:latin typeface="Arial"/>
+              </a:rPr>
+              <a:t>and</a:t>
+            </a:r>
+            <a:r>
+              <a:rPr lang="en-US" sz="1400" b="false" i="false" u="none" strike="noStrike" kern="0">
+                <a:solidFill>
+                  <a:srgbClr val="000000"/>
+                </a:solidFill>
+                <a:latin typeface="Arial"/>
+              </a:rPr>
+              <a:t> </a:t>
+            </a:r>
+            <a:r>
+              <a:rPr lang="en-US" sz="1400" b="false" i="false" u="none" strike="noStrike" kern="0">
+                <a:solidFill>
+                  <a:srgbClr val="000000"/>
+                </a:solidFill>
+                <a:latin typeface="Arial"/>
+              </a:rPr>
+              <a:t>two</a:t>
+            </a:r>
+            <a:r>
+              <a:rPr lang="en-US" sz="1400" b="false" i="false" u="none" strike="noStrike" kern="0">
+                <a:solidFill>
+                  <a:srgbClr val="000000"/>
+                </a:solidFill>
+                <a:latin typeface="Arial"/>
+              </a:rPr>
+              <a:t> </a:t>
+            </a:r>
+            <a:r>
+              <a:rPr lang="en-US" sz="1400" b="false" i="false" u="none" strike="noStrike" kern="0">
+                <a:solidFill>
+                  <a:srgbClr val="000000"/>
+                </a:solidFill>
+                <a:latin typeface="Arial"/>
+              </a:rPr>
+              <a:t>cinematic</a:t>
+            </a:r>
+            <a:r>
+              <a:rPr lang="en-US" sz="1400" b="false" i="false" u="none" strike="noStrike" kern="0">
+                <a:solidFill>
+                  <a:srgbClr val="000000"/>
+                </a:solidFill>
+                <a:latin typeface="Arial"/>
+              </a:rPr>
+              <a:t> </a:t>
+            </a:r>
+            <a:r>
+              <a:rPr lang="en-US" sz="1400" b="false" i="false" u="none" strike="noStrike" kern="0">
+                <a:solidFill>
+                  <a:srgbClr val="000000"/>
+                </a:solidFill>
+                <a:latin typeface="Arial"/>
+              </a:rPr>
+              <a:t>templates</a:t>
+            </a:r>
+            <a:r>
+              <a:rPr lang="en-US" sz="1400" b="false" i="false" u="none" strike="noStrike" kern="0">
+                <a:solidFill>
+                  <a:srgbClr val="000000"/>
+                </a:solidFill>
+                <a:latin typeface="Arial"/>
+              </a:rPr>
+              <a:t> </a:t>
             </a:r>
             <a:r>
               <a:rPr lang="en-US" sz="1400" b="true" i="false" u="none" strike="noStrike" kern="0">
                 <a:solidFill>
-                  <a:srgbClr val="000000"/>
+                  <a:srgbClr val="14505F"/>
+                </a:solidFill>
+                <a:latin typeface="Arial"/>
+              </a:rPr>
+              <a:t>ModernInvoice</a:t>
+            </a:r>
+            <a:r>
+              <a:rPr lang="en-US" sz="1400" b="true" i="false" u="none" strike="noStrike" kern="0">
+                <a:solidFill>
+                  <a:srgbClr val="14505F"/>
                 </a:solidFill>
                 <a:latin typeface="Arial"/>
               </a:rPr>
@@ -5917,127 +6071,10 @@
             <a:r>
               <a:rPr lang="en-US" sz="1400" b="true" i="false" u="none" strike="noStrike" kern="0">
                 <a:solidFill>
-                  <a:srgbClr val="000000"/>
-                </a:solidFill>
-                <a:latin typeface="Arial"/>
-              </a:rPr>
-              <a:t>header)</a:t>
-            </a:r>
-            <a:r>
-              <a:rPr lang="en-US" sz="1400" b="false" i="false" u="none" strike="noStrike" kern="0">
-                <a:solidFill>
-                  <a:srgbClr val="000000"/>
-                </a:solidFill>
-                <a:latin typeface="Arial"/>
-              </a:rPr>
-              <a:t>,</a:t>
-            </a:r>
-            <a:r>
-              <a:rPr lang="en-US" sz="1400" b="false" i="false" u="none" strike="noStrike" kern="0">
-                <a:solidFill>
-                  <a:srgbClr val="000000"/>
-                </a:solidFill>
-                <a:latin typeface="Arial"/>
-              </a:rPr>
-              <a:t> </a:t>
-            </a:r>
-            <a:r>
-              <a:rPr lang="en-US" sz="1400" b="false" i="false" u="none" strike="noStrike" kern="0">
-                <a:solidFill>
-                  <a:srgbClr val="000000"/>
-                </a:solidFill>
-                <a:latin typeface="Arial"/>
-              </a:rPr>
-              <a:t>and</a:t>
-            </a:r>
-            <a:r>
-              <a:rPr lang="en-US" sz="1400" b="false" i="false" u="none" strike="noStrike" kern="0">
-                <a:solidFill>
-                  <a:srgbClr val="000000"/>
-                </a:solidFill>
-                <a:latin typeface="Arial"/>
-              </a:rPr>
-              <a:t> </a:t>
-            </a:r>
-            <a:r>
-              <a:rPr lang="en-US" sz="1400" b="false" i="false" u="none" strike="noStrike" kern="0">
-                <a:solidFill>
-                  <a:srgbClr val="000000"/>
-                </a:solidFill>
-                <a:latin typeface="Arial"/>
-              </a:rPr>
-              <a:t>two</a:t>
-            </a:r>
-            <a:r>
-              <a:rPr lang="en-US" sz="1400" b="false" i="false" u="none" strike="noStrike" kern="0">
-                <a:solidFill>
-                  <a:srgbClr val="000000"/>
-                </a:solidFill>
-                <a:latin typeface="Arial"/>
-              </a:rPr>
-              <a:t> </a:t>
-            </a:r>
-            <a:r>
-              <a:rPr lang="en-US" sz="1400" b="false" i="false" u="none" strike="noStrike" kern="0">
-                <a:solidFill>
-                  <a:srgbClr val="000000"/>
-                </a:solidFill>
-                <a:latin typeface="Arial"/>
-              </a:rPr>
-              <a:t>cinematic</a:t>
-            </a:r>
-            <a:r>
-              <a:rPr lang="en-US" sz="1400" b="false" i="false" u="none" strike="noStrike" kern="0">
-                <a:solidFill>
-                  <a:srgbClr val="000000"/>
-                </a:solidFill>
-                <a:latin typeface="Arial"/>
-              </a:rPr>
-              <a:t> </a:t>
-            </a:r>
-            <a:r>
-              <a:rPr lang="en-US" sz="1400" b="false" i="false" u="none" strike="noStrike" kern="0">
-                <a:solidFill>
-                  <a:srgbClr val="000000"/>
-                </a:solidFill>
-                <a:latin typeface="Arial"/>
-              </a:rPr>
-              <a:t>templates</a:t>
-            </a:r>
-            <a:r>
-              <a:rPr lang="en-US" sz="1400" b="false" i="false" u="none" strike="noStrike" kern="0">
-                <a:solidFill>
-                  <a:srgbClr val="000000"/>
-                </a:solidFill>
-                <a:latin typeface="Arial"/>
-              </a:rPr>
-              <a:t> </a:t>
-            </a:r>
-            <a:r>
-              <a:rPr lang="en-US" sz="1400" b="true" i="false" u="none" strike="noStrike" kern="0">
-                <a:solidFill>
                   <a:srgbClr val="14505F"/>
                 </a:solidFill>
                 <a:latin typeface="Arial"/>
               </a:rPr>
-              <a:t>ModernInvoice</a:t>
-            </a:r>
-            <a:r>
-              <a:rPr lang="en-US" sz="1400" b="true" i="false" u="none" strike="noStrike" kern="0">
-                <a:solidFill>
-                  <a:srgbClr val="14505F"/>
-                </a:solidFill>
-                <a:latin typeface="Arial"/>
-              </a:rPr>
-              <a:t> </a:t>
-            </a:r>
-            <a:r>
-              <a:rPr lang="en-US" sz="1400" b="true" i="false" u="none" strike="noStrike" kern="0">
-                <a:solidFill>
-                  <a:srgbClr val="14505F"/>
-                </a:solidFill>
-                <a:latin typeface="Arial"/>
-              </a:rPr>
               <a:t>/</a:t>
             </a:r>
             <a:endParaRPr lang="en-US" sz="1100"/>
@@ -6046,13 +6083,13 @@
       </p:sp>
       <p:sp>
         <p:nvSpPr>
-          <p:cNvPr name="GraphCompose Text Line" id="39"/>
+          <p:cNvPr name="GraphCompose Text Line" id="40"/>
           <p:cNvSpPr txBox="true"/>
           <p:nvPr/>
         </p:nvSpPr>
         <p:spPr>
           <a:xfrm>
-            <a:off x="635000" y="6268595"/>
+            <a:off x="635000" y="6275587"/>
             <a:ext cx="3360445" cy="164465"/>
           </a:xfrm>
           <a:prstGeom prst="rect">
@@ -6155,13 +6192,13 @@
       </p:sp>
       <p:sp>
         <p:nvSpPr>
-          <p:cNvPr name="GraphCompose Text Line" id="40"/>
+          <p:cNvPr name="GraphCompose Text Line" id="41"/>
           <p:cNvSpPr txBox="true"/>
           <p:nvPr/>
         </p:nvSpPr>
         <p:spPr>
           <a:xfrm>
-            <a:off x="431800" y="6806925"/>
+            <a:off x="431800" y="6813917"/>
             <a:ext cx="1932927" cy="199708"/>
           </a:xfrm>
           <a:prstGeom prst="rect">
@@ -6201,13 +6238,13 @@
       </p:sp>
       <p:sp>
         <p:nvSpPr>
-          <p:cNvPr name="GraphCompose Text Line" id="41"/>
+          <p:cNvPr name="GraphCompose Text Line" id="42"/>
           <p:cNvSpPr txBox="true"/>
           <p:nvPr/>
         </p:nvSpPr>
         <p:spPr>
           <a:xfrm>
-            <a:off x="431800" y="7102811"/>
+            <a:off x="431800" y="7109802"/>
             <a:ext cx="6102190" cy="101029"/>
           </a:xfrm>
           <a:prstGeom prst="rect">
@@ -6247,13 +6284,13 @@
       </p:sp>
       <p:sp>
         <p:nvSpPr>
-          <p:cNvPr name="GraphCompose Table Cell Fill" id="42"/>
+          <p:cNvPr name="GraphCompose Table Cell Fill" id="43"/>
           <p:cNvSpPr/>
           <p:nvPr/>
         </p:nvSpPr>
         <p:spPr>
           <a:xfrm>
-            <a:off x="431800" y="7478294"/>
+            <a:off x="431800" y="7485285"/>
             <a:ext cx="762000" cy="314801"/>
           </a:xfrm>
           <a:prstGeom prst="rect">
@@ -6269,13 +6306,13 @@
       </p:sp>
       <p:sp>
         <p:nvSpPr>
-          <p:cNvPr name="GraphCompose Table Cell Fill" id="43"/>
+          <p:cNvPr name="GraphCompose Table Cell Fill" id="44"/>
           <p:cNvSpPr/>
           <p:nvPr/>
         </p:nvSpPr>
         <p:spPr>
           <a:xfrm>
-            <a:off x="1193800" y="7478294"/>
+            <a:off x="1193800" y="7485285"/>
             <a:ext cx="2219928" cy="314801"/>
           </a:xfrm>
           <a:prstGeom prst="rect">
@@ -6291,13 +6328,13 @@
       </p:sp>
       <p:sp>
         <p:nvSpPr>
-          <p:cNvPr name="GraphCompose Table Cell Fill" id="44"/>
+          <p:cNvPr name="GraphCompose Table Cell Fill" id="45"/>
           <p:cNvSpPr/>
           <p:nvPr/>
         </p:nvSpPr>
         <p:spPr>
           <a:xfrm>
-            <a:off x="3413728" y="7478294"/>
+            <a:off x="3413728" y="7485285"/>
             <a:ext cx="1016000" cy="314801"/>
           </a:xfrm>
           <a:prstGeom prst="rect">
@@ -6313,13 +6350,13 @@
       </p:sp>
       <p:sp>
         <p:nvSpPr>
-          <p:cNvPr name="GraphCompose Table Cell Fill" id="45"/>
+          <p:cNvPr name="GraphCompose Table Cell Fill" id="46"/>
           <p:cNvSpPr/>
           <p:nvPr/>
         </p:nvSpPr>
         <p:spPr>
           <a:xfrm>
-            <a:off x="4429728" y="7478294"/>
+            <a:off x="4429728" y="7485285"/>
             <a:ext cx="1016000" cy="314801"/>
           </a:xfrm>
           <a:prstGeom prst="rect">
@@ -6335,13 +6372,13 @@
       </p:sp>
       <p:sp>
         <p:nvSpPr>
-          <p:cNvPr name="GraphCompose Table Cell Fill" id="46"/>
+          <p:cNvPr name="GraphCompose Table Cell Fill" id="47"/>
           <p:cNvSpPr/>
           <p:nvPr/>
         </p:nvSpPr>
         <p:spPr>
           <a:xfrm>
-            <a:off x="5445728" y="7478294"/>
+            <a:off x="5445728" y="7485285"/>
             <a:ext cx="1016000" cy="314801"/>
           </a:xfrm>
           <a:prstGeom prst="rect">
@@ -6357,13 +6394,13 @@
       </p:sp>
       <p:sp>
         <p:nvSpPr>
-          <p:cNvPr name="GraphCompose Table Cell Fill" id="47"/>
+          <p:cNvPr name="GraphCompose Table Cell Fill" id="48"/>
           <p:cNvSpPr/>
           <p:nvPr/>
         </p:nvSpPr>
         <p:spPr>
           <a:xfrm>
-            <a:off x="431800" y="7793095"/>
+            <a:off x="431800" y="7800086"/>
             <a:ext cx="762000" cy="289401"/>
           </a:xfrm>
           <a:prstGeom prst="rect">
@@ -6379,13 +6416,13 @@
       </p:sp>
       <p:sp>
         <p:nvSpPr>
-          <p:cNvPr name="GraphCompose Table Cell Fill" id="48"/>
+          <p:cNvPr name="GraphCompose Table Cell Fill" id="49"/>
           <p:cNvSpPr/>
           <p:nvPr/>
         </p:nvSpPr>
         <p:spPr>
           <a:xfrm>
-            <a:off x="1193800" y="7793095"/>
+            <a:off x="1193800" y="7800086"/>
             <a:ext cx="2219928" cy="289401"/>
           </a:xfrm>
           <a:prstGeom prst="rect">
@@ -6401,13 +6438,13 @@
       </p:sp>
       <p:sp>
         <p:nvSpPr>
-          <p:cNvPr name="GraphCompose Table Cell Fill" id="49"/>
+          <p:cNvPr name="GraphCompose Table Cell Fill" id="50"/>
           <p:cNvSpPr/>
           <p:nvPr/>
         </p:nvSpPr>
         <p:spPr>
           <a:xfrm>
-            <a:off x="3413728" y="7793095"/>
+            <a:off x="3413728" y="7800086"/>
             <a:ext cx="1016000" cy="289401"/>
           </a:xfrm>
           <a:prstGeom prst="rect">
@@ -6423,13 +6460,13 @@
       </p:sp>
       <p:sp>
         <p:nvSpPr>
-          <p:cNvPr name="GraphCompose Table Cell Fill" id="50"/>
+          <p:cNvPr name="GraphCompose Table Cell Fill" id="51"/>
           <p:cNvSpPr/>
           <p:nvPr/>
         </p:nvSpPr>
         <p:spPr>
           <a:xfrm>
-            <a:off x="4429728" y="7793095"/>
+            <a:off x="4429728" y="7800086"/>
             <a:ext cx="1016000" cy="289401"/>
           </a:xfrm>
           <a:prstGeom prst="rect">
@@ -6445,13 +6482,13 @@
       </p:sp>
       <p:sp>
         <p:nvSpPr>
-          <p:cNvPr name="GraphCompose Table Cell Fill" id="51"/>
+          <p:cNvPr name="GraphCompose Table Cell Fill" id="52"/>
           <p:cNvSpPr/>
           <p:nvPr/>
         </p:nvSpPr>
         <p:spPr>
           <a:xfrm>
-            <a:off x="5445728" y="7793095"/>
+            <a:off x="5445728" y="7800086"/>
             <a:ext cx="1016000" cy="289401"/>
           </a:xfrm>
           <a:prstGeom prst="rect">
@@ -6467,13 +6504,13 @@
       </p:sp>
       <p:sp>
         <p:nvSpPr>
-          <p:cNvPr name="GraphCompose Table Cell Fill" id="52"/>
+          <p:cNvPr name="GraphCompose Table Cell Fill" id="53"/>
           <p:cNvSpPr/>
           <p:nvPr/>
         </p:nvSpPr>
         <p:spPr>
           <a:xfrm>
-            <a:off x="431800" y="8082496"/>
+            <a:off x="431800" y="8089487"/>
             <a:ext cx="762000" cy="289401"/>
           </a:xfrm>
           <a:prstGeom prst="rect">
@@ -6489,13 +6526,13 @@
       </p:sp>
       <p:sp>
         <p:nvSpPr>
-          <p:cNvPr name="GraphCompose Table Cell Fill" id="53"/>
+          <p:cNvPr name="GraphCompose Table Cell Fill" id="54"/>
           <p:cNvSpPr/>
           <p:nvPr/>
         </p:nvSpPr>
         <p:spPr>
           <a:xfrm>
-            <a:off x="1193800" y="8082496"/>
+            <a:off x="1193800" y="8089487"/>
             <a:ext cx="2219928" cy="289401"/>
           </a:xfrm>
           <a:prstGeom prst="rect">
@@ -6511,13 +6548,13 @@
       </p:sp>
       <p:sp>
         <p:nvSpPr>
-          <p:cNvPr name="GraphCompose Table Cell Fill" id="54"/>
+          <p:cNvPr name="GraphCompose Table Cell Fill" id="55"/>
           <p:cNvSpPr/>
           <p:nvPr/>
         </p:nvSpPr>
         <p:spPr>
           <a:xfrm>
-            <a:off x="3413728" y="8082496"/>
+            <a:off x="3413728" y="8089487"/>
             <a:ext cx="1016000" cy="289401"/>
           </a:xfrm>
           <a:prstGeom prst="rect">
@@ -6533,13 +6570,13 @@
       </p:sp>
       <p:sp>
         <p:nvSpPr>
-          <p:cNvPr name="GraphCompose Table Cell Fill" id="55"/>
+          <p:cNvPr name="GraphCompose Table Cell Fill" id="56"/>
           <p:cNvSpPr/>
           <p:nvPr/>
         </p:nvSpPr>
         <p:spPr>
           <a:xfrm>
-            <a:off x="4429728" y="8082496"/>
+            <a:off x="4429728" y="8089487"/>
             <a:ext cx="1016000" cy="289401"/>
           </a:xfrm>
           <a:prstGeom prst="rect">
@@ -6555,13 +6592,13 @@
       </p:sp>
       <p:sp>
         <p:nvSpPr>
-          <p:cNvPr name="GraphCompose Table Cell Fill" id="56"/>
+          <p:cNvPr name="GraphCompose Table Cell Fill" id="57"/>
           <p:cNvSpPr/>
           <p:nvPr/>
         </p:nvSpPr>
         <p:spPr>
           <a:xfrm>
-            <a:off x="5445728" y="8082496"/>
+            <a:off x="5445728" y="8089487"/>
             <a:ext cx="1016000" cy="289401"/>
           </a:xfrm>
           <a:prstGeom prst="rect">
@@ -6577,13 +6614,13 @@
       </p:sp>
       <p:sp>
         <p:nvSpPr>
-          <p:cNvPr name="GraphCompose Table Cell Fill" id="57"/>
+          <p:cNvPr name="GraphCompose Table Cell Fill" id="58"/>
           <p:cNvSpPr/>
           <p:nvPr/>
         </p:nvSpPr>
         <p:spPr>
           <a:xfrm>
-            <a:off x="431800" y="8371897"/>
+            <a:off x="431800" y="8378889"/>
             <a:ext cx="762000" cy="289401"/>
           </a:xfrm>
           <a:prstGeom prst="rect">
@@ -6599,13 +6636,13 @@
       </p:sp>
       <p:sp>
         <p:nvSpPr>
-          <p:cNvPr name="GraphCompose Table Cell Fill" id="58"/>
+          <p:cNvPr name="GraphCompose Table Cell Fill" id="59"/>
           <p:cNvSpPr/>
           <p:nvPr/>
         </p:nvSpPr>
         <p:spPr>
           <a:xfrm>
-            <a:off x="1193800" y="8371897"/>
+            <a:off x="1193800" y="8378889"/>
             <a:ext cx="2219928" cy="289401"/>
           </a:xfrm>
           <a:prstGeom prst="rect">
@@ -6621,13 +6658,13 @@
       </p:sp>
       <p:sp>
         <p:nvSpPr>
-          <p:cNvPr name="GraphCompose Table Cell Fill" id="59"/>
+          <p:cNvPr name="GraphCompose Table Cell Fill" id="60"/>
           <p:cNvSpPr/>
           <p:nvPr/>
         </p:nvSpPr>
         <p:spPr>
           <a:xfrm>
-            <a:off x="3413728" y="8371897"/>
+            <a:off x="3413728" y="8378889"/>
             <a:ext cx="1016000" cy="289401"/>
           </a:xfrm>
           <a:prstGeom prst="rect">
@@ -6643,13 +6680,13 @@
       </p:sp>
       <p:sp>
         <p:nvSpPr>
-          <p:cNvPr name="GraphCompose Table Cell Fill" id="60"/>
+          <p:cNvPr name="GraphCompose Table Cell Fill" id="61"/>
           <p:cNvSpPr/>
           <p:nvPr/>
         </p:nvSpPr>
         <p:spPr>
           <a:xfrm>
-            <a:off x="4429728" y="8371897"/>
+            <a:off x="4429728" y="8378889"/>
             <a:ext cx="1016000" cy="289401"/>
           </a:xfrm>
           <a:prstGeom prst="rect">
@@ -6665,13 +6702,13 @@
       </p:sp>
       <p:sp>
         <p:nvSpPr>
-          <p:cNvPr name="GraphCompose Table Cell Fill" id="61"/>
+          <p:cNvPr name="GraphCompose Table Cell Fill" id="62"/>
           <p:cNvSpPr/>
           <p:nvPr/>
         </p:nvSpPr>
         <p:spPr>
           <a:xfrm>
-            <a:off x="5445728" y="8371897"/>
+            <a:off x="5445728" y="8378889"/>
             <a:ext cx="1016000" cy="289401"/>
           </a:xfrm>
           <a:prstGeom prst="rect">
@@ -6687,13 +6724,13 @@
       </p:sp>
       <p:sp>
         <p:nvSpPr>
-          <p:cNvPr name="GraphCompose Table Cell Fill" id="62"/>
+          <p:cNvPr name="GraphCompose Table Cell Fill" id="63"/>
           <p:cNvSpPr/>
           <p:nvPr/>
         </p:nvSpPr>
         <p:spPr>
           <a:xfrm>
-            <a:off x="431800" y="8661298"/>
+            <a:off x="431800" y="8668290"/>
             <a:ext cx="762000" cy="289401"/>
           </a:xfrm>
           <a:prstGeom prst="rect">
@@ -6709,13 +6746,13 @@
       </p:sp>
       <p:sp>
         <p:nvSpPr>
-          <p:cNvPr name="GraphCompose Table Cell Fill" id="63"/>
+          <p:cNvPr name="GraphCompose Table Cell Fill" id="64"/>
           <p:cNvSpPr/>
           <p:nvPr/>
         </p:nvSpPr>
         <p:spPr>
           <a:xfrm>
-            <a:off x="1193800" y="8661298"/>
+            <a:off x="1193800" y="8668290"/>
             <a:ext cx="2219928" cy="289401"/>
           </a:xfrm>
           <a:prstGeom prst="rect">
@@ -6731,13 +6768,13 @@
       </p:sp>
       <p:sp>
         <p:nvSpPr>
-          <p:cNvPr name="GraphCompose Table Cell Fill" id="64"/>
+          <p:cNvPr name="GraphCompose Table Cell Fill" id="65"/>
           <p:cNvSpPr/>
           <p:nvPr/>
         </p:nvSpPr>
         <p:spPr>
           <a:xfrm>
-            <a:off x="3413728" y="8661298"/>
+            <a:off x="3413728" y="8668290"/>
             <a:ext cx="1016000" cy="289401"/>
           </a:xfrm>
           <a:prstGeom prst="rect">
@@ -6753,13 +6790,13 @@
       </p:sp>
       <p:sp>
         <p:nvSpPr>
-          <p:cNvPr name="GraphCompose Table Cell Fill" id="65"/>
+          <p:cNvPr name="GraphCompose Table Cell Fill" id="66"/>
           <p:cNvSpPr/>
           <p:nvPr/>
         </p:nvSpPr>
         <p:spPr>
           <a:xfrm>
-            <a:off x="4429728" y="8661298"/>
+            <a:off x="4429728" y="8668290"/>
             <a:ext cx="1016000" cy="289401"/>
           </a:xfrm>
           <a:prstGeom prst="rect">
@@ -6775,13 +6812,13 @@
       </p:sp>
       <p:sp>
         <p:nvSpPr>
-          <p:cNvPr name="GraphCompose Table Cell Fill" id="66"/>
+          <p:cNvPr name="GraphCompose Table Cell Fill" id="67"/>
           <p:cNvSpPr/>
           <p:nvPr/>
         </p:nvSpPr>
         <p:spPr>
           <a:xfrm>
-            <a:off x="5445728" y="8661298"/>
+            <a:off x="5445728" y="8668290"/>
             <a:ext cx="1016000" cy="289401"/>
           </a:xfrm>
           <a:prstGeom prst="rect">
@@ -6797,13 +6834,13 @@
       </p:sp>
       <p:sp>
         <p:nvSpPr>
-          <p:cNvPr name="GraphCompose Table Cell Fill" id="67"/>
+          <p:cNvPr name="GraphCompose Table Cell Fill" id="68"/>
           <p:cNvSpPr/>
           <p:nvPr/>
         </p:nvSpPr>
         <p:spPr>
           <a:xfrm>
-            <a:off x="431800" y="8950700"/>
+            <a:off x="431800" y="8957691"/>
             <a:ext cx="762000" cy="289401"/>
           </a:xfrm>
           <a:prstGeom prst="rect">
@@ -6819,13 +6856,13 @@
       </p:sp>
       <p:sp>
         <p:nvSpPr>
-          <p:cNvPr name="GraphCompose Table Cell Fill" id="68"/>
+          <p:cNvPr name="GraphCompose Table Cell Fill" id="69"/>
           <p:cNvSpPr/>
           <p:nvPr/>
         </p:nvSpPr>
         <p:spPr>
           <a:xfrm>
-            <a:off x="1193800" y="8950700"/>
+            <a:off x="1193800" y="8957691"/>
             <a:ext cx="2219928" cy="289401"/>
           </a:xfrm>
           <a:prstGeom prst="rect">
@@ -6841,13 +6878,13 @@
       </p:sp>
       <p:sp>
         <p:nvSpPr>
-          <p:cNvPr name="GraphCompose Table Cell Fill" id="69"/>
+          <p:cNvPr name="GraphCompose Table Cell Fill" id="70"/>
           <p:cNvSpPr/>
           <p:nvPr/>
         </p:nvSpPr>
         <p:spPr>
           <a:xfrm>
-            <a:off x="3413728" y="8950700"/>
+            <a:off x="3413728" y="8957691"/>
             <a:ext cx="1016000" cy="289401"/>
           </a:xfrm>
           <a:prstGeom prst="rect">
@@ -6863,13 +6900,13 @@
       </p:sp>
       <p:sp>
         <p:nvSpPr>
-          <p:cNvPr name="GraphCompose Table Cell Fill" id="70"/>
+          <p:cNvPr name="GraphCompose Table Cell Fill" id="71"/>
           <p:cNvSpPr/>
           <p:nvPr/>
         </p:nvSpPr>
         <p:spPr>
           <a:xfrm>
-            <a:off x="4429728" y="8950700"/>
+            <a:off x="4429728" y="8957691"/>
             <a:ext cx="1016000" cy="289401"/>
           </a:xfrm>
           <a:prstGeom prst="rect">
@@ -6885,13 +6922,13 @@
       </p:sp>
       <p:sp>
         <p:nvSpPr>
-          <p:cNvPr name="GraphCompose Table Cell Fill" id="71"/>
+          <p:cNvPr name="GraphCompose Table Cell Fill" id="72"/>
           <p:cNvSpPr/>
           <p:nvPr/>
         </p:nvSpPr>
         <p:spPr>
           <a:xfrm>
-            <a:off x="5445728" y="8950700"/>
+            <a:off x="5445728" y="8957691"/>
             <a:ext cx="1016000" cy="289401"/>
           </a:xfrm>
           <a:prstGeom prst="rect">
@@ -6907,13 +6944,13 @@
       </p:sp>
       <p:sp>
         <p:nvSpPr>
-          <p:cNvPr name="GraphCompose Table Cell Fill" id="72"/>
+          <p:cNvPr name="GraphCompose Table Cell Fill" id="73"/>
           <p:cNvSpPr/>
           <p:nvPr/>
         </p:nvSpPr>
         <p:spPr>
           <a:xfrm>
-            <a:off x="431800" y="9240101"/>
+            <a:off x="431800" y="9247092"/>
             <a:ext cx="762000" cy="289401"/>
           </a:xfrm>
           <a:prstGeom prst="rect">
@@ -6929,13 +6966,13 @@
       </p:sp>
       <p:sp>
         <p:nvSpPr>
-          <p:cNvPr name="GraphCompose Table Cell Fill" id="73"/>
+          <p:cNvPr name="GraphCompose Table Cell Fill" id="74"/>
           <p:cNvSpPr/>
           <p:nvPr/>
         </p:nvSpPr>
         <p:spPr>
           <a:xfrm>
-            <a:off x="1193800" y="9240101"/>
+            <a:off x="1193800" y="9247092"/>
             <a:ext cx="2219928" cy="289401"/>
           </a:xfrm>
           <a:prstGeom prst="rect">
@@ -6951,13 +6988,13 @@
       </p:sp>
       <p:sp>
         <p:nvSpPr>
-          <p:cNvPr name="GraphCompose Table Cell Fill" id="74"/>
+          <p:cNvPr name="GraphCompose Table Cell Fill" id="75"/>
           <p:cNvSpPr/>
           <p:nvPr/>
         </p:nvSpPr>
         <p:spPr>
           <a:xfrm>
-            <a:off x="3413728" y="9240101"/>
+            <a:off x="3413728" y="9247092"/>
             <a:ext cx="1016000" cy="289401"/>
           </a:xfrm>
           <a:prstGeom prst="rect">
@@ -6973,13 +7010,13 @@
       </p:sp>
       <p:sp>
         <p:nvSpPr>
-          <p:cNvPr name="GraphCompose Table Cell Fill" id="75"/>
+          <p:cNvPr name="GraphCompose Table Cell Fill" id="76"/>
           <p:cNvSpPr/>
           <p:nvPr/>
         </p:nvSpPr>
         <p:spPr>
           <a:xfrm>
-            <a:off x="4429728" y="9240101"/>
+            <a:off x="4429728" y="9247092"/>
             <a:ext cx="1016000" cy="289401"/>
           </a:xfrm>
           <a:prstGeom prst="rect">
@@ -6995,13 +7032,13 @@
       </p:sp>
       <p:sp>
         <p:nvSpPr>
-          <p:cNvPr name="GraphCompose Table Cell Fill" id="76"/>
+          <p:cNvPr name="GraphCompose Table Cell Fill" id="77"/>
           <p:cNvSpPr/>
           <p:nvPr/>
         </p:nvSpPr>
         <p:spPr>
           <a:xfrm>
-            <a:off x="5445728" y="9240101"/>
+            <a:off x="5445728" y="9247092"/>
             <a:ext cx="1016000" cy="289401"/>
           </a:xfrm>
           <a:prstGeom prst="rect">
@@ -7017,13 +7054,13 @@
       </p:sp>
       <p:sp>
         <p:nvSpPr>
-          <p:cNvPr name="GraphCompose Table Cell Fill" id="77"/>
+          <p:cNvPr name="GraphCompose Table Cell Fill" id="78"/>
           <p:cNvSpPr/>
           <p:nvPr/>
         </p:nvSpPr>
         <p:spPr>
           <a:xfrm>
-            <a:off x="431800" y="9529502"/>
+            <a:off x="431800" y="9536494"/>
             <a:ext cx="762000" cy="289401"/>
           </a:xfrm>
           <a:prstGeom prst="rect">
@@ -7039,13 +7076,13 @@
       </p:sp>
       <p:sp>
         <p:nvSpPr>
-          <p:cNvPr name="GraphCompose Table Cell Fill" id="78"/>
+          <p:cNvPr name="GraphCompose Table Cell Fill" id="79"/>
           <p:cNvSpPr/>
           <p:nvPr/>
         </p:nvSpPr>
         <p:spPr>
           <a:xfrm>
-            <a:off x="1193800" y="9529502"/>
+            <a:off x="1193800" y="9536494"/>
             <a:ext cx="2219928" cy="289401"/>
           </a:xfrm>
           <a:prstGeom prst="rect">
@@ -7061,13 +7098,13 @@
       </p:sp>
       <p:sp>
         <p:nvSpPr>
-          <p:cNvPr name="GraphCompose Table Cell Fill" id="79"/>
+          <p:cNvPr name="GraphCompose Table Cell Fill" id="80"/>
           <p:cNvSpPr/>
           <p:nvPr/>
         </p:nvSpPr>
         <p:spPr>
           <a:xfrm>
-            <a:off x="3413728" y="9529502"/>
+            <a:off x="3413728" y="9536494"/>
             <a:ext cx="1016000" cy="289401"/>
           </a:xfrm>
           <a:prstGeom prst="rect">
@@ -7083,13 +7120,13 @@
       </p:sp>
       <p:sp>
         <p:nvSpPr>
-          <p:cNvPr name="GraphCompose Table Cell Fill" id="80"/>
+          <p:cNvPr name="GraphCompose Table Cell Fill" id="81"/>
           <p:cNvSpPr/>
           <p:nvPr/>
         </p:nvSpPr>
         <p:spPr>
           <a:xfrm>
-            <a:off x="4429728" y="9529502"/>
+            <a:off x="4429728" y="9536494"/>
             <a:ext cx="1016000" cy="289401"/>
           </a:xfrm>
           <a:prstGeom prst="rect">
@@ -7105,13 +7142,13 @@
       </p:sp>
       <p:sp>
         <p:nvSpPr>
-          <p:cNvPr name="GraphCompose Table Cell Fill" id="81"/>
+          <p:cNvPr name="GraphCompose Table Cell Fill" id="82"/>
           <p:cNvSpPr/>
           <p:nvPr/>
         </p:nvSpPr>
         <p:spPr>
           <a:xfrm>
-            <a:off x="5445728" y="9529502"/>
+            <a:off x="5445728" y="9536494"/>
             <a:ext cx="1016000" cy="289401"/>
           </a:xfrm>
           <a:prstGeom prst="rect">
@@ -7127,13 +7164,13 @@
       </p:sp>
       <p:cxnSp>
         <p:nvCxnSpPr>
-          <p:cNvPr name="GraphCompose Table Cell Border" id="82"/>
-          <p:cNvCxnSpPr/>
-          <p:nvPr/>
-        </p:nvCxnSpPr>
-        <p:spPr>
-          <a:xfrm>
-            <a:off x="431800" y="7478294"/>
+          <p:cNvPr name="GraphCompose Table Cell Border" id="83"/>
+          <p:cNvCxnSpPr/>
+          <p:nvPr/>
+        </p:nvCxnSpPr>
+        <p:spPr>
+          <a:xfrm>
+            <a:off x="431800" y="7485285"/>
             <a:ext cx="764540" cy="0"/>
           </a:xfrm>
           <a:prstGeom prst="line">
@@ -7148,13 +7185,13 @@
       </p:cxnSp>
       <p:cxnSp>
         <p:nvCxnSpPr>
-          <p:cNvPr name="GraphCompose Table Cell Border" id="83"/>
-          <p:cNvCxnSpPr/>
-          <p:nvPr/>
-        </p:nvCxnSpPr>
-        <p:spPr>
-          <a:xfrm>
-            <a:off x="431800" y="7793095"/>
+          <p:cNvPr name="GraphCompose Table Cell Border" id="84"/>
+          <p:cNvCxnSpPr/>
+          <p:nvPr/>
+        </p:nvCxnSpPr>
+        <p:spPr>
+          <a:xfrm>
+            <a:off x="431800" y="7800086"/>
             <a:ext cx="764540" cy="0"/>
           </a:xfrm>
           <a:prstGeom prst="line">
@@ -7169,13 +7206,13 @@
       </p:cxnSp>
       <p:cxnSp>
         <p:nvCxnSpPr>
-          <p:cNvPr name="GraphCompose Table Cell Border" id="84"/>
-          <p:cNvCxnSpPr/>
-          <p:nvPr/>
-        </p:nvCxnSpPr>
-        <p:spPr>
-          <a:xfrm>
-            <a:off x="431800" y="7478294"/>
+          <p:cNvPr name="GraphCompose Table Cell Border" id="85"/>
+          <p:cNvCxnSpPr/>
+          <p:nvPr/>
+        </p:nvCxnSpPr>
+        <p:spPr>
+          <a:xfrm>
+            <a:off x="431800" y="7485285"/>
             <a:ext cx="0" cy="314801"/>
           </a:xfrm>
           <a:prstGeom prst="line">
@@ -7190,13 +7227,13 @@
       </p:cxnSp>
       <p:cxnSp>
         <p:nvCxnSpPr>
-          <p:cNvPr name="GraphCompose Table Cell Border" id="85"/>
-          <p:cNvCxnSpPr/>
-          <p:nvPr/>
-        </p:nvCxnSpPr>
-        <p:spPr>
-          <a:xfrm>
-            <a:off x="1193800" y="7478294"/>
+          <p:cNvPr name="GraphCompose Table Cell Border" id="86"/>
+          <p:cNvCxnSpPr/>
+          <p:nvPr/>
+        </p:nvCxnSpPr>
+        <p:spPr>
+          <a:xfrm>
+            <a:off x="1193800" y="7485285"/>
             <a:ext cx="0" cy="314801"/>
           </a:xfrm>
           <a:prstGeom prst="line">
@@ -7211,13 +7248,13 @@
       </p:cxnSp>
       <p:sp>
         <p:nvSpPr>
-          <p:cNvPr name="GraphCompose Table Cell Text" id="86"/>
+          <p:cNvPr name="GraphCompose Table Cell Text" id="87"/>
           <p:cNvSpPr txBox="true"/>
           <p:nvPr/>
         </p:nvSpPr>
         <p:spPr>
           <a:xfrm>
-            <a:off x="546100" y="7557299"/>
+            <a:off x="546100" y="7564290"/>
             <a:ext cx="289624" cy="111601"/>
           </a:xfrm>
           <a:prstGeom prst="rect">
@@ -7234,7 +7271,7 @@
               <a:defRPr/>
             </a:pPr>
             <a:r>
-              <a:rPr lang="en-US" sz="950" b="true" i="false" u="none" strike="noStrike" kern="0">
+              <a:rPr lang="en-US" sz="950" b="false" i="false" u="none" strike="noStrike" kern="0">
                 <a:solidFill>
                   <a:srgbClr val="FFFFFF"/>
                 </a:solidFill>
@@ -7248,13 +7285,13 @@
       </p:sp>
       <p:cxnSp>
         <p:nvCxnSpPr>
-          <p:cNvPr name="GraphCompose Table Cell Border" id="87"/>
-          <p:cNvCxnSpPr/>
-          <p:nvPr/>
-        </p:nvCxnSpPr>
-        <p:spPr>
-          <a:xfrm>
-            <a:off x="1191260" y="7478294"/>
+          <p:cNvPr name="GraphCompose Table Cell Border" id="88"/>
+          <p:cNvCxnSpPr/>
+          <p:nvPr/>
+        </p:nvCxnSpPr>
+        <p:spPr>
+          <a:xfrm>
+            <a:off x="1191260" y="7485285"/>
             <a:ext cx="2225008" cy="0"/>
           </a:xfrm>
           <a:prstGeom prst="line">
@@ -7269,13 +7306,13 @@
       </p:cxnSp>
       <p:cxnSp>
         <p:nvCxnSpPr>
-          <p:cNvPr name="GraphCompose Table Cell Border" id="88"/>
-          <p:cNvCxnSpPr/>
-          <p:nvPr/>
-        </p:nvCxnSpPr>
-        <p:spPr>
-          <a:xfrm>
-            <a:off x="1191260" y="7793095"/>
+          <p:cNvPr name="GraphCompose Table Cell Border" id="89"/>
+          <p:cNvCxnSpPr/>
+          <p:nvPr/>
+        </p:nvCxnSpPr>
+        <p:spPr>
+          <a:xfrm>
+            <a:off x="1191260" y="7800086"/>
             <a:ext cx="2225008" cy="0"/>
           </a:xfrm>
           <a:prstGeom prst="line">
@@ -7290,13 +7327,13 @@
       </p:cxnSp>
       <p:cxnSp>
         <p:nvCxnSpPr>
-          <p:cNvPr name="GraphCompose Table Cell Border" id="89"/>
-          <p:cNvCxnSpPr/>
-          <p:nvPr/>
-        </p:nvCxnSpPr>
-        <p:spPr>
-          <a:xfrm>
-            <a:off x="3413728" y="7478294"/>
+          <p:cNvPr name="GraphCompose Table Cell Border" id="90"/>
+          <p:cNvCxnSpPr/>
+          <p:nvPr/>
+        </p:nvCxnSpPr>
+        <p:spPr>
+          <a:xfrm>
+            <a:off x="3413728" y="7485285"/>
             <a:ext cx="0" cy="314801"/>
           </a:xfrm>
           <a:prstGeom prst="line">
@@ -7311,13 +7348,13 @@
       </p:cxnSp>
       <p:sp>
         <p:nvSpPr>
-          <p:cNvPr name="GraphCompose Table Cell Text" id="90"/>
+          <p:cNvPr name="GraphCompose Table Cell Text" id="91"/>
           <p:cNvSpPr txBox="true"/>
           <p:nvPr/>
         </p:nvSpPr>
         <p:spPr>
           <a:xfrm>
-            <a:off x="1308100" y="7557299"/>
+            <a:off x="1308100" y="7564290"/>
             <a:ext cx="443814" cy="111601"/>
           </a:xfrm>
           <a:prstGeom prst="rect">
@@ -7334,7 +7371,7 @@
               <a:defRPr/>
             </a:pPr>
             <a:r>
-              <a:rPr lang="en-US" sz="950" b="true" i="false" u="none" strike="noStrike" kern="0">
+              <a:rPr lang="en-US" sz="950" b="false" i="false" u="none" strike="noStrike" kern="0">
                 <a:solidFill>
                   <a:srgbClr val="FFFFFF"/>
                 </a:solidFill>
@@ -7348,13 +7385,13 @@
       </p:sp>
       <p:cxnSp>
         <p:nvCxnSpPr>
-          <p:cNvPr name="GraphCompose Table Cell Border" id="91"/>
-          <p:cNvCxnSpPr/>
-          <p:nvPr/>
-        </p:nvCxnSpPr>
-        <p:spPr>
-          <a:xfrm>
-            <a:off x="3411188" y="7478294"/>
+          <p:cNvPr name="GraphCompose Table Cell Border" id="92"/>
+          <p:cNvCxnSpPr/>
+          <p:nvPr/>
+        </p:nvCxnSpPr>
+        <p:spPr>
+          <a:xfrm>
+            <a:off x="3411188" y="7485285"/>
             <a:ext cx="1021080" cy="0"/>
           </a:xfrm>
           <a:prstGeom prst="line">
@@ -7369,13 +7406,13 @@
       </p:cxnSp>
       <p:cxnSp>
         <p:nvCxnSpPr>
-          <p:cNvPr name="GraphCompose Table Cell Border" id="92"/>
-          <p:cNvCxnSpPr/>
-          <p:nvPr/>
-        </p:nvCxnSpPr>
-        <p:spPr>
-          <a:xfrm>
-            <a:off x="3411188" y="7793095"/>
+          <p:cNvPr name="GraphCompose Table Cell Border" id="93"/>
+          <p:cNvCxnSpPr/>
+          <p:nvPr/>
+        </p:nvCxnSpPr>
+        <p:spPr>
+          <a:xfrm>
+            <a:off x="3411188" y="7800086"/>
             <a:ext cx="1021080" cy="0"/>
           </a:xfrm>
           <a:prstGeom prst="line">
@@ -7390,13 +7427,13 @@
       </p:cxnSp>
       <p:cxnSp>
         <p:nvCxnSpPr>
-          <p:cNvPr name="GraphCompose Table Cell Border" id="93"/>
-          <p:cNvCxnSpPr/>
-          <p:nvPr/>
-        </p:nvCxnSpPr>
-        <p:spPr>
-          <a:xfrm>
-            <a:off x="4429728" y="7478294"/>
+          <p:cNvPr name="GraphCompose Table Cell Border" id="94"/>
+          <p:cNvCxnSpPr/>
+          <p:nvPr/>
+        </p:nvCxnSpPr>
+        <p:spPr>
+          <a:xfrm>
+            <a:off x="4429728" y="7485285"/>
             <a:ext cx="0" cy="314801"/>
           </a:xfrm>
           <a:prstGeom prst="line">
@@ -7411,13 +7448,13 @@
       </p:cxnSp>
       <p:sp>
         <p:nvSpPr>
-          <p:cNvPr name="GraphCompose Table Cell Text" id="94"/>
+          <p:cNvPr name="GraphCompose Table Cell Text" id="95"/>
           <p:cNvSpPr txBox="true"/>
           <p:nvPr/>
         </p:nvSpPr>
         <p:spPr>
           <a:xfrm>
-            <a:off x="3528028" y="7557299"/>
+            <a:off x="3528028" y="7564290"/>
             <a:ext cx="323044" cy="111601"/>
           </a:xfrm>
           <a:prstGeom prst="rect">
@@ -7434,7 +7471,7 @@
               <a:defRPr/>
             </a:pPr>
             <a:r>
-              <a:rPr lang="en-US" sz="950" b="true" i="false" u="none" strike="noStrike" kern="0">
+              <a:rPr lang="en-US" sz="950" b="false" i="false" u="none" strike="noStrike" kern="0">
                 <a:solidFill>
                   <a:srgbClr val="FFFFFF"/>
                 </a:solidFill>
@@ -7448,13 +7485,13 @@
       </p:sp>
       <p:cxnSp>
         <p:nvCxnSpPr>
-          <p:cNvPr name="GraphCompose Table Cell Border" id="95"/>
-          <p:cNvCxnSpPr/>
-          <p:nvPr/>
-        </p:nvCxnSpPr>
-        <p:spPr>
-          <a:xfrm>
-            <a:off x="4427188" y="7478294"/>
+          <p:cNvPr name="GraphCompose Table Cell Border" id="96"/>
+          <p:cNvCxnSpPr/>
+          <p:nvPr/>
+        </p:nvCxnSpPr>
+        <p:spPr>
+          <a:xfrm>
+            <a:off x="4427188" y="7485285"/>
             <a:ext cx="1021080" cy="0"/>
           </a:xfrm>
           <a:prstGeom prst="line">
@@ -7469,13 +7506,13 @@
       </p:cxnSp>
       <p:cxnSp>
         <p:nvCxnSpPr>
-          <p:cNvPr name="GraphCompose Table Cell Border" id="96"/>
-          <p:cNvCxnSpPr/>
-          <p:nvPr/>
-        </p:nvCxnSpPr>
-        <p:spPr>
-          <a:xfrm>
-            <a:off x="4427188" y="7793095"/>
+          <p:cNvPr name="GraphCompose Table Cell Border" id="97"/>
+          <p:cNvCxnSpPr/>
+          <p:nvPr/>
+        </p:nvCxnSpPr>
+        <p:spPr>
+          <a:xfrm>
+            <a:off x="4427188" y="7800086"/>
             <a:ext cx="1021080" cy="0"/>
           </a:xfrm>
           <a:prstGeom prst="line">
@@ -7490,13 +7527,13 @@
       </p:cxnSp>
       <p:cxnSp>
         <p:nvCxnSpPr>
-          <p:cNvPr name="GraphCompose Table Cell Border" id="97"/>
-          <p:cNvCxnSpPr/>
-          <p:nvPr/>
-        </p:nvCxnSpPr>
-        <p:spPr>
-          <a:xfrm>
-            <a:off x="5445728" y="7478294"/>
+          <p:cNvPr name="GraphCompose Table Cell Border" id="98"/>
+          <p:cNvCxnSpPr/>
+          <p:nvPr/>
+        </p:nvCxnSpPr>
+        <p:spPr>
+          <a:xfrm>
+            <a:off x="5445728" y="7485285"/>
             <a:ext cx="0" cy="314801"/>
           </a:xfrm>
           <a:prstGeom prst="line">
@@ -7511,13 +7548,13 @@
       </p:cxnSp>
       <p:sp>
         <p:nvSpPr>
-          <p:cNvPr name="GraphCompose Table Cell Text" id="98"/>
+          <p:cNvPr name="GraphCompose Table Cell Text" id="99"/>
           <p:cNvSpPr txBox="true"/>
           <p:nvPr/>
         </p:nvSpPr>
         <p:spPr>
           <a:xfrm>
-            <a:off x="4544028" y="7557299"/>
+            <a:off x="4544028" y="7564290"/>
             <a:ext cx="356584" cy="111601"/>
           </a:xfrm>
           <a:prstGeom prst="rect">
@@ -7534,7 +7571,7 @@
               <a:defRPr/>
             </a:pPr>
             <a:r>
-              <a:rPr lang="en-US" sz="950" b="true" i="false" u="none" strike="noStrike" kern="0">
+              <a:rPr lang="en-US" sz="950" b="false" i="false" u="none" strike="noStrike" kern="0">
                 <a:solidFill>
                   <a:srgbClr val="FFFFFF"/>
                 </a:solidFill>
@@ -7548,13 +7585,13 @@
       </p:sp>
       <p:cxnSp>
         <p:nvCxnSpPr>
-          <p:cNvPr name="GraphCompose Table Cell Border" id="99"/>
-          <p:cNvCxnSpPr/>
-          <p:nvPr/>
-        </p:nvCxnSpPr>
-        <p:spPr>
-          <a:xfrm>
-            <a:off x="5443188" y="7478294"/>
+          <p:cNvPr name="GraphCompose Table Cell Border" id="100"/>
+          <p:cNvCxnSpPr/>
+          <p:nvPr/>
+        </p:nvCxnSpPr>
+        <p:spPr>
+          <a:xfrm>
+            <a:off x="5443188" y="7485285"/>
             <a:ext cx="1018540" cy="0"/>
           </a:xfrm>
           <a:prstGeom prst="line">
@@ -7569,13 +7606,13 @@
       </p:cxnSp>
       <p:cxnSp>
         <p:nvCxnSpPr>
-          <p:cNvPr name="GraphCompose Table Cell Border" id="100"/>
-          <p:cNvCxnSpPr/>
-          <p:nvPr/>
-        </p:nvCxnSpPr>
-        <p:spPr>
-          <a:xfrm>
-            <a:off x="5443188" y="7793095"/>
+          <p:cNvPr name="GraphCompose Table Cell Border" id="101"/>
+          <p:cNvCxnSpPr/>
+          <p:nvPr/>
+        </p:nvCxnSpPr>
+        <p:spPr>
+          <a:xfrm>
+            <a:off x="5443188" y="7800086"/>
             <a:ext cx="1018540" cy="0"/>
           </a:xfrm>
           <a:prstGeom prst="line">
@@ -7590,13 +7627,13 @@
       </p:cxnSp>
       <p:cxnSp>
         <p:nvCxnSpPr>
-          <p:cNvPr name="GraphCompose Table Cell Border" id="101"/>
-          <p:cNvCxnSpPr/>
-          <p:nvPr/>
-        </p:nvCxnSpPr>
-        <p:spPr>
-          <a:xfrm>
-            <a:off x="6461728" y="7478294"/>
+          <p:cNvPr name="GraphCompose Table Cell Border" id="102"/>
+          <p:cNvCxnSpPr/>
+          <p:nvPr/>
+        </p:nvCxnSpPr>
+        <p:spPr>
+          <a:xfrm>
+            <a:off x="6461728" y="7485285"/>
             <a:ext cx="0" cy="314801"/>
           </a:xfrm>
           <a:prstGeom prst="line">
@@ -7611,13 +7648,13 @@
       </p:cxnSp>
       <p:sp>
         <p:nvSpPr>
-          <p:cNvPr name="GraphCompose Table Cell Text" id="102"/>
+          <p:cNvPr name="GraphCompose Table Cell Text" id="103"/>
           <p:cNvSpPr txBox="true"/>
           <p:nvPr/>
         </p:nvSpPr>
         <p:spPr>
           <a:xfrm>
-            <a:off x="5560028" y="7557299"/>
+            <a:off x="5560028" y="7564290"/>
             <a:ext cx="417030" cy="111601"/>
           </a:xfrm>
           <a:prstGeom prst="rect">
@@ -7634,7 +7671,7 @@
               <a:defRPr/>
             </a:pPr>
             <a:r>
-              <a:rPr lang="en-US" sz="950" b="true" i="false" u="none" strike="noStrike" kern="0">
+              <a:rPr lang="en-US" sz="950" b="false" i="false" u="none" strike="noStrike" kern="0">
                 <a:solidFill>
                   <a:srgbClr val="FFFFFF"/>
                 </a:solidFill>
@@ -7648,13 +7685,13 @@
       </p:sp>
       <p:cxnSp>
         <p:nvCxnSpPr>
-          <p:cNvPr name="GraphCompose Table Cell Border" id="103"/>
-          <p:cNvCxnSpPr/>
-          <p:nvPr/>
-        </p:nvCxnSpPr>
-        <p:spPr>
-          <a:xfrm>
-            <a:off x="431800" y="8082496"/>
+          <p:cNvPr name="GraphCompose Table Cell Border" id="104"/>
+          <p:cNvCxnSpPr/>
+          <p:nvPr/>
+        </p:nvCxnSpPr>
+        <p:spPr>
+          <a:xfrm>
+            <a:off x="431800" y="8089487"/>
             <a:ext cx="764540" cy="0"/>
           </a:xfrm>
           <a:prstGeom prst="line">
@@ -7669,13 +7706,13 @@
       </p:cxnSp>
       <p:cxnSp>
         <p:nvCxnSpPr>
-          <p:cNvPr name="GraphCompose Table Cell Border" id="104"/>
-          <p:cNvCxnSpPr/>
-          <p:nvPr/>
-        </p:nvCxnSpPr>
-        <p:spPr>
-          <a:xfrm>
-            <a:off x="431800" y="7793095"/>
+          <p:cNvPr name="GraphCompose Table Cell Border" id="105"/>
+          <p:cNvCxnSpPr/>
+          <p:nvPr/>
+        </p:nvCxnSpPr>
+        <p:spPr>
+          <a:xfrm>
+            <a:off x="431800" y="7800086"/>
             <a:ext cx="0" cy="289401"/>
           </a:xfrm>
           <a:prstGeom prst="line">
@@ -7690,13 +7727,13 @@
       </p:cxnSp>
       <p:cxnSp>
         <p:nvCxnSpPr>
-          <p:cNvPr name="GraphCompose Table Cell Border" id="105"/>
-          <p:cNvCxnSpPr/>
-          <p:nvPr/>
-        </p:nvCxnSpPr>
-        <p:spPr>
-          <a:xfrm>
-            <a:off x="1193800" y="7793095"/>
+          <p:cNvPr name="GraphCompose Table Cell Border" id="106"/>
+          <p:cNvCxnSpPr/>
+          <p:nvPr/>
+        </p:nvCxnSpPr>
+        <p:spPr>
+          <a:xfrm>
+            <a:off x="1193800" y="7800086"/>
             <a:ext cx="0" cy="289401"/>
           </a:xfrm>
           <a:prstGeom prst="line">
@@ -7711,13 +7748,13 @@
       </p:cxnSp>
       <p:sp>
         <p:nvSpPr>
-          <p:cNvPr name="GraphCompose Table Cell Text" id="106"/>
+          <p:cNvPr name="GraphCompose Table Cell Text" id="107"/>
           <p:cNvSpPr txBox="true"/>
           <p:nvPr/>
         </p:nvSpPr>
         <p:spPr>
           <a:xfrm>
-            <a:off x="546100" y="7859400"/>
+            <a:off x="546100" y="7866392"/>
             <a:ext cx="443814" cy="111601"/>
           </a:xfrm>
           <a:prstGeom prst="rect">
@@ -7748,13 +7785,13 @@
       </p:sp>
       <p:cxnSp>
         <p:nvCxnSpPr>
-          <p:cNvPr name="GraphCompose Table Cell Border" id="107"/>
-          <p:cNvCxnSpPr/>
-          <p:nvPr/>
-        </p:nvCxnSpPr>
-        <p:spPr>
-          <a:xfrm>
-            <a:off x="1191260" y="8082496"/>
+          <p:cNvPr name="GraphCompose Table Cell Border" id="108"/>
+          <p:cNvCxnSpPr/>
+          <p:nvPr/>
+        </p:nvCxnSpPr>
+        <p:spPr>
+          <a:xfrm>
+            <a:off x="1191260" y="8089487"/>
             <a:ext cx="2225008" cy="0"/>
           </a:xfrm>
           <a:prstGeom prst="line">
@@ -7769,13 +7806,13 @@
       </p:cxnSp>
       <p:cxnSp>
         <p:nvCxnSpPr>
-          <p:cNvPr name="GraphCompose Table Cell Border" id="108"/>
-          <p:cNvCxnSpPr/>
-          <p:nvPr/>
-        </p:nvCxnSpPr>
-        <p:spPr>
-          <a:xfrm>
-            <a:off x="3413728" y="7793095"/>
+          <p:cNvPr name="GraphCompose Table Cell Border" id="109"/>
+          <p:cNvCxnSpPr/>
+          <p:nvPr/>
+        </p:nvCxnSpPr>
+        <p:spPr>
+          <a:xfrm>
+            <a:off x="3413728" y="7800086"/>
             <a:ext cx="0" cy="289401"/>
           </a:xfrm>
           <a:prstGeom prst="line">
@@ -7790,13 +7827,13 @@
       </p:cxnSp>
       <p:sp>
         <p:nvSpPr>
-          <p:cNvPr name="GraphCompose Table Cell Text" id="109"/>
+          <p:cNvPr name="GraphCompose Table Cell Text" id="110"/>
           <p:cNvSpPr txBox="true"/>
           <p:nvPr/>
         </p:nvSpPr>
         <p:spPr>
           <a:xfrm>
-            <a:off x="1308100" y="7859400"/>
+            <a:off x="1308100" y="7866392"/>
             <a:ext cx="1925517" cy="111601"/>
           </a:xfrm>
           <a:prstGeom prst="rect">
@@ -7827,13 +7864,13 @@
       </p:sp>
       <p:cxnSp>
         <p:nvCxnSpPr>
-          <p:cNvPr name="GraphCompose Table Cell Border" id="110"/>
-          <p:cNvCxnSpPr/>
-          <p:nvPr/>
-        </p:nvCxnSpPr>
-        <p:spPr>
-          <a:xfrm>
-            <a:off x="3411188" y="8082496"/>
+          <p:cNvPr name="GraphCompose Table Cell Border" id="111"/>
+          <p:cNvCxnSpPr/>
+          <p:nvPr/>
+        </p:nvCxnSpPr>
+        <p:spPr>
+          <a:xfrm>
+            <a:off x="3411188" y="8089487"/>
             <a:ext cx="1021080" cy="0"/>
           </a:xfrm>
           <a:prstGeom prst="line">
@@ -7848,13 +7885,13 @@
       </p:cxnSp>
       <p:cxnSp>
         <p:nvCxnSpPr>
-          <p:cNvPr name="GraphCompose Table Cell Border" id="111"/>
-          <p:cNvCxnSpPr/>
-          <p:nvPr/>
-        </p:nvCxnSpPr>
-        <p:spPr>
-          <a:xfrm>
-            <a:off x="4429728" y="7793095"/>
+          <p:cNvPr name="GraphCompose Table Cell Border" id="112"/>
+          <p:cNvCxnSpPr/>
+          <p:nvPr/>
+        </p:nvCxnSpPr>
+        <p:spPr>
+          <a:xfrm>
+            <a:off x="4429728" y="7800086"/>
             <a:ext cx="0" cy="289401"/>
           </a:xfrm>
           <a:prstGeom prst="line">
@@ -7869,13 +7906,13 @@
       </p:cxnSp>
       <p:sp>
         <p:nvSpPr>
-          <p:cNvPr name="GraphCompose Table Cell Text" id="112"/>
+          <p:cNvPr name="GraphCompose Table Cell Text" id="113"/>
           <p:cNvSpPr txBox="true"/>
           <p:nvPr/>
         </p:nvSpPr>
         <p:spPr>
           <a:xfrm>
-            <a:off x="3528028" y="7859400"/>
+            <a:off x="3528028" y="7866392"/>
             <a:ext cx="236055" cy="111601"/>
           </a:xfrm>
           <a:prstGeom prst="rect">
@@ -7906,13 +7943,13 @@
       </p:sp>
       <p:cxnSp>
         <p:nvCxnSpPr>
-          <p:cNvPr name="GraphCompose Table Cell Border" id="113"/>
-          <p:cNvCxnSpPr/>
-          <p:nvPr/>
-        </p:nvCxnSpPr>
-        <p:spPr>
-          <a:xfrm>
-            <a:off x="4427188" y="8082496"/>
+          <p:cNvPr name="GraphCompose Table Cell Border" id="114"/>
+          <p:cNvCxnSpPr/>
+          <p:nvPr/>
+        </p:nvCxnSpPr>
+        <p:spPr>
+          <a:xfrm>
+            <a:off x="4427188" y="8089487"/>
             <a:ext cx="1021080" cy="0"/>
           </a:xfrm>
           <a:prstGeom prst="line">
@@ -7927,13 +7964,13 @@
       </p:cxnSp>
       <p:cxnSp>
         <p:nvCxnSpPr>
-          <p:cNvPr name="GraphCompose Table Cell Border" id="114"/>
-          <p:cNvCxnSpPr/>
-          <p:nvPr/>
-        </p:nvCxnSpPr>
-        <p:spPr>
-          <a:xfrm>
-            <a:off x="5445728" y="7793095"/>
+          <p:cNvPr name="GraphCompose Table Cell Border" id="115"/>
+          <p:cNvCxnSpPr/>
+          <p:nvPr/>
+        </p:nvCxnSpPr>
+        <p:spPr>
+          <a:xfrm>
+            <a:off x="5445728" y="7800086"/>
             <a:ext cx="0" cy="289401"/>
           </a:xfrm>
           <a:prstGeom prst="line">
@@ -7948,13 +7985,13 @@
       </p:cxnSp>
       <p:sp>
         <p:nvSpPr>
-          <p:cNvPr name="GraphCompose Table Cell Text" id="115"/>
+          <p:cNvPr name="GraphCompose Table Cell Text" id="116"/>
           <p:cNvSpPr txBox="true"/>
           <p:nvPr/>
         </p:nvSpPr>
         <p:spPr>
           <a:xfrm>
-            <a:off x="4544028" y="7859400"/>
+            <a:off x="4544028" y="7866392"/>
             <a:ext cx="343313" cy="111601"/>
           </a:xfrm>
           <a:prstGeom prst="rect">
@@ -7985,13 +8022,13 @@
       </p:sp>
       <p:cxnSp>
         <p:nvCxnSpPr>
-          <p:cNvPr name="GraphCompose Table Cell Border" id="116"/>
-          <p:cNvCxnSpPr/>
-          <p:nvPr/>
-        </p:nvCxnSpPr>
-        <p:spPr>
-          <a:xfrm>
-            <a:off x="5443188" y="8082496"/>
+          <p:cNvPr name="GraphCompose Table Cell Border" id="117"/>
+          <p:cNvCxnSpPr/>
+          <p:nvPr/>
+        </p:nvCxnSpPr>
+        <p:spPr>
+          <a:xfrm>
+            <a:off x="5443188" y="8089487"/>
             <a:ext cx="1018540" cy="0"/>
           </a:xfrm>
           <a:prstGeom prst="line">
@@ -8006,13 +8043,13 @@
       </p:cxnSp>
       <p:cxnSp>
         <p:nvCxnSpPr>
-          <p:cNvPr name="GraphCompose Table Cell Border" id="117"/>
-          <p:cNvCxnSpPr/>
-          <p:nvPr/>
-        </p:nvCxnSpPr>
-        <p:spPr>
-          <a:xfrm>
-            <a:off x="6461728" y="7793095"/>
+          <p:cNvPr name="GraphCompose Table Cell Border" id="118"/>
+          <p:cNvCxnSpPr/>
+          <p:nvPr/>
+        </p:nvCxnSpPr>
+        <p:spPr>
+          <a:xfrm>
+            <a:off x="6461728" y="7800086"/>
             <a:ext cx="0" cy="289401"/>
           </a:xfrm>
           <a:prstGeom prst="line">
@@ -8027,13 +8064,13 @@
       </p:cxnSp>
       <p:sp>
         <p:nvSpPr>
-          <p:cNvPr name="GraphCompose Table Cell Text" id="118"/>
+          <p:cNvPr name="GraphCompose Table Cell Text" id="119"/>
           <p:cNvSpPr txBox="true"/>
           <p:nvPr/>
         </p:nvSpPr>
         <p:spPr>
           <a:xfrm>
-            <a:off x="5560028" y="7859400"/>
+            <a:off x="5560028" y="7866392"/>
             <a:ext cx="403758" cy="111601"/>
           </a:xfrm>
           <a:prstGeom prst="rect">
@@ -8064,13 +8101,13 @@
       </p:sp>
       <p:cxnSp>
         <p:nvCxnSpPr>
-          <p:cNvPr name="GraphCompose Table Cell Border" id="119"/>
-          <p:cNvCxnSpPr/>
-          <p:nvPr/>
-        </p:nvCxnSpPr>
-        <p:spPr>
-          <a:xfrm>
-            <a:off x="431800" y="8371897"/>
+          <p:cNvPr name="GraphCompose Table Cell Border" id="120"/>
+          <p:cNvCxnSpPr/>
+          <p:nvPr/>
+        </p:nvCxnSpPr>
+        <p:spPr>
+          <a:xfrm>
+            <a:off x="431800" y="8378889"/>
             <a:ext cx="764540" cy="0"/>
           </a:xfrm>
           <a:prstGeom prst="line">
@@ -8085,13 +8122,13 @@
       </p:cxnSp>
       <p:cxnSp>
         <p:nvCxnSpPr>
-          <p:cNvPr name="GraphCompose Table Cell Border" id="120"/>
-          <p:cNvCxnSpPr/>
-          <p:nvPr/>
-        </p:nvCxnSpPr>
-        <p:spPr>
-          <a:xfrm>
-            <a:off x="431800" y="8082496"/>
+          <p:cNvPr name="GraphCompose Table Cell Border" id="121"/>
+          <p:cNvCxnSpPr/>
+          <p:nvPr/>
+        </p:nvCxnSpPr>
+        <p:spPr>
+          <a:xfrm>
+            <a:off x="431800" y="8089487"/>
             <a:ext cx="0" cy="289401"/>
           </a:xfrm>
           <a:prstGeom prst="line">
@@ -8106,13 +8143,13 @@
       </p:cxnSp>
       <p:cxnSp>
         <p:nvCxnSpPr>
-          <p:cNvPr name="GraphCompose Table Cell Border" id="121"/>
-          <p:cNvCxnSpPr/>
-          <p:nvPr/>
-        </p:nvCxnSpPr>
-        <p:spPr>
-          <a:xfrm>
-            <a:off x="1193800" y="8082496"/>
+          <p:cNvPr name="GraphCompose Table Cell Border" id="122"/>
+          <p:cNvCxnSpPr/>
+          <p:nvPr/>
+        </p:nvCxnSpPr>
+        <p:spPr>
+          <a:xfrm>
+            <a:off x="1193800" y="8089487"/>
             <a:ext cx="0" cy="289401"/>
           </a:xfrm>
           <a:prstGeom prst="line">
@@ -8127,13 +8164,13 @@
       </p:cxnSp>
       <p:sp>
         <p:nvSpPr>
-          <p:cNvPr name="GraphCompose Table Cell Text" id="122"/>
+          <p:cNvPr name="GraphCompose Table Cell Text" id="123"/>
           <p:cNvSpPr txBox="true"/>
           <p:nvPr/>
         </p:nvSpPr>
         <p:spPr>
           <a:xfrm>
-            <a:off x="546100" y="8148801"/>
+            <a:off x="546100" y="8155793"/>
             <a:ext cx="443814" cy="111601"/>
           </a:xfrm>
           <a:prstGeom prst="rect">
@@ -8164,13 +8201,13 @@
       </p:sp>
       <p:cxnSp>
         <p:nvCxnSpPr>
-          <p:cNvPr name="GraphCompose Table Cell Border" id="123"/>
-          <p:cNvCxnSpPr/>
-          <p:nvPr/>
-        </p:nvCxnSpPr>
-        <p:spPr>
-          <a:xfrm>
-            <a:off x="1191260" y="8371897"/>
+          <p:cNvPr name="GraphCompose Table Cell Border" id="124"/>
+          <p:cNvCxnSpPr/>
+          <p:nvPr/>
+        </p:nvCxnSpPr>
+        <p:spPr>
+          <a:xfrm>
+            <a:off x="1191260" y="8378889"/>
             <a:ext cx="2225008" cy="0"/>
           </a:xfrm>
           <a:prstGeom prst="line">
@@ -8185,13 +8222,13 @@
       </p:cxnSp>
       <p:cxnSp>
         <p:nvCxnSpPr>
-          <p:cNvPr name="GraphCompose Table Cell Border" id="124"/>
-          <p:cNvCxnSpPr/>
-          <p:nvPr/>
-        </p:nvCxnSpPr>
-        <p:spPr>
-          <a:xfrm>
-            <a:off x="3413728" y="8082496"/>
+          <p:cNvPr name="GraphCompose Table Cell Border" id="125"/>
+          <p:cNvCxnSpPr/>
+          <p:nvPr/>
+        </p:nvCxnSpPr>
+        <p:spPr>
+          <a:xfrm>
+            <a:off x="3413728" y="8089487"/>
             <a:ext cx="0" cy="289401"/>
           </a:xfrm>
           <a:prstGeom prst="line">
@@ -8206,13 +8243,13 @@
       </p:cxnSp>
       <p:sp>
         <p:nvSpPr>
-          <p:cNvPr name="GraphCompose Table Cell Text" id="125"/>
+          <p:cNvPr name="GraphCompose Table Cell Text" id="126"/>
           <p:cNvSpPr txBox="true"/>
           <p:nvPr/>
         </p:nvSpPr>
         <p:spPr>
           <a:xfrm>
-            <a:off x="1308100" y="8148801"/>
+            <a:off x="1308100" y="8155793"/>
             <a:ext cx="1925517" cy="111601"/>
           </a:xfrm>
           <a:prstGeom prst="rect">
@@ -8243,13 +8280,13 @@
       </p:sp>
       <p:cxnSp>
         <p:nvCxnSpPr>
-          <p:cNvPr name="GraphCompose Table Cell Border" id="126"/>
-          <p:cNvCxnSpPr/>
-          <p:nvPr/>
-        </p:nvCxnSpPr>
-        <p:spPr>
-          <a:xfrm>
-            <a:off x="3411188" y="8371897"/>
+          <p:cNvPr name="GraphCompose Table Cell Border" id="127"/>
+          <p:cNvCxnSpPr/>
+          <p:nvPr/>
+        </p:nvCxnSpPr>
+        <p:spPr>
+          <a:xfrm>
+            <a:off x="3411188" y="8378889"/>
             <a:ext cx="1021080" cy="0"/>
           </a:xfrm>
           <a:prstGeom prst="line">
@@ -8264,13 +8301,13 @@
       </p:cxnSp>
       <p:cxnSp>
         <p:nvCxnSpPr>
-          <p:cNvPr name="GraphCompose Table Cell Border" id="127"/>
-          <p:cNvCxnSpPr/>
-          <p:nvPr/>
-        </p:nvCxnSpPr>
-        <p:spPr>
-          <a:xfrm>
-            <a:off x="4429728" y="8082496"/>
+          <p:cNvPr name="GraphCompose Table Cell Border" id="128"/>
+          <p:cNvCxnSpPr/>
+          <p:nvPr/>
+        </p:nvCxnSpPr>
+        <p:spPr>
+          <a:xfrm>
+            <a:off x="4429728" y="8089487"/>
             <a:ext cx="0" cy="289401"/>
           </a:xfrm>
           <a:prstGeom prst="line">
@@ -8285,13 +8322,13 @@
       </p:cxnSp>
       <p:sp>
         <p:nvSpPr>
-          <p:cNvPr name="GraphCompose Table Cell Text" id="128"/>
+          <p:cNvPr name="GraphCompose Table Cell Text" id="129"/>
           <p:cNvSpPr txBox="true"/>
           <p:nvPr/>
         </p:nvSpPr>
         <p:spPr>
           <a:xfrm>
-            <a:off x="3528028" y="8148801"/>
+            <a:off x="3528028" y="8155793"/>
             <a:ext cx="236055" cy="111601"/>
           </a:xfrm>
           <a:prstGeom prst="rect">
@@ -8322,13 +8359,13 @@
       </p:sp>
       <p:cxnSp>
         <p:nvCxnSpPr>
-          <p:cNvPr name="GraphCompose Table Cell Border" id="129"/>
-          <p:cNvCxnSpPr/>
-          <p:nvPr/>
-        </p:nvCxnSpPr>
-        <p:spPr>
-          <a:xfrm>
-            <a:off x="4427188" y="8371897"/>
+          <p:cNvPr name="GraphCompose Table Cell Border" id="130"/>
+          <p:cNvCxnSpPr/>
+          <p:nvPr/>
+        </p:nvCxnSpPr>
+        <p:spPr>
+          <a:xfrm>
+            <a:off x="4427188" y="8378889"/>
             <a:ext cx="1021080" cy="0"/>
           </a:xfrm>
           <a:prstGeom prst="line">
@@ -8343,13 +8380,13 @@
       </p:cxnSp>
       <p:cxnSp>
         <p:nvCxnSpPr>
-          <p:cNvPr name="GraphCompose Table Cell Border" id="130"/>
-          <p:cNvCxnSpPr/>
-          <p:nvPr/>
-        </p:nvCxnSpPr>
-        <p:spPr>
-          <a:xfrm>
-            <a:off x="5445728" y="8082496"/>
+          <p:cNvPr name="GraphCompose Table Cell Border" id="131"/>
+          <p:cNvCxnSpPr/>
+          <p:nvPr/>
+        </p:nvCxnSpPr>
+        <p:spPr>
+          <a:xfrm>
+            <a:off x="5445728" y="8089487"/>
             <a:ext cx="0" cy="289401"/>
           </a:xfrm>
           <a:prstGeom prst="line">
@@ -8364,13 +8401,13 @@
       </p:cxnSp>
       <p:sp>
         <p:nvSpPr>
-          <p:cNvPr name="GraphCompose Table Cell Text" id="131"/>
+          <p:cNvPr name="GraphCompose Table Cell Text" id="132"/>
           <p:cNvSpPr txBox="true"/>
           <p:nvPr/>
         </p:nvSpPr>
         <p:spPr>
           <a:xfrm>
-            <a:off x="4544028" y="8148801"/>
+            <a:off x="4544028" y="8155793"/>
             <a:ext cx="276231" cy="111601"/>
           </a:xfrm>
           <a:prstGeom prst="rect">
@@ -8401,13 +8438,13 @@
       </p:sp>
       <p:cxnSp>
         <p:nvCxnSpPr>
-          <p:cNvPr name="GraphCompose Table Cell Border" id="132"/>
-          <p:cNvCxnSpPr/>
-          <p:nvPr/>
-        </p:nvCxnSpPr>
-        <p:spPr>
-          <a:xfrm>
-            <a:off x="5443188" y="8371897"/>
+          <p:cNvPr name="GraphCompose Table Cell Border" id="133"/>
+          <p:cNvCxnSpPr/>
+          <p:nvPr/>
+        </p:nvCxnSpPr>
+        <p:spPr>
+          <a:xfrm>
+            <a:off x="5443188" y="8378889"/>
             <a:ext cx="1018540" cy="0"/>
           </a:xfrm>
           <a:prstGeom prst="line">
@@ -8422,13 +8459,13 @@
       </p:cxnSp>
       <p:cxnSp>
         <p:nvCxnSpPr>
-          <p:cNvPr name="GraphCompose Table Cell Border" id="133"/>
-          <p:cNvCxnSpPr/>
-          <p:nvPr/>
-        </p:nvCxnSpPr>
-        <p:spPr>
-          <a:xfrm>
-            <a:off x="6461728" y="8082496"/>
+          <p:cNvPr name="GraphCompose Table Cell Border" id="134"/>
+          <p:cNvCxnSpPr/>
+          <p:nvPr/>
+        </p:nvCxnSpPr>
+        <p:spPr>
+          <a:xfrm>
+            <a:off x="6461728" y="8089487"/>
             <a:ext cx="0" cy="289401"/>
           </a:xfrm>
           <a:prstGeom prst="line">
@@ -8443,13 +8480,13 @@
       </p:cxnSp>
       <p:sp>
         <p:nvSpPr>
-          <p:cNvPr name="GraphCompose Table Cell Text" id="134"/>
+          <p:cNvPr name="GraphCompose Table Cell Text" id="135"/>
           <p:cNvSpPr txBox="true"/>
           <p:nvPr/>
         </p:nvSpPr>
         <p:spPr>
           <a:xfrm>
-            <a:off x="5560028" y="8148801"/>
+            <a:off x="5560028" y="8155793"/>
             <a:ext cx="403758" cy="111601"/>
           </a:xfrm>
           <a:prstGeom prst="rect">
@@ -8480,13 +8517,13 @@
       </p:sp>
       <p:cxnSp>
         <p:nvCxnSpPr>
-          <p:cNvPr name="GraphCompose Table Cell Border" id="135"/>
-          <p:cNvCxnSpPr/>
-          <p:nvPr/>
-        </p:nvCxnSpPr>
-        <p:spPr>
-          <a:xfrm>
-            <a:off x="431800" y="8661298"/>
+          <p:cNvPr name="GraphCompose Table Cell Border" id="136"/>
+          <p:cNvCxnSpPr/>
+          <p:nvPr/>
+        </p:nvCxnSpPr>
+        <p:spPr>
+          <a:xfrm>
+            <a:off x="431800" y="8668290"/>
             <a:ext cx="764540" cy="0"/>
           </a:xfrm>
           <a:prstGeom prst="line">
@@ -8501,13 +8538,13 @@
       </p:cxnSp>
       <p:cxnSp>
         <p:nvCxnSpPr>
-          <p:cNvPr name="GraphCompose Table Cell Border" id="136"/>
-          <p:cNvCxnSpPr/>
-          <p:nvPr/>
-        </p:nvCxnSpPr>
-        <p:spPr>
-          <a:xfrm>
-            <a:off x="431800" y="8371897"/>
+          <p:cNvPr name="GraphCompose Table Cell Border" id="137"/>
+          <p:cNvCxnSpPr/>
+          <p:nvPr/>
+        </p:nvCxnSpPr>
+        <p:spPr>
+          <a:xfrm>
+            <a:off x="431800" y="8378889"/>
             <a:ext cx="0" cy="289401"/>
           </a:xfrm>
           <a:prstGeom prst="line">
@@ -8522,13 +8559,13 @@
       </p:cxnSp>
       <p:cxnSp>
         <p:nvCxnSpPr>
-          <p:cNvPr name="GraphCompose Table Cell Border" id="137"/>
-          <p:cNvCxnSpPr/>
-          <p:nvPr/>
-        </p:nvCxnSpPr>
-        <p:spPr>
-          <a:xfrm>
-            <a:off x="1193800" y="8371897"/>
+          <p:cNvPr name="GraphCompose Table Cell Border" id="138"/>
+          <p:cNvCxnSpPr/>
+          <p:nvPr/>
+        </p:nvCxnSpPr>
+        <p:spPr>
+          <a:xfrm>
+            <a:off x="1193800" y="8378889"/>
             <a:ext cx="0" cy="289401"/>
           </a:xfrm>
           <a:prstGeom prst="line">
@@ -8543,13 +8580,13 @@
       </p:cxnSp>
       <p:sp>
         <p:nvSpPr>
-          <p:cNvPr name="GraphCompose Table Cell Text" id="138"/>
+          <p:cNvPr name="GraphCompose Table Cell Text" id="139"/>
           <p:cNvSpPr txBox="true"/>
           <p:nvPr/>
         </p:nvSpPr>
         <p:spPr>
           <a:xfrm>
-            <a:off x="546100" y="8438203"/>
+            <a:off x="546100" y="8445194"/>
             <a:ext cx="443814" cy="111601"/>
           </a:xfrm>
           <a:prstGeom prst="rect">
@@ -8580,13 +8617,13 @@
       </p:sp>
       <p:cxnSp>
         <p:nvCxnSpPr>
-          <p:cNvPr name="GraphCompose Table Cell Border" id="139"/>
-          <p:cNvCxnSpPr/>
-          <p:nvPr/>
-        </p:nvCxnSpPr>
-        <p:spPr>
-          <a:xfrm>
-            <a:off x="1191260" y="8661298"/>
+          <p:cNvPr name="GraphCompose Table Cell Border" id="140"/>
+          <p:cNvCxnSpPr/>
+          <p:nvPr/>
+        </p:nvCxnSpPr>
+        <p:spPr>
+          <a:xfrm>
+            <a:off x="1191260" y="8668290"/>
             <a:ext cx="2225008" cy="0"/>
           </a:xfrm>
           <a:prstGeom prst="line">
@@ -8601,13 +8638,13 @@
       </p:cxnSp>
       <p:cxnSp>
         <p:nvCxnSpPr>
-          <p:cNvPr name="GraphCompose Table Cell Border" id="140"/>
-          <p:cNvCxnSpPr/>
-          <p:nvPr/>
-        </p:nvCxnSpPr>
-        <p:spPr>
-          <a:xfrm>
-            <a:off x="3413728" y="8371897"/>
+          <p:cNvPr name="GraphCompose Table Cell Border" id="141"/>
+          <p:cNvCxnSpPr/>
+          <p:nvPr/>
+        </p:nvCxnSpPr>
+        <p:spPr>
+          <a:xfrm>
+            <a:off x="3413728" y="8378889"/>
             <a:ext cx="0" cy="289401"/>
           </a:xfrm>
           <a:prstGeom prst="line">
@@ -8622,13 +8659,13 @@
       </p:cxnSp>
       <p:sp>
         <p:nvSpPr>
-          <p:cNvPr name="GraphCompose Table Cell Text" id="141"/>
+          <p:cNvPr name="GraphCompose Table Cell Text" id="142"/>
           <p:cNvSpPr txBox="true"/>
           <p:nvPr/>
         </p:nvSpPr>
         <p:spPr>
           <a:xfrm>
-            <a:off x="1308100" y="8438203"/>
+            <a:off x="1308100" y="8445194"/>
             <a:ext cx="1925517" cy="111601"/>
           </a:xfrm>
           <a:prstGeom prst="rect">
@@ -8659,13 +8696,13 @@
       </p:sp>
       <p:cxnSp>
         <p:nvCxnSpPr>
-          <p:cNvPr name="GraphCompose Table Cell Border" id="142"/>
-          <p:cNvCxnSpPr/>
-          <p:nvPr/>
-        </p:nvCxnSpPr>
-        <p:spPr>
-          <a:xfrm>
-            <a:off x="3411188" y="8661298"/>
+          <p:cNvPr name="GraphCompose Table Cell Border" id="143"/>
+          <p:cNvCxnSpPr/>
+          <p:nvPr/>
+        </p:nvCxnSpPr>
+        <p:spPr>
+          <a:xfrm>
+            <a:off x="3411188" y="8668290"/>
             <a:ext cx="1021080" cy="0"/>
           </a:xfrm>
           <a:prstGeom prst="line">
@@ -8680,13 +8717,13 @@
       </p:cxnSp>
       <p:cxnSp>
         <p:nvCxnSpPr>
-          <p:cNvPr name="GraphCompose Table Cell Border" id="143"/>
-          <p:cNvCxnSpPr/>
-          <p:nvPr/>
-        </p:nvCxnSpPr>
-        <p:spPr>
-          <a:xfrm>
-            <a:off x="4429728" y="8371897"/>
+          <p:cNvPr name="GraphCompose Table Cell Border" id="144"/>
+          <p:cNvCxnSpPr/>
+          <p:nvPr/>
+        </p:nvCxnSpPr>
+        <p:spPr>
+          <a:xfrm>
+            <a:off x="4429728" y="8378889"/>
             <a:ext cx="0" cy="289401"/>
           </a:xfrm>
           <a:prstGeom prst="line">
@@ -8701,13 +8738,13 @@
       </p:cxnSp>
       <p:sp>
         <p:nvSpPr>
-          <p:cNvPr name="GraphCompose Table Cell Text" id="144"/>
+          <p:cNvPr name="GraphCompose Table Cell Text" id="145"/>
           <p:cNvSpPr txBox="true"/>
           <p:nvPr/>
         </p:nvSpPr>
         <p:spPr>
           <a:xfrm>
-            <a:off x="3528028" y="8438203"/>
+            <a:off x="3528028" y="8445194"/>
             <a:ext cx="236055" cy="111601"/>
           </a:xfrm>
           <a:prstGeom prst="rect">
@@ -8738,13 +8775,13 @@
       </p:sp>
       <p:cxnSp>
         <p:nvCxnSpPr>
-          <p:cNvPr name="GraphCompose Table Cell Border" id="145"/>
-          <p:cNvCxnSpPr/>
-          <p:nvPr/>
-        </p:nvCxnSpPr>
-        <p:spPr>
-          <a:xfrm>
-            <a:off x="4427188" y="8661298"/>
+          <p:cNvPr name="GraphCompose Table Cell Border" id="146"/>
+          <p:cNvCxnSpPr/>
+          <p:nvPr/>
+        </p:nvCxnSpPr>
+        <p:spPr>
+          <a:xfrm>
+            <a:off x="4427188" y="8668290"/>
             <a:ext cx="1021080" cy="0"/>
           </a:xfrm>
           <a:prstGeom prst="line">
@@ -8759,13 +8796,13 @@
       </p:cxnSp>
       <p:cxnSp>
         <p:nvCxnSpPr>
-          <p:cNvPr name="GraphCompose Table Cell Border" id="146"/>
-          <p:cNvCxnSpPr/>
-          <p:nvPr/>
-        </p:nvCxnSpPr>
-        <p:spPr>
-          <a:xfrm>
-            <a:off x="5445728" y="8371897"/>
+          <p:cNvPr name="GraphCompose Table Cell Border" id="147"/>
+          <p:cNvCxnSpPr/>
+          <p:nvPr/>
+        </p:nvCxnSpPr>
+        <p:spPr>
+          <a:xfrm>
+            <a:off x="5445728" y="8378889"/>
             <a:ext cx="0" cy="289401"/>
           </a:xfrm>
           <a:prstGeom prst="line">
@@ -8780,13 +8817,13 @@
       </p:cxnSp>
       <p:sp>
         <p:nvSpPr>
-          <p:cNvPr name="GraphCompose Table Cell Text" id="147"/>
+          <p:cNvPr name="GraphCompose Table Cell Text" id="148"/>
           <p:cNvSpPr txBox="true"/>
           <p:nvPr/>
         </p:nvSpPr>
         <p:spPr>
           <a:xfrm>
-            <a:off x="4544028" y="8438203"/>
+            <a:off x="4544028" y="8445194"/>
             <a:ext cx="269475" cy="111601"/>
           </a:xfrm>
           <a:prstGeom prst="rect">
@@ -8817,13 +8854,13 @@
       </p:sp>
       <p:cxnSp>
         <p:nvCxnSpPr>
-          <p:cNvPr name="GraphCompose Table Cell Border" id="148"/>
-          <p:cNvCxnSpPr/>
-          <p:nvPr/>
-        </p:nvCxnSpPr>
-        <p:spPr>
-          <a:xfrm>
-            <a:off x="5443188" y="8661298"/>
+          <p:cNvPr name="GraphCompose Table Cell Border" id="149"/>
+          <p:cNvCxnSpPr/>
+          <p:nvPr/>
+        </p:nvCxnSpPr>
+        <p:spPr>
+          <a:xfrm>
+            <a:off x="5443188" y="8668290"/>
             <a:ext cx="1018540" cy="0"/>
           </a:xfrm>
           <a:prstGeom prst="line">
@@ -8838,13 +8875,13 @@
       </p:cxnSp>
       <p:cxnSp>
         <p:nvCxnSpPr>
-          <p:cNvPr name="GraphCompose Table Cell Border" id="149"/>
-          <p:cNvCxnSpPr/>
-          <p:nvPr/>
-        </p:nvCxnSpPr>
-        <p:spPr>
-          <a:xfrm>
-            <a:off x="6461728" y="8371897"/>
+          <p:cNvPr name="GraphCompose Table Cell Border" id="150"/>
+          <p:cNvCxnSpPr/>
+          <p:nvPr/>
+        </p:nvCxnSpPr>
+        <p:spPr>
+          <a:xfrm>
+            <a:off x="6461728" y="8378889"/>
             <a:ext cx="0" cy="289401"/>
           </a:xfrm>
           <a:prstGeom prst="line">
@@ -8859,13 +8896,13 @@
       </p:cxnSp>
       <p:sp>
         <p:nvSpPr>
-          <p:cNvPr name="GraphCompose Table Cell Text" id="150"/>
+          <p:cNvPr name="GraphCompose Table Cell Text" id="151"/>
           <p:cNvSpPr txBox="true"/>
           <p:nvPr/>
         </p:nvSpPr>
         <p:spPr>
           <a:xfrm>
-            <a:off x="5560028" y="8438203"/>
+            <a:off x="5560028" y="8445194"/>
             <a:ext cx="403758" cy="111601"/>
           </a:xfrm>
           <a:prstGeom prst="rect">
@@ -8896,13 +8933,13 @@
       </p:sp>
       <p:cxnSp>
         <p:nvCxnSpPr>
-          <p:cNvPr name="GraphCompose Table Cell Border" id="151"/>
-          <p:cNvCxnSpPr/>
-          <p:nvPr/>
-        </p:nvCxnSpPr>
-        <p:spPr>
-          <a:xfrm>
-            <a:off x="431800" y="8950700"/>
+          <p:cNvPr name="GraphCompose Table Cell Border" id="152"/>
+          <p:cNvCxnSpPr/>
+          <p:nvPr/>
+        </p:nvCxnSpPr>
+        <p:spPr>
+          <a:xfrm>
+            <a:off x="431800" y="8957691"/>
             <a:ext cx="764540" cy="0"/>
           </a:xfrm>
           <a:prstGeom prst="line">
@@ -8917,13 +8954,13 @@
       </p:cxnSp>
       <p:cxnSp>
         <p:nvCxnSpPr>
-          <p:cNvPr name="GraphCompose Table Cell Border" id="152"/>
-          <p:cNvCxnSpPr/>
-          <p:nvPr/>
-        </p:nvCxnSpPr>
-        <p:spPr>
-          <a:xfrm>
-            <a:off x="431800" y="8661298"/>
+          <p:cNvPr name="GraphCompose Table Cell Border" id="153"/>
+          <p:cNvCxnSpPr/>
+          <p:nvPr/>
+        </p:nvCxnSpPr>
+        <p:spPr>
+          <a:xfrm>
+            <a:off x="431800" y="8668290"/>
             <a:ext cx="0" cy="289401"/>
           </a:xfrm>
           <a:prstGeom prst="line">
@@ -8938,13 +8975,13 @@
       </p:cxnSp>
       <p:cxnSp>
         <p:nvCxnSpPr>
-          <p:cNvPr name="GraphCompose Table Cell Border" id="153"/>
-          <p:cNvCxnSpPr/>
-          <p:nvPr/>
-        </p:nvCxnSpPr>
-        <p:spPr>
-          <a:xfrm>
-            <a:off x="1193800" y="8661298"/>
+          <p:cNvPr name="GraphCompose Table Cell Border" id="154"/>
+          <p:cNvCxnSpPr/>
+          <p:nvPr/>
+        </p:nvCxnSpPr>
+        <p:spPr>
+          <a:xfrm>
+            <a:off x="1193800" y="8668290"/>
             <a:ext cx="0" cy="289401"/>
           </a:xfrm>
           <a:prstGeom prst="line">
@@ -8959,13 +8996,13 @@
       </p:cxnSp>
       <p:sp>
         <p:nvSpPr>
-          <p:cNvPr name="GraphCompose Table Cell Text" id="154"/>
+          <p:cNvPr name="GraphCompose Table Cell Text" id="155"/>
           <p:cNvSpPr txBox="true"/>
           <p:nvPr/>
         </p:nvSpPr>
         <p:spPr>
           <a:xfrm>
-            <a:off x="546100" y="8727604"/>
+            <a:off x="546100" y="8734595"/>
             <a:ext cx="443814" cy="111601"/>
           </a:xfrm>
           <a:prstGeom prst="rect">
@@ -8996,13 +9033,13 @@
       </p:sp>
       <p:cxnSp>
         <p:nvCxnSpPr>
-          <p:cNvPr name="GraphCompose Table Cell Border" id="155"/>
-          <p:cNvCxnSpPr/>
-          <p:nvPr/>
-        </p:nvCxnSpPr>
-        <p:spPr>
-          <a:xfrm>
-            <a:off x="1191260" y="8950700"/>
+          <p:cNvPr name="GraphCompose Table Cell Border" id="156"/>
+          <p:cNvCxnSpPr/>
+          <p:nvPr/>
+        </p:nvCxnSpPr>
+        <p:spPr>
+          <a:xfrm>
+            <a:off x="1191260" y="8957691"/>
             <a:ext cx="2225008" cy="0"/>
           </a:xfrm>
           <a:prstGeom prst="line">
@@ -9017,13 +9054,13 @@
       </p:cxnSp>
       <p:cxnSp>
         <p:nvCxnSpPr>
-          <p:cNvPr name="GraphCompose Table Cell Border" id="156"/>
-          <p:cNvCxnSpPr/>
-          <p:nvPr/>
-        </p:nvCxnSpPr>
-        <p:spPr>
-          <a:xfrm>
-            <a:off x="3413728" y="8661298"/>
+          <p:cNvPr name="GraphCompose Table Cell Border" id="157"/>
+          <p:cNvCxnSpPr/>
+          <p:nvPr/>
+        </p:nvCxnSpPr>
+        <p:spPr>
+          <a:xfrm>
+            <a:off x="3413728" y="8668290"/>
             <a:ext cx="0" cy="289401"/>
           </a:xfrm>
           <a:prstGeom prst="line">
@@ -9038,13 +9075,13 @@
       </p:cxnSp>
       <p:sp>
         <p:nvSpPr>
-          <p:cNvPr name="GraphCompose Table Cell Text" id="157"/>
+          <p:cNvPr name="GraphCompose Table Cell Text" id="158"/>
           <p:cNvSpPr txBox="true"/>
           <p:nvPr/>
         </p:nvSpPr>
         <p:spPr>
           <a:xfrm>
-            <a:off x="1308100" y="8727604"/>
+            <a:off x="1308100" y="8734595"/>
             <a:ext cx="1925517" cy="111601"/>
           </a:xfrm>
           <a:prstGeom prst="rect">
@@ -9075,13 +9112,13 @@
       </p:sp>
       <p:cxnSp>
         <p:nvCxnSpPr>
-          <p:cNvPr name="GraphCompose Table Cell Border" id="158"/>
-          <p:cNvCxnSpPr/>
-          <p:nvPr/>
-        </p:nvCxnSpPr>
-        <p:spPr>
-          <a:xfrm>
-            <a:off x="3411188" y="8950700"/>
+          <p:cNvPr name="GraphCompose Table Cell Border" id="159"/>
+          <p:cNvCxnSpPr/>
+          <p:nvPr/>
+        </p:nvCxnSpPr>
+        <p:spPr>
+          <a:xfrm>
+            <a:off x="3411188" y="8957691"/>
             <a:ext cx="1021080" cy="0"/>
           </a:xfrm>
           <a:prstGeom prst="line">
@@ -9096,13 +9133,13 @@
       </p:cxnSp>
       <p:cxnSp>
         <p:nvCxnSpPr>
-          <p:cNvPr name="GraphCompose Table Cell Border" id="159"/>
-          <p:cNvCxnSpPr/>
-          <p:nvPr/>
-        </p:nvCxnSpPr>
-        <p:spPr>
-          <a:xfrm>
-            <a:off x="4429728" y="8661298"/>
+          <p:cNvPr name="GraphCompose Table Cell Border" id="160"/>
+          <p:cNvCxnSpPr/>
+          <p:nvPr/>
+        </p:nvCxnSpPr>
+        <p:spPr>
+          <a:xfrm>
+            <a:off x="4429728" y="8668290"/>
             <a:ext cx="0" cy="289401"/>
           </a:xfrm>
           <a:prstGeom prst="line">
@@ -9117,13 +9154,13 @@
       </p:cxnSp>
       <p:sp>
         <p:nvSpPr>
-          <p:cNvPr name="GraphCompose Table Cell Text" id="160"/>
+          <p:cNvPr name="GraphCompose Table Cell Text" id="161"/>
           <p:cNvSpPr txBox="true"/>
           <p:nvPr/>
         </p:nvSpPr>
         <p:spPr>
           <a:xfrm>
-            <a:off x="3528028" y="8727604"/>
+            <a:off x="3528028" y="8734595"/>
             <a:ext cx="236055" cy="111601"/>
           </a:xfrm>
           <a:prstGeom prst="rect">
@@ -9154,13 +9191,13 @@
       </p:sp>
       <p:cxnSp>
         <p:nvCxnSpPr>
-          <p:cNvPr name="GraphCompose Table Cell Border" id="161"/>
-          <p:cNvCxnSpPr/>
-          <p:nvPr/>
-        </p:nvCxnSpPr>
-        <p:spPr>
-          <a:xfrm>
-            <a:off x="4427188" y="8950700"/>
+          <p:cNvPr name="GraphCompose Table Cell Border" id="162"/>
+          <p:cNvCxnSpPr/>
+          <p:nvPr/>
+        </p:nvCxnSpPr>
+        <p:spPr>
+          <a:xfrm>
+            <a:off x="4427188" y="8957691"/>
             <a:ext cx="1021080" cy="0"/>
           </a:xfrm>
           <a:prstGeom prst="line">
@@ -9175,13 +9212,13 @@
       </p:cxnSp>
       <p:cxnSp>
         <p:nvCxnSpPr>
-          <p:cNvPr name="GraphCompose Table Cell Border" id="162"/>
-          <p:cNvCxnSpPr/>
-          <p:nvPr/>
-        </p:nvCxnSpPr>
-        <p:spPr>
-          <a:xfrm>
-            <a:off x="5445728" y="8661298"/>
+          <p:cNvPr name="GraphCompose Table Cell Border" id="163"/>
+          <p:cNvCxnSpPr/>
+          <p:nvPr/>
+        </p:nvCxnSpPr>
+        <p:spPr>
+          <a:xfrm>
+            <a:off x="5445728" y="8668290"/>
             <a:ext cx="0" cy="289401"/>
           </a:xfrm>
           <a:prstGeom prst="line">
@@ -9196,13 +9233,13 @@
       </p:cxnSp>
       <p:sp>
         <p:nvSpPr>
-          <p:cNvPr name="GraphCompose Table Cell Text" id="163"/>
+          <p:cNvPr name="GraphCompose Table Cell Text" id="164"/>
           <p:cNvSpPr txBox="true"/>
           <p:nvPr/>
         </p:nvSpPr>
         <p:spPr>
           <a:xfrm>
-            <a:off x="4544028" y="8727604"/>
+            <a:off x="4544028" y="8734595"/>
             <a:ext cx="343313" cy="111601"/>
           </a:xfrm>
           <a:prstGeom prst="rect">
@@ -9233,13 +9270,13 @@
       </p:sp>
       <p:cxnSp>
         <p:nvCxnSpPr>
-          <p:cNvPr name="GraphCompose Table Cell Border" id="164"/>
-          <p:cNvCxnSpPr/>
-          <p:nvPr/>
-        </p:nvCxnSpPr>
-        <p:spPr>
-          <a:xfrm>
-            <a:off x="5443188" y="8950700"/>
+          <p:cNvPr name="GraphCompose Table Cell Border" id="165"/>
+          <p:cNvCxnSpPr/>
+          <p:nvPr/>
+        </p:nvCxnSpPr>
+        <p:spPr>
+          <a:xfrm>
+            <a:off x="5443188" y="8957691"/>
             <a:ext cx="1018540" cy="0"/>
           </a:xfrm>
           <a:prstGeom prst="line">
@@ -9254,13 +9291,13 @@
       </p:cxnSp>
       <p:cxnSp>
         <p:nvCxnSpPr>
-          <p:cNvPr name="GraphCompose Table Cell Border" id="165"/>
-          <p:cNvCxnSpPr/>
-          <p:nvPr/>
-        </p:nvCxnSpPr>
-        <p:spPr>
-          <a:xfrm>
-            <a:off x="6461728" y="8661298"/>
+          <p:cNvPr name="GraphCompose Table Cell Border" id="166"/>
+          <p:cNvCxnSpPr/>
+          <p:nvPr/>
+        </p:nvCxnSpPr>
+        <p:spPr>
+          <a:xfrm>
+            <a:off x="6461728" y="8668290"/>
             <a:ext cx="0" cy="289401"/>
           </a:xfrm>
           <a:prstGeom prst="line">
@@ -9275,13 +9312,13 @@
       </p:cxnSp>
       <p:sp>
         <p:nvSpPr>
-          <p:cNvPr name="GraphCompose Table Cell Text" id="166"/>
+          <p:cNvPr name="GraphCompose Table Cell Text" id="167"/>
           <p:cNvSpPr txBox="true"/>
           <p:nvPr/>
         </p:nvSpPr>
         <p:spPr>
           <a:xfrm>
-            <a:off x="5560028" y="8727604"/>
+            <a:off x="5560028" y="8734595"/>
             <a:ext cx="403758" cy="111601"/>
           </a:xfrm>
           <a:prstGeom prst="rect">
@@ -9312,13 +9349,13 @@
       </p:sp>
       <p:cxnSp>
         <p:nvCxnSpPr>
-          <p:cNvPr name="GraphCompose Table Cell Border" id="167"/>
-          <p:cNvCxnSpPr/>
-          <p:nvPr/>
-        </p:nvCxnSpPr>
-        <p:spPr>
-          <a:xfrm>
-            <a:off x="431800" y="9240101"/>
+          <p:cNvPr name="GraphCompose Table Cell Border" id="168"/>
+          <p:cNvCxnSpPr/>
+          <p:nvPr/>
+        </p:nvCxnSpPr>
+        <p:spPr>
+          <a:xfrm>
+            <a:off x="431800" y="9247092"/>
             <a:ext cx="764540" cy="0"/>
           </a:xfrm>
           <a:prstGeom prst="line">
@@ -9333,13 +9370,13 @@
       </p:cxnSp>
       <p:cxnSp>
         <p:nvCxnSpPr>
-          <p:cNvPr name="GraphCompose Table Cell Border" id="168"/>
-          <p:cNvCxnSpPr/>
-          <p:nvPr/>
-        </p:nvCxnSpPr>
-        <p:spPr>
-          <a:xfrm>
-            <a:off x="431800" y="8950700"/>
+          <p:cNvPr name="GraphCompose Table Cell Border" id="169"/>
+          <p:cNvCxnSpPr/>
+          <p:nvPr/>
+        </p:nvCxnSpPr>
+        <p:spPr>
+          <a:xfrm>
+            <a:off x="431800" y="8957691"/>
             <a:ext cx="0" cy="289401"/>
           </a:xfrm>
           <a:prstGeom prst="line">
@@ -9354,13 +9391,13 @@
       </p:cxnSp>
       <p:cxnSp>
         <p:nvCxnSpPr>
-          <p:cNvPr name="GraphCompose Table Cell Border" id="169"/>
-          <p:cNvCxnSpPr/>
-          <p:nvPr/>
-        </p:nvCxnSpPr>
-        <p:spPr>
-          <a:xfrm>
-            <a:off x="1193800" y="8950700"/>
+          <p:cNvPr name="GraphCompose Table Cell Border" id="170"/>
+          <p:cNvCxnSpPr/>
+          <p:nvPr/>
+        </p:nvCxnSpPr>
+        <p:spPr>
+          <a:xfrm>
+            <a:off x="1193800" y="8957691"/>
             <a:ext cx="0" cy="289401"/>
           </a:xfrm>
           <a:prstGeom prst="line">
@@ -9375,13 +9412,13 @@
       </p:cxnSp>
       <p:sp>
         <p:nvSpPr>
-          <p:cNvPr name="GraphCompose Table Cell Text" id="170"/>
+          <p:cNvPr name="GraphCompose Table Cell Text" id="171"/>
           <p:cNvSpPr txBox="true"/>
           <p:nvPr/>
         </p:nvSpPr>
         <p:spPr>
           <a:xfrm>
-            <a:off x="546100" y="9017005"/>
+            <a:off x="546100" y="9023997"/>
             <a:ext cx="443814" cy="111601"/>
           </a:xfrm>
           <a:prstGeom prst="rect">
@@ -9412,13 +9449,13 @@
       </p:sp>
       <p:cxnSp>
         <p:nvCxnSpPr>
-          <p:cNvPr name="GraphCompose Table Cell Border" id="171"/>
-          <p:cNvCxnSpPr/>
-          <p:nvPr/>
-        </p:nvCxnSpPr>
-        <p:spPr>
-          <a:xfrm>
-            <a:off x="1191260" y="9240101"/>
+          <p:cNvPr name="GraphCompose Table Cell Border" id="172"/>
+          <p:cNvCxnSpPr/>
+          <p:nvPr/>
+        </p:nvCxnSpPr>
+        <p:spPr>
+          <a:xfrm>
+            <a:off x="1191260" y="9247092"/>
             <a:ext cx="2225008" cy="0"/>
           </a:xfrm>
           <a:prstGeom prst="line">
@@ -9433,13 +9470,13 @@
       </p:cxnSp>
       <p:cxnSp>
         <p:nvCxnSpPr>
-          <p:cNvPr name="GraphCompose Table Cell Border" id="172"/>
-          <p:cNvCxnSpPr/>
-          <p:nvPr/>
-        </p:nvCxnSpPr>
-        <p:spPr>
-          <a:xfrm>
-            <a:off x="3413728" y="8950700"/>
+          <p:cNvPr name="GraphCompose Table Cell Border" id="173"/>
+          <p:cNvCxnSpPr/>
+          <p:nvPr/>
+        </p:nvCxnSpPr>
+        <p:spPr>
+          <a:xfrm>
+            <a:off x="3413728" y="8957691"/>
             <a:ext cx="0" cy="289401"/>
           </a:xfrm>
           <a:prstGeom prst="line">
@@ -9454,13 +9491,13 @@
       </p:cxnSp>
       <p:sp>
         <p:nvSpPr>
-          <p:cNvPr name="GraphCompose Table Cell Text" id="173"/>
+          <p:cNvPr name="GraphCompose Table Cell Text" id="174"/>
           <p:cNvSpPr txBox="true"/>
           <p:nvPr/>
         </p:nvSpPr>
         <p:spPr>
           <a:xfrm>
-            <a:off x="1308100" y="9017005"/>
+            <a:off x="1308100" y="9023997"/>
             <a:ext cx="1925517" cy="111601"/>
           </a:xfrm>
           <a:prstGeom prst="rect">
@@ -9491,13 +9528,13 @@
       </p:sp>
       <p:cxnSp>
         <p:nvCxnSpPr>
-          <p:cNvPr name="GraphCompose Table Cell Border" id="174"/>
-          <p:cNvCxnSpPr/>
-          <p:nvPr/>
-        </p:nvCxnSpPr>
-        <p:spPr>
-          <a:xfrm>
-            <a:off x="3411188" y="9240101"/>
+          <p:cNvPr name="GraphCompose Table Cell Border" id="175"/>
+          <p:cNvCxnSpPr/>
+          <p:nvPr/>
+        </p:nvCxnSpPr>
+        <p:spPr>
+          <a:xfrm>
+            <a:off x="3411188" y="9247092"/>
             <a:ext cx="1021080" cy="0"/>
           </a:xfrm>
           <a:prstGeom prst="line">
@@ -9512,13 +9549,13 @@
       </p:cxnSp>
       <p:cxnSp>
         <p:nvCxnSpPr>
-          <p:cNvPr name="GraphCompose Table Cell Border" id="175"/>
-          <p:cNvCxnSpPr/>
-          <p:nvPr/>
-        </p:nvCxnSpPr>
-        <p:spPr>
-          <a:xfrm>
-            <a:off x="4429728" y="8950700"/>
+          <p:cNvPr name="GraphCompose Table Cell Border" id="176"/>
+          <p:cNvCxnSpPr/>
+          <p:nvPr/>
+        </p:nvCxnSpPr>
+        <p:spPr>
+          <a:xfrm>
+            <a:off x="4429728" y="8957691"/>
             <a:ext cx="0" cy="289401"/>
           </a:xfrm>
           <a:prstGeom prst="line">
@@ -9533,13 +9570,13 @@
       </p:cxnSp>
       <p:sp>
         <p:nvSpPr>
-          <p:cNvPr name="GraphCompose Table Cell Text" id="176"/>
+          <p:cNvPr name="GraphCompose Table Cell Text" id="177"/>
           <p:cNvSpPr txBox="true"/>
           <p:nvPr/>
         </p:nvSpPr>
         <p:spPr>
           <a:xfrm>
-            <a:off x="3528028" y="9017005"/>
+            <a:off x="3528028" y="9023997"/>
             <a:ext cx="236055" cy="111601"/>
           </a:xfrm>
           <a:prstGeom prst="rect">
@@ -9570,13 +9607,13 @@
       </p:sp>
       <p:cxnSp>
         <p:nvCxnSpPr>
-          <p:cNvPr name="GraphCompose Table Cell Border" id="177"/>
-          <p:cNvCxnSpPr/>
-          <p:nvPr/>
-        </p:nvCxnSpPr>
-        <p:spPr>
-          <a:xfrm>
-            <a:off x="4427188" y="9240101"/>
+          <p:cNvPr name="GraphCompose Table Cell Border" id="178"/>
+          <p:cNvCxnSpPr/>
+          <p:nvPr/>
+        </p:nvCxnSpPr>
+        <p:spPr>
+          <a:xfrm>
+            <a:off x="4427188" y="9247092"/>
             <a:ext cx="1021080" cy="0"/>
           </a:xfrm>
           <a:prstGeom prst="line">
@@ -9591,13 +9628,13 @@
       </p:cxnSp>
       <p:cxnSp>
         <p:nvCxnSpPr>
-          <p:cNvPr name="GraphCompose Table Cell Border" id="178"/>
-          <p:cNvCxnSpPr/>
-          <p:nvPr/>
-        </p:nvCxnSpPr>
-        <p:spPr>
-          <a:xfrm>
-            <a:off x="5445728" y="8950700"/>
+          <p:cNvPr name="GraphCompose Table Cell Border" id="179"/>
+          <p:cNvCxnSpPr/>
+          <p:nvPr/>
+        </p:nvCxnSpPr>
+        <p:spPr>
+          <a:xfrm>
+            <a:off x="5445728" y="8957691"/>
             <a:ext cx="0" cy="289401"/>
           </a:xfrm>
           <a:prstGeom prst="line">
@@ -9612,13 +9649,13 @@
       </p:cxnSp>
       <p:sp>
         <p:nvSpPr>
-          <p:cNvPr name="GraphCompose Table Cell Text" id="179"/>
+          <p:cNvPr name="GraphCompose Table Cell Text" id="180"/>
           <p:cNvSpPr txBox="true"/>
           <p:nvPr/>
         </p:nvSpPr>
         <p:spPr>
           <a:xfrm>
-            <a:off x="4544028" y="9017005"/>
+            <a:off x="4544028" y="9023997"/>
             <a:ext cx="276231" cy="111601"/>
           </a:xfrm>
           <a:prstGeom prst="rect">
@@ -9649,13 +9686,13 @@
       </p:sp>
       <p:cxnSp>
         <p:nvCxnSpPr>
-          <p:cNvPr name="GraphCompose Table Cell Border" id="180"/>
-          <p:cNvCxnSpPr/>
-          <p:nvPr/>
-        </p:nvCxnSpPr>
-        <p:spPr>
-          <a:xfrm>
-            <a:off x="5443188" y="9240101"/>
+          <p:cNvPr name="GraphCompose Table Cell Border" id="181"/>
+          <p:cNvCxnSpPr/>
+          <p:nvPr/>
+        </p:nvCxnSpPr>
+        <p:spPr>
+          <a:xfrm>
+            <a:off x="5443188" y="9247092"/>
             <a:ext cx="1018540" cy="0"/>
           </a:xfrm>
           <a:prstGeom prst="line">
@@ -9670,13 +9707,13 @@
       </p:cxnSp>
       <p:cxnSp>
         <p:nvCxnSpPr>
-          <p:cNvPr name="GraphCompose Table Cell Border" id="181"/>
-          <p:cNvCxnSpPr/>
-          <p:nvPr/>
-        </p:nvCxnSpPr>
-        <p:spPr>
-          <a:xfrm>
-            <a:off x="6461728" y="8950700"/>
+          <p:cNvPr name="GraphCompose Table Cell Border" id="182"/>
+          <p:cNvCxnSpPr/>
+          <p:nvPr/>
+        </p:nvCxnSpPr>
+        <p:spPr>
+          <a:xfrm>
+            <a:off x="6461728" y="8957691"/>
             <a:ext cx="0" cy="289401"/>
           </a:xfrm>
           <a:prstGeom prst="line">
@@ -9691,13 +9728,13 @@
       </p:cxnSp>
       <p:sp>
         <p:nvSpPr>
-          <p:cNvPr name="GraphCompose Table Cell Text" id="182"/>
+          <p:cNvPr name="GraphCompose Table Cell Text" id="183"/>
           <p:cNvSpPr txBox="true"/>
           <p:nvPr/>
         </p:nvSpPr>
         <p:spPr>
           <a:xfrm>
-            <a:off x="5560028" y="9017005"/>
+            <a:off x="5560028" y="9023997"/>
             <a:ext cx="403758" cy="111601"/>
           </a:xfrm>
           <a:prstGeom prst="rect">
@@ -9728,13 +9765,13 @@
       </p:sp>
       <p:cxnSp>
         <p:nvCxnSpPr>
-          <p:cNvPr name="GraphCompose Table Cell Border" id="183"/>
-          <p:cNvCxnSpPr/>
-          <p:nvPr/>
-        </p:nvCxnSpPr>
-        <p:spPr>
-          <a:xfrm>
-            <a:off x="431800" y="9529502"/>
+          <p:cNvPr name="GraphCompose Table Cell Border" id="184"/>
+          <p:cNvCxnSpPr/>
+          <p:nvPr/>
+        </p:nvCxnSpPr>
+        <p:spPr>
+          <a:xfrm>
+            <a:off x="431800" y="9536494"/>
             <a:ext cx="764540" cy="0"/>
           </a:xfrm>
           <a:prstGeom prst="line">
@@ -9749,13 +9786,13 @@
       </p:cxnSp>
       <p:cxnSp>
         <p:nvCxnSpPr>
-          <p:cNvPr name="GraphCompose Table Cell Border" id="184"/>
-          <p:cNvCxnSpPr/>
-          <p:nvPr/>
-        </p:nvCxnSpPr>
-        <p:spPr>
-          <a:xfrm>
-            <a:off x="431800" y="9240101"/>
+          <p:cNvPr name="GraphCompose Table Cell Border" id="185"/>
+          <p:cNvCxnSpPr/>
+          <p:nvPr/>
+        </p:nvCxnSpPr>
+        <p:spPr>
+          <a:xfrm>
+            <a:off x="431800" y="9247092"/>
             <a:ext cx="0" cy="289401"/>
           </a:xfrm>
           <a:prstGeom prst="line">
@@ -9770,13 +9807,13 @@
       </p:cxnSp>
       <p:cxnSp>
         <p:nvCxnSpPr>
-          <p:cNvPr name="GraphCompose Table Cell Border" id="185"/>
-          <p:cNvCxnSpPr/>
-          <p:nvPr/>
-        </p:nvCxnSpPr>
-        <p:spPr>
-          <a:xfrm>
-            <a:off x="1193800" y="9240101"/>
+          <p:cNvPr name="GraphCompose Table Cell Border" id="186"/>
+          <p:cNvCxnSpPr/>
+          <p:nvPr/>
+        </p:nvCxnSpPr>
+        <p:spPr>
+          <a:xfrm>
+            <a:off x="1193800" y="9247092"/>
             <a:ext cx="0" cy="289401"/>
           </a:xfrm>
           <a:prstGeom prst="line">
@@ -9791,13 +9828,13 @@
       </p:cxnSp>
       <p:sp>
         <p:nvSpPr>
-          <p:cNvPr name="GraphCompose Table Cell Text" id="186"/>
+          <p:cNvPr name="GraphCompose Table Cell Text" id="187"/>
           <p:cNvSpPr txBox="true"/>
           <p:nvPr/>
         </p:nvSpPr>
         <p:spPr>
           <a:xfrm>
-            <a:off x="546100" y="9306406"/>
+            <a:off x="546100" y="9313398"/>
             <a:ext cx="443814" cy="111601"/>
           </a:xfrm>
           <a:prstGeom prst="rect">
@@ -9828,13 +9865,13 @@
       </p:sp>
       <p:cxnSp>
         <p:nvCxnSpPr>
-          <p:cNvPr name="GraphCompose Table Cell Border" id="187"/>
-          <p:cNvCxnSpPr/>
-          <p:nvPr/>
-        </p:nvCxnSpPr>
-        <p:spPr>
-          <a:xfrm>
-            <a:off x="1191260" y="9529502"/>
+          <p:cNvPr name="GraphCompose Table Cell Border" id="188"/>
+          <p:cNvCxnSpPr/>
+          <p:nvPr/>
+        </p:nvCxnSpPr>
+        <p:spPr>
+          <a:xfrm>
+            <a:off x="1191260" y="9536494"/>
             <a:ext cx="2225008" cy="0"/>
           </a:xfrm>
           <a:prstGeom prst="line">
@@ -9849,13 +9886,13 @@
       </p:cxnSp>
       <p:cxnSp>
         <p:nvCxnSpPr>
-          <p:cNvPr name="GraphCompose Table Cell Border" id="188"/>
-          <p:cNvCxnSpPr/>
-          <p:nvPr/>
-        </p:nvCxnSpPr>
-        <p:spPr>
-          <a:xfrm>
-            <a:off x="3413728" y="9240101"/>
+          <p:cNvPr name="GraphCompose Table Cell Border" id="189"/>
+          <p:cNvCxnSpPr/>
+          <p:nvPr/>
+        </p:nvCxnSpPr>
+        <p:spPr>
+          <a:xfrm>
+            <a:off x="3413728" y="9247092"/>
             <a:ext cx="0" cy="289401"/>
           </a:xfrm>
           <a:prstGeom prst="line">
@@ -9870,13 +9907,13 @@
       </p:cxnSp>
       <p:sp>
         <p:nvSpPr>
-          <p:cNvPr name="GraphCompose Table Cell Text" id="189"/>
+          <p:cNvPr name="GraphCompose Table Cell Text" id="190"/>
           <p:cNvSpPr txBox="true"/>
           <p:nvPr/>
         </p:nvSpPr>
         <p:spPr>
           <a:xfrm>
-            <a:off x="1308100" y="9306406"/>
+            <a:off x="1308100" y="9313398"/>
             <a:ext cx="1925517" cy="111601"/>
           </a:xfrm>
           <a:prstGeom prst="rect">
@@ -9907,13 +9944,13 @@
       </p:sp>
       <p:cxnSp>
         <p:nvCxnSpPr>
-          <p:cNvPr name="GraphCompose Table Cell Border" id="190"/>
-          <p:cNvCxnSpPr/>
-          <p:nvPr/>
-        </p:nvCxnSpPr>
-        <p:spPr>
-          <a:xfrm>
-            <a:off x="3411188" y="9529502"/>
+          <p:cNvPr name="GraphCompose Table Cell Border" id="191"/>
+          <p:cNvCxnSpPr/>
+          <p:nvPr/>
+        </p:nvCxnSpPr>
+        <p:spPr>
+          <a:xfrm>
+            <a:off x="3411188" y="9536494"/>
             <a:ext cx="1021080" cy="0"/>
           </a:xfrm>
           <a:prstGeom prst="line">
@@ -9928,13 +9965,13 @@
       </p:cxnSp>
       <p:cxnSp>
         <p:nvCxnSpPr>
-          <p:cNvPr name="GraphCompose Table Cell Border" id="191"/>
-          <p:cNvCxnSpPr/>
-          <p:nvPr/>
-        </p:nvCxnSpPr>
-        <p:spPr>
-          <a:xfrm>
-            <a:off x="4429728" y="9240101"/>
+          <p:cNvPr name="GraphCompose Table Cell Border" id="192"/>
+          <p:cNvCxnSpPr/>
+          <p:nvPr/>
+        </p:nvCxnSpPr>
+        <p:spPr>
+          <a:xfrm>
+            <a:off x="4429728" y="9247092"/>
             <a:ext cx="0" cy="289401"/>
           </a:xfrm>
           <a:prstGeom prst="line">
@@ -9949,13 +9986,13 @@
       </p:cxnSp>
       <p:sp>
         <p:nvSpPr>
-          <p:cNvPr name="GraphCompose Table Cell Text" id="192"/>
+          <p:cNvPr name="GraphCompose Table Cell Text" id="193"/>
           <p:cNvSpPr txBox="true"/>
           <p:nvPr/>
         </p:nvSpPr>
         <p:spPr>
           <a:xfrm>
-            <a:off x="3528028" y="9306406"/>
+            <a:off x="3528028" y="9313398"/>
             <a:ext cx="236055" cy="111601"/>
           </a:xfrm>
           <a:prstGeom prst="rect">
@@ -9986,13 +10023,13 @@
       </p:sp>
       <p:cxnSp>
         <p:nvCxnSpPr>
-          <p:cNvPr name="GraphCompose Table Cell Border" id="193"/>
-          <p:cNvCxnSpPr/>
-          <p:nvPr/>
-        </p:nvCxnSpPr>
-        <p:spPr>
-          <a:xfrm>
-            <a:off x="4427188" y="9529502"/>
+          <p:cNvPr name="GraphCompose Table Cell Border" id="194"/>
+          <p:cNvCxnSpPr/>
+          <p:nvPr/>
+        </p:nvCxnSpPr>
+        <p:spPr>
+          <a:xfrm>
+            <a:off x="4427188" y="9536494"/>
             <a:ext cx="1021080" cy="0"/>
           </a:xfrm>
           <a:prstGeom prst="line">
@@ -10007,13 +10044,13 @@
       </p:cxnSp>
       <p:cxnSp>
         <p:nvCxnSpPr>
-          <p:cNvPr name="GraphCompose Table Cell Border" id="194"/>
-          <p:cNvCxnSpPr/>
-          <p:nvPr/>
-        </p:nvCxnSpPr>
-        <p:spPr>
-          <a:xfrm>
-            <a:off x="5445728" y="9240101"/>
+          <p:cNvPr name="GraphCompose Table Cell Border" id="195"/>
+          <p:cNvCxnSpPr/>
+          <p:nvPr/>
+        </p:nvCxnSpPr>
+        <p:spPr>
+          <a:xfrm>
+            <a:off x="5445728" y="9247092"/>
             <a:ext cx="0" cy="289401"/>
           </a:xfrm>
           <a:prstGeom prst="line">
@@ -10028,13 +10065,13 @@
       </p:cxnSp>
       <p:sp>
         <p:nvSpPr>
-          <p:cNvPr name="GraphCompose Table Cell Text" id="195"/>
+          <p:cNvPr name="GraphCompose Table Cell Text" id="196"/>
           <p:cNvSpPr txBox="true"/>
           <p:nvPr/>
         </p:nvSpPr>
         <p:spPr>
           <a:xfrm>
-            <a:off x="4544028" y="9306406"/>
+            <a:off x="4544028" y="9313398"/>
             <a:ext cx="269475" cy="111601"/>
           </a:xfrm>
           <a:prstGeom prst="rect">
@@ -10065,13 +10102,13 @@
       </p:sp>
       <p:cxnSp>
         <p:nvCxnSpPr>
-          <p:cNvPr name="GraphCompose Table Cell Border" id="196"/>
-          <p:cNvCxnSpPr/>
-          <p:nvPr/>
-        </p:nvCxnSpPr>
-        <p:spPr>
-          <a:xfrm>
-            <a:off x="5443188" y="9529502"/>
+          <p:cNvPr name="GraphCompose Table Cell Border" id="197"/>
+          <p:cNvCxnSpPr/>
+          <p:nvPr/>
+        </p:nvCxnSpPr>
+        <p:spPr>
+          <a:xfrm>
+            <a:off x="5443188" y="9536494"/>
             <a:ext cx="1018540" cy="0"/>
           </a:xfrm>
           <a:prstGeom prst="line">
@@ -10086,13 +10123,13 @@
       </p:cxnSp>
       <p:cxnSp>
         <p:nvCxnSpPr>
-          <p:cNvPr name="GraphCompose Table Cell Border" id="197"/>
-          <p:cNvCxnSpPr/>
-          <p:nvPr/>
-        </p:nvCxnSpPr>
-        <p:spPr>
-          <a:xfrm>
-            <a:off x="6461728" y="9240101"/>
+          <p:cNvPr name="GraphCompose Table Cell Border" id="198"/>
+          <p:cNvCxnSpPr/>
+          <p:nvPr/>
+        </p:nvCxnSpPr>
+        <p:spPr>
+          <a:xfrm>
+            <a:off x="6461728" y="9247092"/>
             <a:ext cx="0" cy="289401"/>
           </a:xfrm>
           <a:prstGeom prst="line">
@@ -10107,13 +10144,13 @@
       </p:cxnSp>
       <p:sp>
         <p:nvSpPr>
-          <p:cNvPr name="GraphCompose Table Cell Text" id="198"/>
+          <p:cNvPr name="GraphCompose Table Cell Text" id="199"/>
           <p:cNvSpPr txBox="true"/>
           <p:nvPr/>
         </p:nvSpPr>
         <p:spPr>
           <a:xfrm>
-            <a:off x="5560028" y="9306406"/>
+            <a:off x="5560028" y="9313398"/>
             <a:ext cx="403758" cy="111601"/>
           </a:xfrm>
           <a:prstGeom prst="rect">
@@ -10144,13 +10181,13 @@
       </p:sp>
       <p:cxnSp>
         <p:nvCxnSpPr>
-          <p:cNvPr name="GraphCompose Table Cell Border" id="199"/>
-          <p:cNvCxnSpPr/>
-          <p:nvPr/>
-        </p:nvCxnSpPr>
-        <p:spPr>
-          <a:xfrm>
-            <a:off x="431800" y="9818903"/>
+          <p:cNvPr name="GraphCompose Table Cell Border" id="200"/>
+          <p:cNvCxnSpPr/>
+          <p:nvPr/>
+        </p:nvCxnSpPr>
+        <p:spPr>
+          <a:xfrm>
+            <a:off x="431800" y="9825895"/>
             <a:ext cx="764540" cy="0"/>
           </a:xfrm>
           <a:prstGeom prst="line">
@@ -10165,13 +10202,13 @@
       </p:cxnSp>
       <p:cxnSp>
         <p:nvCxnSpPr>
-          <p:cNvPr name="GraphCompose Table Cell Border" id="200"/>
-          <p:cNvCxnSpPr/>
-          <p:nvPr/>
-        </p:nvCxnSpPr>
-        <p:spPr>
-          <a:xfrm>
-            <a:off x="431800" y="9529502"/>
+          <p:cNvPr name="GraphCompose Table Cell Border" id="201"/>
+          <p:cNvCxnSpPr/>
+          <p:nvPr/>
+        </p:nvCxnSpPr>
+        <p:spPr>
+          <a:xfrm>
+            <a:off x="431800" y="9536494"/>
             <a:ext cx="0" cy="289401"/>
           </a:xfrm>
           <a:prstGeom prst="line">
@@ -10186,13 +10223,13 @@
       </p:cxnSp>
       <p:cxnSp>
         <p:nvCxnSpPr>
-          <p:cNvPr name="GraphCompose Table Cell Border" id="201"/>
-          <p:cNvCxnSpPr/>
-          <p:nvPr/>
-        </p:nvCxnSpPr>
-        <p:spPr>
-          <a:xfrm>
-            <a:off x="1193800" y="9529502"/>
+          <p:cNvPr name="GraphCompose Table Cell Border" id="202"/>
+          <p:cNvCxnSpPr/>
+          <p:nvPr/>
+        </p:nvCxnSpPr>
+        <p:spPr>
+          <a:xfrm>
+            <a:off x="1193800" y="9536494"/>
             <a:ext cx="0" cy="289401"/>
           </a:xfrm>
           <a:prstGeom prst="line">
@@ -10207,13 +10244,13 @@
       </p:cxnSp>
       <p:sp>
         <p:nvSpPr>
-          <p:cNvPr name="GraphCompose Table Cell Text" id="202"/>
+          <p:cNvPr name="GraphCompose Table Cell Text" id="203"/>
           <p:cNvSpPr txBox="true"/>
           <p:nvPr/>
         </p:nvSpPr>
         <p:spPr>
           <a:xfrm>
-            <a:off x="546100" y="9595808"/>
+            <a:off x="546100" y="9602799"/>
             <a:ext cx="443814" cy="111601"/>
           </a:xfrm>
           <a:prstGeom prst="rect">
@@ -10244,13 +10281,13 @@
       </p:sp>
       <p:cxnSp>
         <p:nvCxnSpPr>
-          <p:cNvPr name="GraphCompose Table Cell Border" id="203"/>
-          <p:cNvCxnSpPr/>
-          <p:nvPr/>
-        </p:nvCxnSpPr>
-        <p:spPr>
-          <a:xfrm>
-            <a:off x="1191260" y="9818903"/>
+          <p:cNvPr name="GraphCompose Table Cell Border" id="204"/>
+          <p:cNvCxnSpPr/>
+          <p:nvPr/>
+        </p:nvCxnSpPr>
+        <p:spPr>
+          <a:xfrm>
+            <a:off x="1191260" y="9825895"/>
             <a:ext cx="2225008" cy="0"/>
           </a:xfrm>
           <a:prstGeom prst="line">
@@ -10265,13 +10302,13 @@
       </p:cxnSp>
       <p:cxnSp>
         <p:nvCxnSpPr>
-          <p:cNvPr name="GraphCompose Table Cell Border" id="204"/>
-          <p:cNvCxnSpPr/>
-          <p:nvPr/>
-        </p:nvCxnSpPr>
-        <p:spPr>
-          <a:xfrm>
-            <a:off x="3413728" y="9529502"/>
+          <p:cNvPr name="GraphCompose Table Cell Border" id="205"/>
+          <p:cNvCxnSpPr/>
+          <p:nvPr/>
+        </p:nvCxnSpPr>
+        <p:spPr>
+          <a:xfrm>
+            <a:off x="3413728" y="9536494"/>
             <a:ext cx="0" cy="289401"/>
           </a:xfrm>
           <a:prstGeom prst="line">
@@ -10286,13 +10323,13 @@
       </p:cxnSp>
       <p:sp>
         <p:nvSpPr>
-          <p:cNvPr name="GraphCompose Table Cell Text" id="205"/>
+          <p:cNvPr name="GraphCompose Table Cell Text" id="206"/>
           <p:cNvSpPr txBox="true"/>
           <p:nvPr/>
         </p:nvSpPr>
         <p:spPr>
           <a:xfrm>
-            <a:off x="1308100" y="9595808"/>
+            <a:off x="1308100" y="9602799"/>
             <a:ext cx="1925517" cy="111601"/>
           </a:xfrm>
           <a:prstGeom prst="rect">
@@ -10323,13 +10360,13 @@
       </p:sp>
       <p:cxnSp>
         <p:nvCxnSpPr>
-          <p:cNvPr name="GraphCompose Table Cell Border" id="206"/>
-          <p:cNvCxnSpPr/>
-          <p:nvPr/>
-        </p:nvCxnSpPr>
-        <p:spPr>
-          <a:xfrm>
-            <a:off x="3411188" y="9818903"/>
+          <p:cNvPr name="GraphCompose Table Cell Border" id="207"/>
+          <p:cNvCxnSpPr/>
+          <p:nvPr/>
+        </p:nvCxnSpPr>
+        <p:spPr>
+          <a:xfrm>
+            <a:off x="3411188" y="9825895"/>
             <a:ext cx="1021080" cy="0"/>
           </a:xfrm>
           <a:prstGeom prst="line">
@@ -10344,13 +10381,13 @@
       </p:cxnSp>
       <p:cxnSp>
         <p:nvCxnSpPr>
-          <p:cNvPr name="GraphCompose Table Cell Border" id="207"/>
-          <p:cNvCxnSpPr/>
-          <p:nvPr/>
-        </p:nvCxnSpPr>
-        <p:spPr>
-          <a:xfrm>
-            <a:off x="4429728" y="9529502"/>
+          <p:cNvPr name="GraphCompose Table Cell Border" id="208"/>
+          <p:cNvCxnSpPr/>
+          <p:nvPr/>
+        </p:nvCxnSpPr>
+        <p:spPr>
+          <a:xfrm>
+            <a:off x="4429728" y="9536494"/>
             <a:ext cx="0" cy="289401"/>
           </a:xfrm>
           <a:prstGeom prst="line">
@@ -10365,13 +10402,13 @@
       </p:cxnSp>
       <p:sp>
         <p:nvSpPr>
-          <p:cNvPr name="GraphCompose Table Cell Text" id="208"/>
+          <p:cNvPr name="GraphCompose Table Cell Text" id="209"/>
           <p:cNvSpPr txBox="true"/>
           <p:nvPr/>
         </p:nvSpPr>
         <p:spPr>
           <a:xfrm>
-            <a:off x="3528028" y="9595808"/>
+            <a:off x="3528028" y="9602799"/>
             <a:ext cx="236055" cy="111601"/>
           </a:xfrm>
           <a:prstGeom prst="rect">
@@ -10402,13 +10439,13 @@
       </p:sp>
       <p:cxnSp>
         <p:nvCxnSpPr>
-          <p:cNvPr name="GraphCompose Table Cell Border" id="209"/>
-          <p:cNvCxnSpPr/>
-          <p:nvPr/>
-        </p:nvCxnSpPr>
-        <p:spPr>
-          <a:xfrm>
-            <a:off x="4427188" y="9818903"/>
+          <p:cNvPr name="GraphCompose Table Cell Border" id="210"/>
+          <p:cNvCxnSpPr/>
+          <p:nvPr/>
+        </p:nvCxnSpPr>
+        <p:spPr>
+          <a:xfrm>
+            <a:off x="4427188" y="9825895"/>
             <a:ext cx="1021080" cy="0"/>
           </a:xfrm>
           <a:prstGeom prst="line">
@@ -10423,13 +10460,13 @@
       </p:cxnSp>
       <p:cxnSp>
         <p:nvCxnSpPr>
-          <p:cNvPr name="GraphCompose Table Cell Border" id="210"/>
-          <p:cNvCxnSpPr/>
-          <p:nvPr/>
-        </p:nvCxnSpPr>
-        <p:spPr>
-          <a:xfrm>
-            <a:off x="5445728" y="9529502"/>
+          <p:cNvPr name="GraphCompose Table Cell Border" id="211"/>
+          <p:cNvCxnSpPr/>
+          <p:nvPr/>
+        </p:nvCxnSpPr>
+        <p:spPr>
+          <a:xfrm>
+            <a:off x="5445728" y="9536494"/>
             <a:ext cx="0" cy="289401"/>
           </a:xfrm>
           <a:prstGeom prst="line">
@@ -10444,13 +10481,13 @@
       </p:cxnSp>
       <p:sp>
         <p:nvSpPr>
-          <p:cNvPr name="GraphCompose Table Cell Text" id="211"/>
+          <p:cNvPr name="GraphCompose Table Cell Text" id="212"/>
           <p:cNvSpPr txBox="true"/>
           <p:nvPr/>
         </p:nvSpPr>
         <p:spPr>
           <a:xfrm>
-            <a:off x="4544028" y="9595808"/>
+            <a:off x="4544028" y="9602799"/>
             <a:ext cx="343313" cy="111601"/>
           </a:xfrm>
           <a:prstGeom prst="rect">
@@ -10481,13 +10518,13 @@
       </p:sp>
       <p:cxnSp>
         <p:nvCxnSpPr>
-          <p:cNvPr name="GraphCompose Table Cell Border" id="212"/>
-          <p:cNvCxnSpPr/>
-          <p:nvPr/>
-        </p:nvCxnSpPr>
-        <p:spPr>
-          <a:xfrm>
-            <a:off x="5443188" y="9818903"/>
+          <p:cNvPr name="GraphCompose Table Cell Border" id="213"/>
+          <p:cNvCxnSpPr/>
+          <p:nvPr/>
+        </p:nvCxnSpPr>
+        <p:spPr>
+          <a:xfrm>
+            <a:off x="5443188" y="9825895"/>
             <a:ext cx="1018540" cy="0"/>
           </a:xfrm>
           <a:prstGeom prst="line">
@@ -10502,13 +10539,13 @@
       </p:cxnSp>
       <p:cxnSp>
         <p:nvCxnSpPr>
-          <p:cNvPr name="GraphCompose Table Cell Border" id="213"/>
-          <p:cNvCxnSpPr/>
-          <p:nvPr/>
-        </p:nvCxnSpPr>
-        <p:spPr>
-          <a:xfrm>
-            <a:off x="6461728" y="9529502"/>
+          <p:cNvPr name="GraphCompose Table Cell Border" id="214"/>
+          <p:cNvCxnSpPr/>
+          <p:nvPr/>
+        </p:nvCxnSpPr>
+        <p:spPr>
+          <a:xfrm>
+            <a:off x="6461728" y="9536494"/>
             <a:ext cx="0" cy="289401"/>
           </a:xfrm>
           <a:prstGeom prst="line">
@@ -10523,13 +10560,13 @@
       </p:cxnSp>
       <p:sp>
         <p:nvSpPr>
-          <p:cNvPr name="GraphCompose Table Cell Text" id="214"/>
+          <p:cNvPr name="GraphCompose Table Cell Text" id="215"/>
           <p:cNvSpPr txBox="true"/>
           <p:nvPr/>
         </p:nvSpPr>
         <p:spPr>
           <a:xfrm>
-            <a:off x="5560028" y="9595808"/>
+            <a:off x="5560028" y="9602799"/>
             <a:ext cx="403758" cy="111601"/>
           </a:xfrm>
           <a:prstGeom prst="rect">
@@ -10560,7 +10597,7 @@
       </p:sp>
       <p:sp>
         <p:nvSpPr>
-          <p:cNvPr name="GraphCompose Header" id="215"/>
+          <p:cNvPr name="GraphCompose Header" id="216"/>
           <p:cNvSpPr txBox="true"/>
           <p:nvPr/>
         </p:nvSpPr>
@@ -10597,7 +10634,7 @@
       </p:sp>
       <p:sp>
         <p:nvSpPr>
-          <p:cNvPr name="GraphCompose Header" id="216"/>
+          <p:cNvPr name="GraphCompose Header" id="217"/>
           <p:cNvSpPr txBox="true"/>
           <p:nvPr/>
         </p:nvSpPr>
@@ -10626,7 +10663,7 @@
                 </a:solidFill>
                 <a:latin typeface="Arial"/>
               </a:rPr>
-              <a:t>2026-07-23</a:t>
+              <a:t>2026-07-27</a:t>
             </a:r>
             <a:endParaRPr lang="en-US" sz="1100"/>
           </a:p>
@@ -10634,7 +10671,7 @@
       </p:sp>
       <p:cxnSp>
         <p:nvCxnSpPr>
-          <p:cNvPr name="GraphCompose Header Separator" id="217"/>
+          <p:cNvPr name="GraphCompose Header Separator" id="218"/>
           <p:cNvCxnSpPr/>
           <p:nvPr/>
         </p:nvCxnSpPr>
@@ -10655,14 +10692,14 @@
       </p:cxnSp>
       <p:sp>
         <p:nvSpPr>
-          <p:cNvPr name="GraphCompose Footer" id="218"/>
+          <p:cNvPr name="GraphCompose Footer" id="219"/>
           <p:cNvSpPr txBox="true"/>
           <p:nvPr/>
         </p:nvSpPr>
         <p:spPr>
           <a:xfrm>
             <a:off x="431800" y="10321827"/>
-            <a:ext cx="1270343" cy="148590"/>
+            <a:ext cx="1875219" cy="148590"/>
           </a:xfrm>
           <a:prstGeom prst="rect">
             <a:avLst/>
@@ -10684,7 +10721,7 @@
                 </a:solidFill>
                 <a:latin typeface="Arial"/>
               </a:rPr>
-              <a:t>v1.5 — "intuitive" release</a:t>
+              <a:t>GraphCompose 2.1 — sample report</a:t>
             </a:r>
             <a:endParaRPr lang="en-US" sz="1100"/>
           </a:p>
@@ -10692,7 +10729,7 @@
       </p:sp>
       <p:sp>
         <p:nvSpPr>
-          <p:cNvPr name="GraphCompose Footer" id="219"/>
+          <p:cNvPr name="GraphCompose Footer" id="220"/>
           <p:cNvSpPr txBox="true"/>
           <p:nvPr/>
         </p:nvSpPr>
@@ -10729,7 +10766,7 @@
       </p:sp>
       <p:cxnSp>
         <p:nvCxnSpPr>
-          <p:cNvPr name="GraphCompose Footer Separator" id="220"/>
+          <p:cNvPr name="GraphCompose Footer Separator" id="221"/>
           <p:cNvCxnSpPr/>
           <p:nvPr/>
         </p:nvCxnSpPr>
@@ -12994,7 +13031,7 @@
               <a:defRPr/>
             </a:pPr>
             <a:r>
-              <a:rPr lang="en-US" sz="950" b="true" i="false" u="none" strike="noStrike" kern="0">
+              <a:rPr lang="en-US" sz="950" b="false" i="false" u="none" strike="noStrike" kern="0">
                 <a:solidFill>
                   <a:srgbClr val="FFFFFF"/>
                 </a:solidFill>
@@ -13094,7 +13131,7 @@
               <a:defRPr/>
             </a:pPr>
             <a:r>
-              <a:rPr lang="en-US" sz="950" b="true" i="false" u="none" strike="noStrike" kern="0">
+              <a:rPr lang="en-US" sz="950" b="false" i="false" u="none" strike="noStrike" kern="0">
                 <a:solidFill>
                   <a:srgbClr val="FFFFFF"/>
                 </a:solidFill>
@@ -13194,7 +13231,7 @@
               <a:defRPr/>
             </a:pPr>
             <a:r>
-              <a:rPr lang="en-US" sz="950" b="true" i="false" u="none" strike="noStrike" kern="0">
+              <a:rPr lang="en-US" sz="950" b="false" i="false" u="none" strike="noStrike" kern="0">
                 <a:solidFill>
                   <a:srgbClr val="FFFFFF"/>
                 </a:solidFill>
@@ -13294,7 +13331,7 @@
               <a:defRPr/>
             </a:pPr>
             <a:r>
-              <a:rPr lang="en-US" sz="950" b="true" i="false" u="none" strike="noStrike" kern="0">
+              <a:rPr lang="en-US" sz="950" b="false" i="false" u="none" strike="noStrike" kern="0">
                 <a:solidFill>
                   <a:srgbClr val="FFFFFF"/>
                 </a:solidFill>
@@ -13394,7 +13431,7 @@
               <a:defRPr/>
             </a:pPr>
             <a:r>
-              <a:rPr lang="en-US" sz="950" b="true" i="false" u="none" strike="noStrike" kern="0">
+              <a:rPr lang="en-US" sz="950" b="false" i="false" u="none" strike="noStrike" kern="0">
                 <a:solidFill>
                   <a:srgbClr val="FFFFFF"/>
                 </a:solidFill>
@@ -20566,7 +20603,7 @@
               <a:defRPr/>
             </a:pPr>
             <a:r>
-              <a:rPr lang="en-US" sz="1000" b="true" i="false" u="none" strike="noStrike" kern="0">
+              <a:rPr lang="en-US" sz="1000" b="false" i="false" u="none" strike="noStrike" kern="0">
                 <a:solidFill>
                   <a:srgbClr val="FFFFFF"/>
                 </a:solidFill>
@@ -20645,7 +20682,7 @@
               <a:defRPr/>
             </a:pPr>
             <a:r>
-              <a:rPr lang="en-US" sz="1000" b="true" i="false" u="none" strike="noStrike" kern="0">
+              <a:rPr lang="en-US" sz="1000" b="false" i="false" u="none" strike="noStrike" kern="0">
                 <a:solidFill>
                   <a:srgbClr val="FFFFFF"/>
                 </a:solidFill>
@@ -20724,7 +20761,7 @@
               <a:defRPr/>
             </a:pPr>
             <a:r>
-              <a:rPr lang="en-US" sz="1000" b="true" i="false" u="none" strike="noStrike" kern="0">
+              <a:rPr lang="en-US" sz="1000" b="false" i="false" u="none" strike="noStrike" kern="0">
                 <a:solidFill>
                   <a:srgbClr val="FFFFFF"/>
                 </a:solidFill>
@@ -20803,7 +20840,7 @@
               <a:defRPr/>
             </a:pPr>
             <a:r>
-              <a:rPr lang="en-US" sz="1000" b="true" i="false" u="none" strike="noStrike" kern="0">
+              <a:rPr lang="en-US" sz="1000" b="false" i="false" u="none" strike="noStrike" kern="0">
                 <a:solidFill>
                   <a:srgbClr val="FFFFFF"/>
                 </a:solidFill>
@@ -20882,7 +20919,7 @@
               <a:defRPr/>
             </a:pPr>
             <a:r>
-              <a:rPr lang="en-US" sz="1000" b="true" i="false" u="none" strike="noStrike" kern="0">
+              <a:rPr lang="en-US" sz="1000" b="false" i="false" u="none" strike="noStrike" kern="0">
                 <a:solidFill>
                   <a:srgbClr val="FFFFFF"/>
                 </a:solidFill>
@@ -20973,7 +21010,7 @@
               <a:defRPr/>
             </a:pPr>
             <a:r>
-              <a:rPr lang="en-US" sz="1100" b="true" i="false" u="none" strike="noStrike" kern="0">
+              <a:rPr lang="en-US" sz="1100" b="false" i="false" u="none" strike="noStrike" kern="0">
                 <a:solidFill>
                   <a:srgbClr val="222632"/>
                 </a:solidFill>
@@ -21294,7 +21331,7 @@
               <a:defRPr/>
             </a:pPr>
             <a:r>
-              <a:rPr lang="en-US" sz="1100" b="true" i="false" u="none" strike="noStrike" kern="0">
+              <a:rPr lang="en-US" sz="1100" b="false" i="false" u="none" strike="noStrike" kern="0">
                 <a:solidFill>
                   <a:srgbClr val="222632"/>
                 </a:solidFill>
@@ -21779,7 +21816,7 @@
         <p:spPr>
           <a:xfrm>
             <a:off x="5014600" y="6342697"/>
-            <a:ext cx="2097877" cy="1145565"/>
+            <a:ext cx="1970199" cy="1145565"/>
           </a:xfrm>
           <a:prstGeom prst="roundRect">
             <a:avLst>
@@ -21803,7 +21840,7 @@
         <p:spPr>
           <a:xfrm>
             <a:off x="5014600" y="6342697"/>
-            <a:ext cx="2097877" cy="0"/>
+            <a:ext cx="1970199" cy="0"/>
           </a:xfrm>
           <a:prstGeom prst="line">
             <a:avLst/>
@@ -21849,7 +21886,7 @@
               <a:defRPr/>
             </a:pPr>
             <a:r>
-              <a:rPr lang="en-US" sz="1100" b="true" i="false" u="none" strike="noStrike" kern="0">
+              <a:rPr lang="en-US" sz="1100" b="false" i="false" u="none" strike="noStrike" kern="0">
                 <a:solidFill>
                   <a:srgbClr val="222632"/>
                 </a:solidFill>
@@ -21962,7 +21999,7 @@
         <p:spPr>
           <a:xfrm>
             <a:off x="5192400" y="6951363"/>
-            <a:ext cx="1670698" cy="101029"/>
+            <a:ext cx="1615869" cy="101029"/>
           </a:xfrm>
           <a:prstGeom prst="rect">
             <a:avLst/>
@@ -21993,7 +22030,7 @@
                 </a:solidFill>
                 <a:latin typeface="Arial"/>
               </a:rPr>
-              <a:t>v1.5 extends Transformable&lt;T&gt; to</a:t>
+              <a:t>Transformable&lt;T&gt; reaches every</a:t>
             </a:r>
             <a:endParaRPr lang="en-US" sz="1100"/>
           </a:p>
@@ -22008,7 +22045,7 @@
         <p:spPr>
           <a:xfrm>
             <a:off x="5192400" y="7070172"/>
-            <a:ext cx="1512875" cy="101029"/>
+            <a:ext cx="1610081" cy="101029"/>
           </a:xfrm>
           <a:prstGeom prst="rect">
             <a:avLst/>
@@ -22039,7 +22076,7 @@
                 </a:solidFill>
                 <a:latin typeface="Arial"/>
               </a:rPr>
-              <a:t>every leaf builder so any shape</a:t>
+              <a:t>leaf builder, so any shape rotates</a:t>
             </a:r>
             <a:endParaRPr lang="en-US" sz="1100"/>
           </a:p>
@@ -22054,7 +22091,7 @@
         <p:spPr>
           <a:xfrm>
             <a:off x="5192400" y="7188980"/>
-            <a:ext cx="1743547" cy="101029"/>
+            <a:ext cx="1379299" cy="101029"/>
           </a:xfrm>
           <a:prstGeom prst="rect">
             <a:avLst/>
@@ -22085,7 +22122,7 @@
                 </a:solidFill>
                 <a:latin typeface="Arial"/>
               </a:rPr>
-              <a:t>rotates around its placement centre.</a:t>
+              <a:t>around its placement centre.</a:t>
             </a:r>
             <a:endParaRPr lang="en-US" sz="1100"/>
           </a:p>
@@ -22100,11 +22137,11 @@
         <p:spPr>
           <a:xfrm>
             <a:off x="431800" y="7700023"/>
-            <a:ext cx="6594246" cy="1517968"/>
+            <a:ext cx="6505169" cy="1682433"/>
           </a:xfrm>
           <a:prstGeom prst="roundRect">
             <a:avLst>
-              <a:gd name="adj" fmla="val 6693"/>
+              <a:gd name="adj" fmla="val 6039"/>
             </a:avLst>
           </a:prstGeom>
           <a:solidFill>
@@ -22123,8 +22160,8 @@
         </p:nvCxnSpPr>
         <p:spPr>
           <a:xfrm>
-            <a:off x="431800" y="9217990"/>
-            <a:ext cx="6594246" cy="0"/>
+            <a:off x="431800" y="9382455"/>
+            <a:ext cx="6505169" cy="0"/>
           </a:xfrm>
           <a:prstGeom prst="line">
             <a:avLst/>
@@ -22191,7 +22228,7 @@
         <p:spPr>
           <a:xfrm>
             <a:off x="609600" y="8145833"/>
-            <a:ext cx="6239916" cy="164465"/>
+            <a:ext cx="6150839" cy="164465"/>
           </a:xfrm>
           <a:prstGeom prst="rect">
             <a:avLst/>
@@ -22240,7 +22277,7 @@
                 </a:solidFill>
                 <a:latin typeface="Arial"/>
               </a:rPr>
-              <a:t>Tag</a:t>
+              <a:t>Publish</a:t>
             </a:r>
             <a:r>
               <a:rPr lang="en-US" sz="1400" b="false" i="false" u="none" strike="noStrike" kern="0">
@@ -22252,13 +22289,157 @@
               <a:t> </a:t>
             </a:r>
             <a:r>
+              <a:rPr lang="en-US" sz="1400" b="false" i="false" u="none" strike="noStrike" kern="0">
+                <a:solidFill>
+                  <a:srgbClr val="000000"/>
+                </a:solidFill>
+                <a:latin typeface="Arial"/>
+              </a:rPr>
+              <a:t>the</a:t>
+            </a:r>
+            <a:r>
+              <a:rPr lang="en-US" sz="1400" b="false" i="false" u="none" strike="noStrike" kern="0">
+                <a:solidFill>
+                  <a:srgbClr val="000000"/>
+                </a:solidFill>
+                <a:latin typeface="Arial"/>
+              </a:rPr>
+              <a:t> </a:t>
+            </a:r>
+            <a:r>
+              <a:rPr lang="en-US" sz="1400" b="false" i="false" u="none" strike="noStrike" kern="0">
+                <a:solidFill>
+                  <a:srgbClr val="000000"/>
+                </a:solidFill>
+                <a:latin typeface="Arial"/>
+              </a:rPr>
+              <a:t>release</a:t>
+            </a:r>
+            <a:r>
+              <a:rPr lang="en-US" sz="1400" b="false" i="false" u="none" strike="noStrike" kern="0">
+                <a:solidFill>
+                  <a:srgbClr val="000000"/>
+                </a:solidFill>
+                <a:latin typeface="Arial"/>
+              </a:rPr>
+              <a:t> </a:t>
+            </a:r>
+            <a:r>
+              <a:rPr lang="en-US" sz="1400" b="false" i="false" u="none" strike="noStrike" kern="0">
+                <a:solidFill>
+                  <a:srgbClr val="000000"/>
+                </a:solidFill>
+                <a:latin typeface="Arial"/>
+              </a:rPr>
+              <a:t>notes</a:t>
+            </a:r>
+            <a:r>
+              <a:rPr lang="en-US" sz="1400" b="false" i="false" u="none" strike="noStrike" kern="0">
+                <a:solidFill>
+                  <a:srgbClr val="000000"/>
+                </a:solidFill>
+                <a:latin typeface="Arial"/>
+              </a:rPr>
+              <a:t> </a:t>
+            </a:r>
+            <a:r>
+              <a:rPr lang="en-US" sz="1400" b="false" i="false" u="none" strike="noStrike" kern="0">
+                <a:solidFill>
+                  <a:srgbClr val="000000"/>
+                </a:solidFill>
+                <a:latin typeface="Arial"/>
+              </a:rPr>
+              <a:t>once</a:t>
+            </a:r>
+            <a:r>
+              <a:rPr lang="en-US" sz="1400" b="false" i="false" u="none" strike="noStrike" kern="0">
+                <a:solidFill>
+                  <a:srgbClr val="000000"/>
+                </a:solidFill>
+                <a:latin typeface="Arial"/>
+              </a:rPr>
+              <a:t> </a:t>
+            </a:r>
+            <a:r>
+              <a:rPr lang="en-US" sz="1400" b="false" i="false" u="none" strike="noStrike" kern="0">
+                <a:solidFill>
+                  <a:srgbClr val="000000"/>
+                </a:solidFill>
+                <a:latin typeface="Arial"/>
+              </a:rPr>
+              <a:t>the</a:t>
+            </a:r>
+            <a:r>
+              <a:rPr lang="en-US" sz="1400" b="false" i="false" u="none" strike="noStrike" kern="0">
+                <a:solidFill>
+                  <a:srgbClr val="000000"/>
+                </a:solidFill>
+                <a:latin typeface="Arial"/>
+              </a:rPr>
+              <a:t> </a:t>
+            </a:r>
+            <a:r>
+              <a:rPr lang="en-US" sz="1400" b="false" i="false" u="none" strike="noStrike" kern="0">
+                <a:solidFill>
+                  <a:srgbClr val="000000"/>
+                </a:solidFill>
+                <a:latin typeface="Arial"/>
+              </a:rPr>
+              <a:t>branch</a:t>
+            </a:r>
+            <a:r>
+              <a:rPr lang="en-US" sz="1400" b="false" i="false" u="none" strike="noStrike" kern="0">
+                <a:solidFill>
+                  <a:srgbClr val="000000"/>
+                </a:solidFill>
+                <a:latin typeface="Arial"/>
+              </a:rPr>
+              <a:t> </a:t>
+            </a:r>
+            <a:r>
               <a:rPr lang="en-US" sz="1400" b="true" i="false" u="none" strike="noStrike" kern="0">
                 <a:solidFill>
                   <a:srgbClr val="000000"/>
                 </a:solidFill>
                 <a:latin typeface="Arial"/>
               </a:rPr>
-              <a:t>v1.5.0</a:t>
+              <a:t>merges</a:t>
+            </a:r>
+            <a:r>
+              <a:rPr lang="en-US" sz="1400" b="true" i="false" u="none" strike="noStrike" kern="0">
+                <a:solidFill>
+                  <a:srgbClr val="000000"/>
+                </a:solidFill>
+                <a:latin typeface="Arial"/>
+              </a:rPr>
+              <a:t> </a:t>
+            </a:r>
+            <a:r>
+              <a:rPr lang="en-US" sz="1400" b="true" i="false" u="none" strike="noStrike" kern="0">
+                <a:solidFill>
+                  <a:srgbClr val="000000"/>
+                </a:solidFill>
+                <a:latin typeface="Arial"/>
+              </a:rPr>
+              <a:t>through</a:t>
+            </a:r>
+            <a:r>
+              <a:rPr lang="en-US" sz="1400" b="true" i="false" u="none" strike="noStrike" kern="0">
+                <a:solidFill>
+                  <a:srgbClr val="000000"/>
+                </a:solidFill>
+                <a:latin typeface="Arial"/>
+              </a:rPr>
+              <a:t> </a:t>
+            </a:r>
+            <a:r>
+              <a:rPr lang="en-US" sz="1400" b="true" i="false" u="none" strike="noStrike" kern="0">
+                <a:solidFill>
+                  <a:srgbClr val="000000"/>
+                </a:solidFill>
+                <a:latin typeface="Arial"/>
+              </a:rPr>
+              <a:t>review</a:t>
             </a:r>
             <a:r>
               <a:rPr lang="en-US" sz="1400" b="false" i="false" u="none" strike="noStrike" kern="0">
@@ -22267,153 +22448,18 @@
                 </a:solidFill>
                 <a:latin typeface="Arial"/>
               </a:rPr>
+              <a:t>.</a:t>
+            </a:r>
+            <a:r>
+              <a:rPr lang="en-US" sz="1400" b="false" i="false" u="none" strike="noStrike" kern="0">
+                <a:solidFill>
+                  <a:srgbClr val="000000"/>
+                </a:solidFill>
+                <a:latin typeface="Arial"/>
+              </a:rPr>
               <a:t> </a:t>
             </a:r>
             <a:r>
-              <a:rPr lang="en-US" sz="1400" b="false" i="false" u="none" strike="noStrike" kern="0">
-                <a:solidFill>
-                  <a:srgbClr val="000000"/>
-                </a:solidFill>
-                <a:latin typeface="Arial"/>
-              </a:rPr>
-              <a:t>on</a:t>
-            </a:r>
-            <a:r>
-              <a:rPr lang="en-US" sz="1400" b="false" i="false" u="none" strike="noStrike" kern="0">
-                <a:solidFill>
-                  <a:srgbClr val="000000"/>
-                </a:solidFill>
-                <a:latin typeface="Arial"/>
-              </a:rPr>
-              <a:t> </a:t>
-            </a:r>
-            <a:r>
-              <a:rPr lang="en-US" sz="1400" b="false" i="false" u="none" strike="noStrike" kern="0">
-                <a:solidFill>
-                  <a:srgbClr val="000000"/>
-                </a:solidFill>
-                <a:latin typeface="Arial"/>
-              </a:rPr>
-              <a:t>main</a:t>
-            </a:r>
-            <a:r>
-              <a:rPr lang="en-US" sz="1400" b="false" i="false" u="none" strike="noStrike" kern="0">
-                <a:solidFill>
-                  <a:srgbClr val="000000"/>
-                </a:solidFill>
-                <a:latin typeface="Arial"/>
-              </a:rPr>
-              <a:t> </a:t>
-            </a:r>
-            <a:r>
-              <a:rPr lang="en-US" sz="1400" b="false" i="false" u="none" strike="noStrike" kern="0">
-                <a:solidFill>
-                  <a:srgbClr val="000000"/>
-                </a:solidFill>
-                <a:latin typeface="Arial"/>
-              </a:rPr>
-              <a:t>once</a:t>
-            </a:r>
-            <a:r>
-              <a:rPr lang="en-US" sz="1400" b="false" i="false" u="none" strike="noStrike" kern="0">
-                <a:solidFill>
-                  <a:srgbClr val="000000"/>
-                </a:solidFill>
-                <a:latin typeface="Arial"/>
-              </a:rPr>
-              <a:t> </a:t>
-            </a:r>
-            <a:r>
-              <a:rPr lang="en-US" sz="1400" b="false" i="false" u="none" strike="noStrike" kern="0">
-                <a:solidFill>
-                  <a:srgbClr val="000000"/>
-                </a:solidFill>
-                <a:latin typeface="Arial"/>
-              </a:rPr>
-              <a:t>develop</a:t>
-            </a:r>
-            <a:r>
-              <a:rPr lang="en-US" sz="1400" b="false" i="false" u="none" strike="noStrike" kern="0">
-                <a:solidFill>
-                  <a:srgbClr val="000000"/>
-                </a:solidFill>
-                <a:latin typeface="Arial"/>
-              </a:rPr>
-              <a:t> </a:t>
-            </a:r>
-            <a:r>
-              <a:rPr lang="en-US" sz="1400" b="false" i="false" u="none" strike="noStrike" kern="0">
-                <a:solidFill>
-                  <a:srgbClr val="000000"/>
-                </a:solidFill>
-                <a:latin typeface="Arial"/>
-              </a:rPr>
-              <a:t>is</a:t>
-            </a:r>
-            <a:r>
-              <a:rPr lang="en-US" sz="1400" b="false" i="false" u="none" strike="noStrike" kern="0">
-                <a:solidFill>
-                  <a:srgbClr val="000000"/>
-                </a:solidFill>
-                <a:latin typeface="Arial"/>
-              </a:rPr>
-              <a:t> </a:t>
-            </a:r>
-            <a:r>
-              <a:rPr lang="en-US" sz="1400" b="false" i="false" u="none" strike="noStrike" kern="0">
-                <a:solidFill>
-                  <a:srgbClr val="000000"/>
-                </a:solidFill>
-                <a:latin typeface="Arial"/>
-              </a:rPr>
-              <a:t>merged</a:t>
-            </a:r>
-            <a:r>
-              <a:rPr lang="en-US" sz="1400" b="false" i="false" u="none" strike="noStrike" kern="0">
-                <a:solidFill>
-                  <a:srgbClr val="000000"/>
-                </a:solidFill>
-                <a:latin typeface="Arial"/>
-              </a:rPr>
-              <a:t> </a:t>
-            </a:r>
-            <a:r>
-              <a:rPr lang="en-US" sz="1400" b="false" i="false" u="none" strike="noStrike" kern="0">
-                <a:solidFill>
-                  <a:srgbClr val="000000"/>
-                </a:solidFill>
-                <a:latin typeface="Arial"/>
-              </a:rPr>
-              <a:t>through</a:t>
-            </a:r>
-            <a:r>
-              <a:rPr lang="en-US" sz="1400" b="false" i="false" u="none" strike="noStrike" kern="0">
-                <a:solidFill>
-                  <a:srgbClr val="000000"/>
-                </a:solidFill>
-                <a:latin typeface="Arial"/>
-              </a:rPr>
-              <a:t> </a:t>
-            </a:r>
-            <a:r>
-              <a:rPr lang="en-US" sz="1400" b="false" i="false" u="none" strike="noStrike" kern="0">
-                <a:solidFill>
-                  <a:srgbClr val="000000"/>
-                </a:solidFill>
-                <a:latin typeface="Arial"/>
-              </a:rPr>
-              <a:t>PR.</a:t>
-            </a:r>
-            <a:r>
-              <a:rPr lang="en-US" sz="1400" b="false" i="false" u="none" strike="noStrike" kern="0">
-                <a:solidFill>
-                  <a:srgbClr val="000000"/>
-                </a:solidFill>
-                <a:latin typeface="Arial"/>
-              </a:rPr>
-              <a:t> </a:t>
-            </a:r>
-            <a:r>
               <a:rPr lang="en-US" sz="1400" b="true" i="false" u="none" strike="noStrike" kern="0">
                 <a:solidFill>
                   <a:srgbClr val="14505F"/>
@@ -22421,33 +22467,6 @@
                 <a:latin typeface="Arial"/>
               </a:rPr>
               <a:t>Owner:</a:t>
-            </a:r>
-            <a:r>
-              <a:rPr lang="en-US" sz="1400" b="true" i="false" u="none" strike="noStrike" kern="0">
-                <a:solidFill>
-                  <a:srgbClr val="14505F"/>
-                </a:solidFill>
-                <a:latin typeface="Arial"/>
-              </a:rPr>
-              <a:t> </a:t>
-            </a:r>
-            <a:r>
-              <a:rPr lang="en-US" sz="1400" b="true" i="false" u="none" strike="noStrike" kern="0">
-                <a:solidFill>
-                  <a:srgbClr val="14505F"/>
-                </a:solidFill>
-                <a:latin typeface="Arial"/>
-              </a:rPr>
-              <a:t>maintainer</a:t>
-            </a:r>
-            <a:r>
-              <a:rPr lang="en-US" sz="1400" b="false" i="false" u="none" strike="noStrike" kern="0">
-                <a:solidFill>
-                  <a:srgbClr val="000000"/>
-                </a:solidFill>
-                <a:latin typeface="Arial"/>
-              </a:rPr>
-              <a:t>.</a:t>
             </a:r>
             <a:endParaRPr lang="en-US" sz="1100"/>
           </a:p>
@@ -22461,8 +22480,8 @@
         </p:nvSpPr>
         <p:spPr>
           <a:xfrm>
-            <a:off x="609600" y="8411898"/>
-            <a:ext cx="5992063" cy="164465"/>
+            <a:off x="609600" y="8310298"/>
+            <a:ext cx="949833" cy="164465"/>
           </a:xfrm>
           <a:prstGeom prst="rect">
             <a:avLst/>
@@ -22487,193 +22506,13 @@
               <a:defRPr/>
             </a:pPr>
             <a:r>
-              <a:rPr lang="en-US" sz="1400" b="false" i="false" u="none" strike="noStrike" kern="0">
-                <a:solidFill>
-                  <a:srgbClr val="000000"/>
-                </a:solidFill>
-                <a:latin typeface="Arial"/>
-              </a:rPr>
-              <a:t>•</a:t>
-            </a:r>
-            <a:r>
-              <a:rPr lang="en-US" sz="1400" b="false" i="false" u="none" strike="noStrike" kern="0">
-                <a:solidFill>
-                  <a:srgbClr val="000000"/>
-                </a:solidFill>
-                <a:latin typeface="Arial"/>
-              </a:rPr>
-              <a:t> </a:t>
-            </a:r>
-            <a:r>
-              <a:rPr lang="en-US" sz="1400" b="false" i="false" u="none" strike="noStrike" kern="0">
-                <a:solidFill>
-                  <a:srgbClr val="000000"/>
-                </a:solidFill>
-                <a:latin typeface="Arial"/>
-              </a:rPr>
-              <a:t>Open</a:t>
-            </a:r>
-            <a:r>
-              <a:rPr lang="en-US" sz="1400" b="false" i="false" u="none" strike="noStrike" kern="0">
-                <a:solidFill>
-                  <a:srgbClr val="000000"/>
-                </a:solidFill>
-                <a:latin typeface="Arial"/>
-              </a:rPr>
-              <a:t> </a:t>
-            </a:r>
-            <a:r>
               <a:rPr lang="en-US" sz="1400" b="true" i="false" u="none" strike="noStrike" kern="0">
                 <a:solidFill>
-                  <a:srgbClr val="000000"/>
-                </a:solidFill>
-                <a:latin typeface="Arial"/>
-              </a:rPr>
-              <a:t>ADR</a:t>
-            </a:r>
-            <a:r>
-              <a:rPr lang="en-US" sz="1400" b="true" i="false" u="none" strike="noStrike" kern="0">
-                <a:solidFill>
-                  <a:srgbClr val="000000"/>
-                </a:solidFill>
-                <a:latin typeface="Arial"/>
-              </a:rPr>
-              <a:t> </a:t>
-            </a:r>
-            <a:r>
-              <a:rPr lang="en-US" sz="1400" b="true" i="false" u="none" strike="noStrike" kern="0">
-                <a:solidFill>
-                  <a:srgbClr val="000000"/>
-                </a:solidFill>
-                <a:latin typeface="Arial"/>
-              </a:rPr>
-              <a:t>0003</a:t>
-            </a:r>
-            <a:r>
-              <a:rPr lang="en-US" sz="1400" b="false" i="false" u="none" strike="noStrike" kern="0">
-                <a:solidFill>
-                  <a:srgbClr val="000000"/>
-                </a:solidFill>
-                <a:latin typeface="Arial"/>
-              </a:rPr>
-              <a:t> </a:t>
-            </a:r>
-            <a:r>
-              <a:rPr lang="en-US" sz="1400" b="false" i="false" u="none" strike="noStrike" kern="0">
-                <a:solidFill>
-                  <a:srgbClr val="000000"/>
-                </a:solidFill>
-                <a:latin typeface="Arial"/>
-              </a:rPr>
-              <a:t>for</a:t>
-            </a:r>
-            <a:r>
-              <a:rPr lang="en-US" sz="1400" b="false" i="false" u="none" strike="noStrike" kern="0">
-                <a:solidFill>
-                  <a:srgbClr val="000000"/>
-                </a:solidFill>
-                <a:latin typeface="Arial"/>
-              </a:rPr>
-              <a:t> </a:t>
-            </a:r>
-            <a:r>
-              <a:rPr lang="en-US" sz="1400" b="false" i="false" u="none" strike="noStrike" kern="0">
-                <a:solidFill>
-                  <a:srgbClr val="000000"/>
-                </a:solidFill>
-                <a:latin typeface="Arial"/>
-              </a:rPr>
-              <a:t>Phase</a:t>
-            </a:r>
-            <a:r>
-              <a:rPr lang="en-US" sz="1400" b="false" i="false" u="none" strike="noStrike" kern="0">
-                <a:solidFill>
-                  <a:srgbClr val="000000"/>
-                </a:solidFill>
-                <a:latin typeface="Arial"/>
-              </a:rPr>
-              <a:t> </a:t>
-            </a:r>
-            <a:r>
-              <a:rPr lang="en-US" sz="1400" b="false" i="false" u="none" strike="noStrike" kern="0">
-                <a:solidFill>
-                  <a:srgbClr val="000000"/>
-                </a:solidFill>
-                <a:latin typeface="Arial"/>
-              </a:rPr>
-              <a:t>A</a:t>
-            </a:r>
-            <a:r>
-              <a:rPr lang="en-US" sz="1400" b="false" i="false" u="none" strike="noStrike" kern="0">
-                <a:solidFill>
-                  <a:srgbClr val="000000"/>
-                </a:solidFill>
-                <a:latin typeface="Arial"/>
-              </a:rPr>
-              <a:t> </a:t>
-            </a:r>
-            <a:r>
-              <a:rPr lang="en-US" sz="1400" b="false" i="false" u="none" strike="noStrike" kern="0">
-                <a:solidFill>
-                  <a:srgbClr val="000000"/>
-                </a:solidFill>
-                <a:latin typeface="Arial"/>
-              </a:rPr>
-              <a:t>nested-list</a:t>
-            </a:r>
-            <a:r>
-              <a:rPr lang="en-US" sz="1400" b="false" i="false" u="none" strike="noStrike" kern="0">
-                <a:solidFill>
-                  <a:srgbClr val="000000"/>
-                </a:solidFill>
-                <a:latin typeface="Arial"/>
-              </a:rPr>
-              <a:t> </a:t>
-            </a:r>
-            <a:r>
-              <a:rPr lang="en-US" sz="1400" b="false" i="false" u="none" strike="noStrike" kern="0">
-                <a:solidFill>
-                  <a:srgbClr val="000000"/>
-                </a:solidFill>
-                <a:latin typeface="Arial"/>
-              </a:rPr>
-              <a:t>ergonomics.</a:t>
-            </a:r>
-            <a:r>
-              <a:rPr lang="en-US" sz="1400" b="false" i="false" u="none" strike="noStrike" kern="0">
-                <a:solidFill>
-                  <a:srgbClr val="000000"/>
-                </a:solidFill>
-                <a:latin typeface="Arial"/>
-              </a:rPr>
-              <a:t> </a:t>
-            </a:r>
-            <a:r>
-              <a:rPr lang="en-US" sz="1400" b="true" i="false" u="none" strike="noStrike" kern="0">
-                <a:solidFill>
                   <a:srgbClr val="14505F"/>
                 </a:solidFill>
                 <a:latin typeface="Arial"/>
               </a:rPr>
-              <a:t>Owner:</a:t>
-            </a:r>
-            <a:r>
-              <a:rPr lang="en-US" sz="1400" b="true" i="false" u="none" strike="noStrike" kern="0">
-                <a:solidFill>
-                  <a:srgbClr val="14505F"/>
-                </a:solidFill>
-                <a:latin typeface="Arial"/>
-              </a:rPr>
-              <a:t> </a:t>
-            </a:r>
-            <a:r>
-              <a:rPr lang="en-US" sz="1400" b="true" i="false" u="none" strike="noStrike" kern="0">
-                <a:solidFill>
-                  <a:srgbClr val="14505F"/>
-                </a:solidFill>
-                <a:latin typeface="Arial"/>
-              </a:rPr>
-              <a:t>contributor</a:t>
+              <a:t>maintainer</a:t>
             </a:r>
             <a:r>
               <a:rPr lang="en-US" sz="1400" b="false" i="false" u="none" strike="noStrike" kern="0">
@@ -22696,8 +22535,8 @@
         </p:nvSpPr>
         <p:spPr>
           <a:xfrm>
-            <a:off x="609600" y="8677963"/>
-            <a:ext cx="5815152" cy="164465"/>
+            <a:off x="609600" y="8576363"/>
+            <a:ext cx="5992063" cy="164465"/>
           </a:xfrm>
           <a:prstGeom prst="rect">
             <a:avLst/>
@@ -22746,7 +22585,7 @@
                 </a:solidFill>
                 <a:latin typeface="Arial"/>
               </a:rPr>
-              <a:t>Ship</a:t>
+              <a:t>Open</a:t>
             </a:r>
             <a:r>
               <a:rPr lang="en-US" sz="1400" b="false" i="false" u="none" strike="noStrike" kern="0">
@@ -22758,12 +22597,66 @@
               <a:t> </a:t>
             </a:r>
             <a:r>
+              <a:rPr lang="en-US" sz="1400" b="true" i="false" u="none" strike="noStrike" kern="0">
+                <a:solidFill>
+                  <a:srgbClr val="000000"/>
+                </a:solidFill>
+                <a:latin typeface="Arial"/>
+              </a:rPr>
+              <a:t>ADR</a:t>
+            </a:r>
+            <a:r>
+              <a:rPr lang="en-US" sz="1400" b="true" i="false" u="none" strike="noStrike" kern="0">
+                <a:solidFill>
+                  <a:srgbClr val="000000"/>
+                </a:solidFill>
+                <a:latin typeface="Arial"/>
+              </a:rPr>
+              <a:t> </a:t>
+            </a:r>
+            <a:r>
+              <a:rPr lang="en-US" sz="1400" b="true" i="false" u="none" strike="noStrike" kern="0">
+                <a:solidFill>
+                  <a:srgbClr val="000000"/>
+                </a:solidFill>
+                <a:latin typeface="Arial"/>
+              </a:rPr>
+              <a:t>0003</a:t>
+            </a:r>
+            <a:r>
               <a:rPr lang="en-US" sz="1400" b="false" i="false" u="none" strike="noStrike" kern="0">
                 <a:solidFill>
                   <a:srgbClr val="000000"/>
                 </a:solidFill>
                 <a:latin typeface="Arial"/>
               </a:rPr>
+              <a:t> </a:t>
+            </a:r>
+            <a:r>
+              <a:rPr lang="en-US" sz="1400" b="false" i="false" u="none" strike="noStrike" kern="0">
+                <a:solidFill>
+                  <a:srgbClr val="000000"/>
+                </a:solidFill>
+                <a:latin typeface="Arial"/>
+              </a:rPr>
+              <a:t>for</a:t>
+            </a:r>
+            <a:r>
+              <a:rPr lang="en-US" sz="1400" b="false" i="false" u="none" strike="noStrike" kern="0">
+                <a:solidFill>
+                  <a:srgbClr val="000000"/>
+                </a:solidFill>
+                <a:latin typeface="Arial"/>
+              </a:rPr>
+              <a:t> </a:t>
+            </a:r>
+            <a:r>
+              <a:rPr lang="en-US" sz="1400" b="false" i="false" u="none" strike="noStrike" kern="0">
+                <a:solidFill>
+                  <a:srgbClr val="000000"/>
+                </a:solidFill>
+                <a:latin typeface="Arial"/>
+              </a:rPr>
               <a:t>Phase</a:t>
             </a:r>
             <a:r>
@@ -22782,7 +22675,7 @@
                 </a:solidFill>
                 <a:latin typeface="Arial"/>
               </a:rPr>
-              <a:t>B</a:t>
+              <a:t>A</a:t>
             </a:r>
             <a:r>
               <a:rPr lang="en-US" sz="1400" b="false" i="false" u="none" strike="noStrike" kern="0">
@@ -22800,7 +22693,7 @@
                 </a:solidFill>
                 <a:latin typeface="Arial"/>
               </a:rPr>
-              <a:t>composed-cell</a:t>
+              <a:t>nested-list</a:t>
             </a:r>
             <a:r>
               <a:rPr lang="en-US" sz="1400" b="false" i="false" u="none" strike="noStrike" kern="0">
@@ -22818,7 +22711,7 @@
                 </a:solidFill>
                 <a:latin typeface="Arial"/>
               </a:rPr>
-              <a:t>content</a:t>
+              <a:t>ergonomics.</a:t>
             </a:r>
             <a:r>
               <a:rPr lang="en-US" sz="1400" b="false" i="false" u="none" strike="noStrike" kern="0">
@@ -22830,103 +22723,40 @@
               <a:t> </a:t>
             </a:r>
             <a:r>
+              <a:rPr lang="en-US" sz="1400" b="true" i="false" u="none" strike="noStrike" kern="0">
+                <a:solidFill>
+                  <a:srgbClr val="14505F"/>
+                </a:solidFill>
+                <a:latin typeface="Arial"/>
+              </a:rPr>
+              <a:t>Owner:</a:t>
+            </a:r>
+            <a:r>
+              <a:rPr lang="en-US" sz="1400" b="true" i="false" u="none" strike="noStrike" kern="0">
+                <a:solidFill>
+                  <a:srgbClr val="14505F"/>
+                </a:solidFill>
+                <a:latin typeface="Arial"/>
+              </a:rPr>
+              <a:t> </a:t>
+            </a:r>
+            <a:r>
+              <a:rPr lang="en-US" sz="1400" b="true" i="false" u="none" strike="noStrike" kern="0">
+                <a:solidFill>
+                  <a:srgbClr val="14505F"/>
+                </a:solidFill>
+                <a:latin typeface="Arial"/>
+              </a:rPr>
+              <a:t>contributor</a:t>
+            </a:r>
+            <a:r>
               <a:rPr lang="en-US" sz="1400" b="false" i="false" u="none" strike="noStrike" kern="0">
                 <a:solidFill>
                   <a:srgbClr val="000000"/>
                 </a:solidFill>
                 <a:latin typeface="Arial"/>
               </a:rPr>
-              <a:t>ahead</a:t>
-            </a:r>
-            <a:r>
-              <a:rPr lang="en-US" sz="1400" b="false" i="false" u="none" strike="noStrike" kern="0">
-                <a:solidFill>
-                  <a:srgbClr val="000000"/>
-                </a:solidFill>
-                <a:latin typeface="Arial"/>
-              </a:rPr>
-              <a:t> </a:t>
-            </a:r>
-            <a:r>
-              <a:rPr lang="en-US" sz="1400" b="false" i="false" u="none" strike="noStrike" kern="0">
-                <a:solidFill>
-                  <a:srgbClr val="000000"/>
-                </a:solidFill>
-                <a:latin typeface="Arial"/>
-              </a:rPr>
-              <a:t>of</a:t>
-            </a:r>
-            <a:r>
-              <a:rPr lang="en-US" sz="1400" b="false" i="false" u="none" strike="noStrike" kern="0">
-                <a:solidFill>
-                  <a:srgbClr val="000000"/>
-                </a:solidFill>
-                <a:latin typeface="Arial"/>
-              </a:rPr>
-              <a:t> </a:t>
-            </a:r>
-            <a:r>
-              <a:rPr lang="en-US" sz="1400" b="false" i="false" u="none" strike="noStrike" kern="0">
-                <a:solidFill>
-                  <a:srgbClr val="000000"/>
-                </a:solidFill>
-                <a:latin typeface="Arial"/>
-              </a:rPr>
-              <a:t>Phase</a:t>
-            </a:r>
-            <a:r>
-              <a:rPr lang="en-US" sz="1400" b="false" i="false" u="none" strike="noStrike" kern="0">
-                <a:solidFill>
-                  <a:srgbClr val="000000"/>
-                </a:solidFill>
-                <a:latin typeface="Arial"/>
-              </a:rPr>
-              <a:t> </a:t>
-            </a:r>
-            <a:r>
-              <a:rPr lang="en-US" sz="1400" b="false" i="false" u="none" strike="noStrike" kern="0">
-                <a:solidFill>
-                  <a:srgbClr val="000000"/>
-                </a:solidFill>
-                <a:latin typeface="Arial"/>
-              </a:rPr>
-              <a:t>C</a:t>
-            </a:r>
-            <a:r>
-              <a:rPr lang="en-US" sz="1400" b="false" i="false" u="none" strike="noStrike" kern="0">
-                <a:solidFill>
-                  <a:srgbClr val="000000"/>
-                </a:solidFill>
-                <a:latin typeface="Arial"/>
-              </a:rPr>
-              <a:t> </a:t>
-            </a:r>
-            <a:r>
-              <a:rPr lang="en-US" sz="1400" b="false" i="false" u="none" strike="noStrike" kern="0">
-                <a:solidFill>
-                  <a:srgbClr val="000000"/>
-                </a:solidFill>
-                <a:latin typeface="Arial"/>
-              </a:rPr>
-              <a:t>canvas.</a:t>
-            </a:r>
-            <a:r>
-              <a:rPr lang="en-US" sz="1400" b="false" i="false" u="none" strike="noStrike" kern="0">
-                <a:solidFill>
-                  <a:srgbClr val="000000"/>
-                </a:solidFill>
-                <a:latin typeface="Arial"/>
-              </a:rPr>
-              <a:t> </a:t>
-            </a:r>
-            <a:r>
-              <a:rPr lang="en-US" sz="1400" b="true" i="false" u="none" strike="noStrike" kern="0">
-                <a:solidFill>
-                  <a:srgbClr val="14505F"/>
-                </a:solidFill>
-                <a:latin typeface="Arial"/>
-              </a:rPr>
-              <a:t>Owner:</a:t>
+              <a:t>.</a:t>
             </a:r>
             <a:endParaRPr lang="en-US" sz="1100"/>
           </a:p>
@@ -22941,7 +22771,7 @@
         <p:spPr>
           <a:xfrm>
             <a:off x="609600" y="8842428"/>
-            <a:ext cx="998906" cy="164465"/>
+            <a:ext cx="5815152" cy="164465"/>
           </a:xfrm>
           <a:prstGeom prst="rect">
             <a:avLst/>
@@ -22966,58 +22796,226 @@
               <a:defRPr/>
             </a:pPr>
             <a:r>
+              <a:rPr lang="en-US" sz="1400" b="false" i="false" u="none" strike="noStrike" kern="0">
+                <a:solidFill>
+                  <a:srgbClr val="000000"/>
+                </a:solidFill>
+                <a:latin typeface="Arial"/>
+              </a:rPr>
+              <a:t>•</a:t>
+            </a:r>
+            <a:r>
+              <a:rPr lang="en-US" sz="1400" b="false" i="false" u="none" strike="noStrike" kern="0">
+                <a:solidFill>
+                  <a:srgbClr val="000000"/>
+                </a:solidFill>
+                <a:latin typeface="Arial"/>
+              </a:rPr>
+              <a:t> </a:t>
+            </a:r>
+            <a:r>
+              <a:rPr lang="en-US" sz="1400" b="false" i="false" u="none" strike="noStrike" kern="0">
+                <a:solidFill>
+                  <a:srgbClr val="000000"/>
+                </a:solidFill>
+                <a:latin typeface="Arial"/>
+              </a:rPr>
+              <a:t>Ship</a:t>
+            </a:r>
+            <a:r>
+              <a:rPr lang="en-US" sz="1400" b="false" i="false" u="none" strike="noStrike" kern="0">
+                <a:solidFill>
+                  <a:srgbClr val="000000"/>
+                </a:solidFill>
+                <a:latin typeface="Arial"/>
+              </a:rPr>
+              <a:t> </a:t>
+            </a:r>
+            <a:r>
+              <a:rPr lang="en-US" sz="1400" b="false" i="false" u="none" strike="noStrike" kern="0">
+                <a:solidFill>
+                  <a:srgbClr val="000000"/>
+                </a:solidFill>
+                <a:latin typeface="Arial"/>
+              </a:rPr>
+              <a:t>Phase</a:t>
+            </a:r>
+            <a:r>
+              <a:rPr lang="en-US" sz="1400" b="false" i="false" u="none" strike="noStrike" kern="0">
+                <a:solidFill>
+                  <a:srgbClr val="000000"/>
+                </a:solidFill>
+                <a:latin typeface="Arial"/>
+              </a:rPr>
+              <a:t> </a:t>
+            </a:r>
+            <a:r>
+              <a:rPr lang="en-US" sz="1400" b="false" i="false" u="none" strike="noStrike" kern="0">
+                <a:solidFill>
+                  <a:srgbClr val="000000"/>
+                </a:solidFill>
+                <a:latin typeface="Arial"/>
+              </a:rPr>
+              <a:t>B</a:t>
+            </a:r>
+            <a:r>
+              <a:rPr lang="en-US" sz="1400" b="false" i="false" u="none" strike="noStrike" kern="0">
+                <a:solidFill>
+                  <a:srgbClr val="000000"/>
+                </a:solidFill>
+                <a:latin typeface="Arial"/>
+              </a:rPr>
+              <a:t> </a:t>
+            </a:r>
+            <a:r>
+              <a:rPr lang="en-US" sz="1400" b="false" i="false" u="none" strike="noStrike" kern="0">
+                <a:solidFill>
+                  <a:srgbClr val="000000"/>
+                </a:solidFill>
+                <a:latin typeface="Arial"/>
+              </a:rPr>
+              <a:t>composed-cell</a:t>
+            </a:r>
+            <a:r>
+              <a:rPr lang="en-US" sz="1400" b="false" i="false" u="none" strike="noStrike" kern="0">
+                <a:solidFill>
+                  <a:srgbClr val="000000"/>
+                </a:solidFill>
+                <a:latin typeface="Arial"/>
+              </a:rPr>
+              <a:t> </a:t>
+            </a:r>
+            <a:r>
+              <a:rPr lang="en-US" sz="1400" b="false" i="false" u="none" strike="noStrike" kern="0">
+                <a:solidFill>
+                  <a:srgbClr val="000000"/>
+                </a:solidFill>
+                <a:latin typeface="Arial"/>
+              </a:rPr>
+              <a:t>content</a:t>
+            </a:r>
+            <a:r>
+              <a:rPr lang="en-US" sz="1400" b="false" i="false" u="none" strike="noStrike" kern="0">
+                <a:solidFill>
+                  <a:srgbClr val="000000"/>
+                </a:solidFill>
+                <a:latin typeface="Arial"/>
+              </a:rPr>
+              <a:t> </a:t>
+            </a:r>
+            <a:r>
+              <a:rPr lang="en-US" sz="1400" b="false" i="false" u="none" strike="noStrike" kern="0">
+                <a:solidFill>
+                  <a:srgbClr val="000000"/>
+                </a:solidFill>
+                <a:latin typeface="Arial"/>
+              </a:rPr>
+              <a:t>ahead</a:t>
+            </a:r>
+            <a:r>
+              <a:rPr lang="en-US" sz="1400" b="false" i="false" u="none" strike="noStrike" kern="0">
+                <a:solidFill>
+                  <a:srgbClr val="000000"/>
+                </a:solidFill>
+                <a:latin typeface="Arial"/>
+              </a:rPr>
+              <a:t> </a:t>
+            </a:r>
+            <a:r>
+              <a:rPr lang="en-US" sz="1400" b="false" i="false" u="none" strike="noStrike" kern="0">
+                <a:solidFill>
+                  <a:srgbClr val="000000"/>
+                </a:solidFill>
+                <a:latin typeface="Arial"/>
+              </a:rPr>
+              <a:t>of</a:t>
+            </a:r>
+            <a:r>
+              <a:rPr lang="en-US" sz="1400" b="false" i="false" u="none" strike="noStrike" kern="0">
+                <a:solidFill>
+                  <a:srgbClr val="000000"/>
+                </a:solidFill>
+                <a:latin typeface="Arial"/>
+              </a:rPr>
+              <a:t> </a:t>
+            </a:r>
+            <a:r>
+              <a:rPr lang="en-US" sz="1400" b="false" i="false" u="none" strike="noStrike" kern="0">
+                <a:solidFill>
+                  <a:srgbClr val="000000"/>
+                </a:solidFill>
+                <a:latin typeface="Arial"/>
+              </a:rPr>
+              <a:t>Phase</a:t>
+            </a:r>
+            <a:r>
+              <a:rPr lang="en-US" sz="1400" b="false" i="false" u="none" strike="noStrike" kern="0">
+                <a:solidFill>
+                  <a:srgbClr val="000000"/>
+                </a:solidFill>
+                <a:latin typeface="Arial"/>
+              </a:rPr>
+              <a:t> </a:t>
+            </a:r>
+            <a:r>
+              <a:rPr lang="en-US" sz="1400" b="false" i="false" u="none" strike="noStrike" kern="0">
+                <a:solidFill>
+                  <a:srgbClr val="000000"/>
+                </a:solidFill>
+                <a:latin typeface="Arial"/>
+              </a:rPr>
+              <a:t>C</a:t>
+            </a:r>
+            <a:r>
+              <a:rPr lang="en-US" sz="1400" b="false" i="false" u="none" strike="noStrike" kern="0">
+                <a:solidFill>
+                  <a:srgbClr val="000000"/>
+                </a:solidFill>
+                <a:latin typeface="Arial"/>
+              </a:rPr>
+              <a:t> </a:t>
+            </a:r>
+            <a:r>
+              <a:rPr lang="en-US" sz="1400" b="false" i="false" u="none" strike="noStrike" kern="0">
+                <a:solidFill>
+                  <a:srgbClr val="000000"/>
+                </a:solidFill>
+                <a:latin typeface="Arial"/>
+              </a:rPr>
+              <a:t>canvas.</a:t>
+            </a:r>
+            <a:r>
+              <a:rPr lang="en-US" sz="1400" b="false" i="false" u="none" strike="noStrike" kern="0">
+                <a:solidFill>
+                  <a:srgbClr val="000000"/>
+                </a:solidFill>
+                <a:latin typeface="Arial"/>
+              </a:rPr>
+              <a:t> </a:t>
+            </a:r>
+            <a:r>
               <a:rPr lang="en-US" sz="1400" b="true" i="false" u="none" strike="noStrike" kern="0">
                 <a:solidFill>
                   <a:srgbClr val="14505F"/>
                 </a:solidFill>
                 <a:latin typeface="Arial"/>
               </a:rPr>
-              <a:t>contributor</a:t>
-            </a:r>
-            <a:r>
-              <a:rPr lang="en-US" sz="1400" b="false" i="false" u="none" strike="noStrike" kern="0">
-                <a:solidFill>
-                  <a:srgbClr val="000000"/>
-                </a:solidFill>
-                <a:latin typeface="Arial"/>
-              </a:rPr>
-              <a:t>.</a:t>
+              <a:t>Owner:</a:t>
             </a:r>
             <a:endParaRPr lang="en-US" sz="1100"/>
           </a:p>
         </p:txBody>
       </p:sp>
-      <p:cxnSp>
-        <p:nvCxnSpPr>
-          <p:cNvPr name="Connector 438" id="438"/>
-          <p:cNvCxnSpPr/>
-          <p:nvPr/>
-        </p:nvCxnSpPr>
-        <p:spPr>
-          <a:xfrm>
-            <a:off x="431800" y="9395790"/>
-            <a:ext cx="4340075" cy="0"/>
-          </a:xfrm>
-          <a:prstGeom prst="line">
-            <a:avLst/>
-          </a:prstGeom>
-          <a:ln w="7620">
-            <a:solidFill>
-              <a:srgbClr val="D4C8B2"/>
-            </a:solidFill>
-          </a:ln>
-        </p:spPr>
-      </p:cxnSp>
-      <p:sp>
-        <p:nvSpPr>
-          <p:cNvPr name="GraphCompose Text Line" id="439"/>
+      <p:sp>
+        <p:nvSpPr>
+          <p:cNvPr name="GraphCompose Text Line" id="438"/>
           <p:cNvSpPr txBox="true"/>
           <p:nvPr/>
         </p:nvSpPr>
         <p:spPr>
           <a:xfrm>
-            <a:off x="431800" y="9476936"/>
-            <a:ext cx="4323215" cy="101029"/>
+            <a:off x="609600" y="9006893"/>
+            <a:ext cx="998906" cy="164465"/>
           </a:xfrm>
           <a:prstGeom prst="rect">
             <a:avLst/>
@@ -23042,18 +23040,48 @@
               <a:defRPr/>
             </a:pPr>
             <a:r>
-              <a:rPr lang="en-US" sz="860" b="false" i="false" u="none" strike="noStrike" kern="0">
-                <a:solidFill>
-                  <a:srgbClr val="707480"/>
-                </a:solidFill>
-                <a:latin typeface="Arial"/>
-              </a:rPr>
-              <a:t>Source: examples/.../MasterShowcaseExample.java — every visible token routes through</a:t>
+              <a:rPr lang="en-US" sz="1400" b="true" i="false" u="none" strike="noStrike" kern="0">
+                <a:solidFill>
+                  <a:srgbClr val="14505F"/>
+                </a:solidFill>
+                <a:latin typeface="Arial"/>
+              </a:rPr>
+              <a:t>contributor</a:t>
+            </a:r>
+            <a:r>
+              <a:rPr lang="en-US" sz="1400" b="false" i="false" u="none" strike="noStrike" kern="0">
+                <a:solidFill>
+                  <a:srgbClr val="000000"/>
+                </a:solidFill>
+                <a:latin typeface="Arial"/>
+              </a:rPr>
+              <a:t>.</a:t>
             </a:r>
             <a:endParaRPr lang="en-US" sz="1100"/>
           </a:p>
         </p:txBody>
       </p:sp>
+      <p:cxnSp>
+        <p:nvCxnSpPr>
+          <p:cNvPr name="Connector 439" id="439"/>
+          <p:cNvCxnSpPr/>
+          <p:nvPr/>
+        </p:nvCxnSpPr>
+        <p:spPr>
+          <a:xfrm>
+            <a:off x="431800" y="9560255"/>
+            <a:ext cx="4340075" cy="0"/>
+          </a:xfrm>
+          <a:prstGeom prst="line">
+            <a:avLst/>
+          </a:prstGeom>
+          <a:ln w="7620">
+            <a:solidFill>
+              <a:srgbClr val="D4C8B2"/>
+            </a:solidFill>
+          </a:ln>
+        </p:spPr>
+      </p:cxnSp>
       <p:sp>
         <p:nvSpPr>
           <p:cNvPr name="GraphCompose Text Line" id="440"/>
@@ -23062,8 +23090,8 @@
         </p:nvSpPr>
         <p:spPr>
           <a:xfrm>
-            <a:off x="431800" y="9595745"/>
-            <a:ext cx="4341345" cy="101029"/>
+            <a:off x="431800" y="9641401"/>
+            <a:ext cx="4323215" cy="101029"/>
           </a:xfrm>
           <a:prstGeom prst="rect">
             <a:avLst/>
@@ -23094,7 +23122,7 @@
                 </a:solidFill>
                 <a:latin typeface="Arial"/>
               </a:rPr>
-              <a:t>BusinessTheme.modern() so the same source renders any of classic / modern / executive</a:t>
+              <a:t>Source: examples/.../MasterShowcaseExample.java — every visible token routes through</a:t>
             </a:r>
             <a:endParaRPr lang="en-US" sz="1100"/>
           </a:p>
@@ -23108,8 +23136,8 @@
         </p:nvSpPr>
         <p:spPr>
           <a:xfrm>
-            <a:off x="431800" y="9714553"/>
-            <a:ext cx="389766" cy="101029"/>
+            <a:off x="431800" y="9760210"/>
+            <a:ext cx="4341345" cy="101029"/>
           </a:xfrm>
           <a:prstGeom prst="rect">
             <a:avLst/>
@@ -23140,6 +23168,52 @@
                 </a:solidFill>
                 <a:latin typeface="Arial"/>
               </a:rPr>
+              <a:t>BusinessTheme.modern() so the same source renders any of classic / modern / executive</a:t>
+            </a:r>
+            <a:endParaRPr lang="en-US" sz="1100"/>
+          </a:p>
+        </p:txBody>
+      </p:sp>
+      <p:sp>
+        <p:nvSpPr>
+          <p:cNvPr name="GraphCompose Text Line" id="442"/>
+          <p:cNvSpPr txBox="true"/>
+          <p:nvPr/>
+        </p:nvSpPr>
+        <p:spPr>
+          <a:xfrm>
+            <a:off x="431800" y="9879018"/>
+            <a:ext cx="389766" cy="101029"/>
+          </a:xfrm>
+          <a:prstGeom prst="rect">
+            <a:avLst/>
+          </a:prstGeom>
+        </p:spPr>
+        <p:txBody>
+          <a:bodyPr anchor="t" rtlCol="false" wrap="none" tIns="0" rIns="0" bIns="0" lIns="0">
+            <a:noAutofit/>
+          </a:bodyPr>
+          <a:lstStyle/>
+          <a:p>
+            <a:pPr algn="l">
+              <a:lnSpc>
+                <a:spcPct val="100000"/>
+              </a:lnSpc>
+              <a:spcBef>
+                <a:spcPct val="0"/>
+              </a:spcBef>
+              <a:spcAft>
+                <a:spcPct val="0"/>
+              </a:spcAft>
+              <a:defRPr/>
+            </a:pPr>
+            <a:r>
+              <a:rPr lang="en-US" sz="860" b="false" i="false" u="none" strike="noStrike" kern="0">
+                <a:solidFill>
+                  <a:srgbClr val="707480"/>
+                </a:solidFill>
+                <a:latin typeface="Arial"/>
+              </a:rPr>
               <a:t>themes.</a:t>
             </a:r>
             <a:endParaRPr lang="en-US" sz="1100"/>
@@ -23148,7 +23222,7 @@
       </p:sp>
       <p:pic>
         <p:nvPicPr>
-          <p:cNvPr name="Picture 442" id="442"/>
+          <p:cNvPr name="Picture 443" id="443"/>
           <p:cNvPicPr>
             <a:picLocks noChangeAspect="true"/>
           </p:cNvPicPr>
@@ -23162,7 +23236,7 @@
         </p:blipFill>
         <p:spPr>
           <a:xfrm>
-            <a:off x="4955334" y="9395790"/>
+            <a:off x="4955334" y="9560255"/>
             <a:ext cx="2286000" cy="457200"/>
           </a:xfrm>
           <a:prstGeom prst="rect">
@@ -23172,7 +23246,7 @@
       </p:pic>
       <p:sp>
         <p:nvSpPr>
-          <p:cNvPr name="GraphCompose Header" id="443"/>
+          <p:cNvPr name="GraphCompose Header" id="444"/>
           <p:cNvSpPr txBox="true"/>
           <p:nvPr/>
         </p:nvSpPr>
@@ -23209,7 +23283,7 @@
       </p:sp>
       <p:sp>
         <p:nvSpPr>
-          <p:cNvPr name="GraphCompose Header" id="444"/>
+          <p:cNvPr name="GraphCompose Header" id="445"/>
           <p:cNvSpPr txBox="true"/>
           <p:nvPr/>
         </p:nvSpPr>
@@ -23238,7 +23312,7 @@
                 </a:solidFill>
                 <a:latin typeface="Arial"/>
               </a:rPr>
-              <a:t>2026-07-23</a:t>
+              <a:t>2026-07-27</a:t>
             </a:r>
             <a:endParaRPr lang="en-US" sz="1100"/>
           </a:p>
@@ -23246,7 +23320,7 @@
       </p:sp>
       <p:cxnSp>
         <p:nvCxnSpPr>
-          <p:cNvPr name="GraphCompose Header Separator" id="445"/>
+          <p:cNvPr name="GraphCompose Header Separator" id="446"/>
           <p:cNvCxnSpPr/>
           <p:nvPr/>
         </p:nvCxnSpPr>
@@ -23267,14 +23341,14 @@
       </p:cxnSp>
       <p:sp>
         <p:nvSpPr>
-          <p:cNvPr name="GraphCompose Footer" id="446"/>
+          <p:cNvPr name="GraphCompose Footer" id="447"/>
           <p:cNvSpPr txBox="true"/>
           <p:nvPr/>
         </p:nvSpPr>
         <p:spPr>
           <a:xfrm>
             <a:off x="431800" y="10321827"/>
-            <a:ext cx="1270343" cy="148590"/>
+            <a:ext cx="1875219" cy="148590"/>
           </a:xfrm>
           <a:prstGeom prst="rect">
             <a:avLst/>
@@ -23296,7 +23370,7 @@
                 </a:solidFill>
                 <a:latin typeface="Arial"/>
               </a:rPr>
-              <a:t>v1.5 — "intuitive" release</a:t>
+              <a:t>GraphCompose 2.1 — sample report</a:t>
             </a:r>
             <a:endParaRPr lang="en-US" sz="1100"/>
           </a:p>
@@ -23304,7 +23378,7 @@
       </p:sp>
       <p:sp>
         <p:nvSpPr>
-          <p:cNvPr name="GraphCompose Footer" id="447"/>
+          <p:cNvPr name="GraphCompose Footer" id="448"/>
           <p:cNvSpPr txBox="true"/>
           <p:nvPr/>
         </p:nvSpPr>
@@ -23341,7 +23415,7 @@
       </p:sp>
       <p:cxnSp>
         <p:nvCxnSpPr>
-          <p:cNvPr name="GraphCompose Footer Separator" id="448"/>
+          <p:cNvPr name="GraphCompose Footer Separator" id="449"/>
           <p:cNvCxnSpPr/>
           <p:nvPr/>
         </p:nvCxnSpPr>

--- a/assets/readme/examples/master-showcase.pptx
+++ b/assets/readme/examples/master-showcase.pptx
@@ -10640,8 +10640,8 @@
         </p:nvSpPr>
         <p:spPr>
           <a:xfrm>
-            <a:off x="6543670" y="220377"/>
-            <a:ext cx="585800" cy="148590"/>
+            <a:off x="6689746" y="220377"/>
+            <a:ext cx="439725" cy="148590"/>
           </a:xfrm>
           <a:prstGeom prst="rect">
             <a:avLst/>
@@ -10663,7 +10663,7 @@
                 </a:solidFill>
                 <a:latin typeface="Arial"/>
               </a:rPr>
-              <a:t>2026-07-27</a:t>
+              <a:t>Q2 2026</a:t>
             </a:r>
             <a:endParaRPr lang="en-US" sz="1100"/>
           </a:p>
@@ -10699,7 +10699,7 @@
         <p:spPr>
           <a:xfrm>
             <a:off x="431800" y="10321827"/>
-            <a:ext cx="1875219" cy="148590"/>
+            <a:ext cx="1684566" cy="148590"/>
           </a:xfrm>
           <a:prstGeom prst="rect">
             <a:avLst/>
@@ -10721,7 +10721,7 @@
                 </a:solidFill>
                 <a:latin typeface="Arial"/>
               </a:rPr>
-              <a:t>GraphCompose 2.1 — sample report</a:t>
+              <a:t>GraphCompose — sample report</a:t>
             </a:r>
             <a:endParaRPr lang="en-US" sz="1100"/>
           </a:p>
@@ -23289,8 +23289,8 @@
         </p:nvSpPr>
         <p:spPr>
           <a:xfrm>
-            <a:off x="6543670" y="220377"/>
-            <a:ext cx="585800" cy="148590"/>
+            <a:off x="6689746" y="220377"/>
+            <a:ext cx="439725" cy="148590"/>
           </a:xfrm>
           <a:prstGeom prst="rect">
             <a:avLst/>
@@ -23312,7 +23312,7 @@
                 </a:solidFill>
                 <a:latin typeface="Arial"/>
               </a:rPr>
-              <a:t>2026-07-27</a:t>
+              <a:t>Q2 2026</a:t>
             </a:r>
             <a:endParaRPr lang="en-US" sz="1100"/>
           </a:p>
@@ -23348,7 +23348,7 @@
         <p:spPr>
           <a:xfrm>
             <a:off x="431800" y="10321827"/>
-            <a:ext cx="1875219" cy="148590"/>
+            <a:ext cx="1684566" cy="148590"/>
           </a:xfrm>
           <a:prstGeom prst="rect">
             <a:avLst/>
@@ -23370,7 +23370,7 @@
                 </a:solidFill>
                 <a:latin typeface="Arial"/>
               </a:rPr>
-              <a:t>GraphCompose 2.1 — sample report</a:t>
+              <a:t>GraphCompose — sample report</a:t>
             </a:r>
             <a:endParaRPr lang="en-US" sz="1100"/>
           </a:p>

--- a/assets/readme/examples/master-showcase.pptx
+++ b/assets/readme/examples/master-showcase.pptx
@@ -3136,7 +3136,7 @@
         <p:spPr>
           <a:xfrm>
             <a:off x="711200" y="868784"/>
-            <a:ext cx="1093076" cy="99854"/>
+            <a:ext cx="1104951" cy="99854"/>
           </a:xfrm>
           <a:prstGeom prst="rect">
             <a:avLst/>
@@ -3161,7 +3161,7 @@
               <a:defRPr/>
             </a:pPr>
             <a:r>
-              <a:rPr lang="en-US" sz="850" b="false" i="false" u="none" strike="noStrike" kern="0">
+              <a:rPr lang="en-US" sz="850" b="true" i="false" u="none" strike="noStrike" kern="0">
                 <a:solidFill>
                   <a:srgbClr val="707480"/>
                 </a:solidFill>
@@ -4054,7 +4054,7 @@
         <p:spPr>
           <a:xfrm>
             <a:off x="635000" y="3142012"/>
-            <a:ext cx="544703" cy="129222"/>
+            <a:ext cx="606590" cy="129222"/>
           </a:xfrm>
           <a:prstGeom prst="rect">
             <a:avLst/>
@@ -4079,7 +4079,7 @@
               <a:defRPr/>
             </a:pPr>
             <a:r>
-              <a:rPr lang="en-US" sz="1100" b="false" i="false" u="none" strike="noStrike" kern="0">
+              <a:rPr lang="en-US" sz="1100" b="true" i="false" u="none" strike="noStrike" kern="0">
                 <a:solidFill>
                   <a:srgbClr val="222632"/>
                 </a:solidFill>
@@ -4978,7 +4978,7 @@
         <p:spPr>
           <a:xfrm>
             <a:off x="5695400" y="3071758"/>
-            <a:ext cx="385248" cy="99854"/>
+            <a:ext cx="415042" cy="99854"/>
           </a:xfrm>
           <a:prstGeom prst="rect">
             <a:avLst/>
@@ -5003,7 +5003,7 @@
               <a:defRPr/>
             </a:pPr>
             <a:r>
-              <a:rPr lang="en-US" sz="850" b="false" i="false" u="none" strike="noStrike" kern="0">
+              <a:rPr lang="en-US" sz="850" b="true" i="false" u="none" strike="noStrike" kern="0">
                 <a:solidFill>
                   <a:srgbClr val="707480"/>
                 </a:solidFill>
@@ -7255,7 +7255,7 @@
         <p:spPr>
           <a:xfrm>
             <a:off x="546100" y="7564290"/>
-            <a:ext cx="289624" cy="111601"/>
+            <a:ext cx="302895" cy="111601"/>
           </a:xfrm>
           <a:prstGeom prst="rect">
             <a:avLst/>
@@ -7271,7 +7271,7 @@
               <a:defRPr/>
             </a:pPr>
             <a:r>
-              <a:rPr lang="en-US" sz="950" b="false" i="false" u="none" strike="noStrike" kern="0">
+              <a:rPr lang="en-US" sz="950" b="true" i="false" u="none" strike="noStrike" kern="0">
                 <a:solidFill>
                   <a:srgbClr val="FFFFFF"/>
                 </a:solidFill>
@@ -7355,7 +7355,7 @@
         <p:spPr>
           <a:xfrm>
             <a:off x="1308100" y="7564290"/>
-            <a:ext cx="443814" cy="111601"/>
+            <a:ext cx="490747" cy="111601"/>
           </a:xfrm>
           <a:prstGeom prst="rect">
             <a:avLst/>
@@ -7371,7 +7371,7 @@
               <a:defRPr/>
             </a:pPr>
             <a:r>
-              <a:rPr lang="en-US" sz="950" b="false" i="false" u="none" strike="noStrike" kern="0">
+              <a:rPr lang="en-US" sz="950" b="true" i="false" u="none" strike="noStrike" kern="0">
                 <a:solidFill>
                   <a:srgbClr val="FFFFFF"/>
                 </a:solidFill>
@@ -7455,7 +7455,7 @@
         <p:spPr>
           <a:xfrm>
             <a:off x="3528028" y="7564290"/>
-            <a:ext cx="323044" cy="111601"/>
+            <a:ext cx="349828" cy="111601"/>
           </a:xfrm>
           <a:prstGeom prst="rect">
             <a:avLst/>
@@ -7471,7 +7471,7 @@
               <a:defRPr/>
             </a:pPr>
             <a:r>
-              <a:rPr lang="en-US" sz="950" b="false" i="false" u="none" strike="noStrike" kern="0">
+              <a:rPr lang="en-US" sz="950" b="true" i="false" u="none" strike="noStrike" kern="0">
                 <a:solidFill>
                   <a:srgbClr val="FFFFFF"/>
                 </a:solidFill>
@@ -7555,7 +7555,7 @@
         <p:spPr>
           <a:xfrm>
             <a:off x="4544028" y="7564290"/>
-            <a:ext cx="356584" cy="111601"/>
+            <a:ext cx="376733" cy="111601"/>
           </a:xfrm>
           <a:prstGeom prst="rect">
             <a:avLst/>
@@ -7571,7 +7571,7 @@
               <a:defRPr/>
             </a:pPr>
             <a:r>
-              <a:rPr lang="en-US" sz="950" b="false" i="false" u="none" strike="noStrike" kern="0">
+              <a:rPr lang="en-US" sz="950" b="true" i="false" u="none" strike="noStrike" kern="0">
                 <a:solidFill>
                   <a:srgbClr val="FFFFFF"/>
                 </a:solidFill>
@@ -7655,7 +7655,7 @@
         <p:spPr>
           <a:xfrm>
             <a:off x="5560028" y="7564290"/>
-            <a:ext cx="417030" cy="111601"/>
+            <a:ext cx="456965" cy="111601"/>
           </a:xfrm>
           <a:prstGeom prst="rect">
             <a:avLst/>
@@ -7671,7 +7671,7 @@
               <a:defRPr/>
             </a:pPr>
             <a:r>
-              <a:rPr lang="en-US" sz="950" b="false" i="false" u="none" strike="noStrike" kern="0">
+              <a:rPr lang="en-US" sz="950" b="true" i="false" u="none" strike="noStrike" kern="0">
                 <a:solidFill>
                   <a:srgbClr val="FFFFFF"/>
                 </a:solidFill>
@@ -10640,8 +10640,8 @@
         </p:nvSpPr>
         <p:spPr>
           <a:xfrm>
-            <a:off x="6689746" y="220377"/>
-            <a:ext cx="439725" cy="148590"/>
+            <a:off x="6543670" y="220377"/>
+            <a:ext cx="585800" cy="148590"/>
           </a:xfrm>
           <a:prstGeom prst="rect">
             <a:avLst/>
@@ -10663,7 +10663,7 @@
                 </a:solidFill>
                 <a:latin typeface="Arial"/>
               </a:rPr>
-              <a:t>Q2 2026</a:t>
+              <a:t>2026-08-02</a:t>
             </a:r>
             <a:endParaRPr lang="en-US" sz="1100"/>
           </a:p>
@@ -10699,7 +10699,7 @@
         <p:spPr>
           <a:xfrm>
             <a:off x="431800" y="10321827"/>
-            <a:ext cx="1684566" cy="148590"/>
+            <a:ext cx="1875219" cy="148590"/>
           </a:xfrm>
           <a:prstGeom prst="rect">
             <a:avLst/>
@@ -10721,7 +10721,7 @@
                 </a:solidFill>
                 <a:latin typeface="Arial"/>
               </a:rPr>
-              <a:t>GraphCompose — sample report</a:t>
+              <a:t>GraphCompose 2.1 — sample report</a:t>
             </a:r>
             <a:endParaRPr lang="en-US" sz="1100"/>
           </a:p>
@@ -13015,7 +13015,7 @@
         <p:spPr>
           <a:xfrm>
             <a:off x="546100" y="688605"/>
-            <a:ext cx="289624" cy="111601"/>
+            <a:ext cx="302895" cy="111601"/>
           </a:xfrm>
           <a:prstGeom prst="rect">
             <a:avLst/>
@@ -13031,7 +13031,7 @@
               <a:defRPr/>
             </a:pPr>
             <a:r>
-              <a:rPr lang="en-US" sz="950" b="false" i="false" u="none" strike="noStrike" kern="0">
+              <a:rPr lang="en-US" sz="950" b="true" i="false" u="none" strike="noStrike" kern="0">
                 <a:solidFill>
                   <a:srgbClr val="FFFFFF"/>
                 </a:solidFill>
@@ -13115,7 +13115,7 @@
         <p:spPr>
           <a:xfrm>
             <a:off x="1308100" y="688605"/>
-            <a:ext cx="443814" cy="111601"/>
+            <a:ext cx="490747" cy="111601"/>
           </a:xfrm>
           <a:prstGeom prst="rect">
             <a:avLst/>
@@ -13131,7 +13131,7 @@
               <a:defRPr/>
             </a:pPr>
             <a:r>
-              <a:rPr lang="en-US" sz="950" b="false" i="false" u="none" strike="noStrike" kern="0">
+              <a:rPr lang="en-US" sz="950" b="true" i="false" u="none" strike="noStrike" kern="0">
                 <a:solidFill>
                   <a:srgbClr val="FFFFFF"/>
                 </a:solidFill>
@@ -13215,7 +13215,7 @@
         <p:spPr>
           <a:xfrm>
             <a:off x="3528028" y="688605"/>
-            <a:ext cx="323044" cy="111601"/>
+            <a:ext cx="349828" cy="111601"/>
           </a:xfrm>
           <a:prstGeom prst="rect">
             <a:avLst/>
@@ -13231,7 +13231,7 @@
               <a:defRPr/>
             </a:pPr>
             <a:r>
-              <a:rPr lang="en-US" sz="950" b="false" i="false" u="none" strike="noStrike" kern="0">
+              <a:rPr lang="en-US" sz="950" b="true" i="false" u="none" strike="noStrike" kern="0">
                 <a:solidFill>
                   <a:srgbClr val="FFFFFF"/>
                 </a:solidFill>
@@ -13315,7 +13315,7 @@
         <p:spPr>
           <a:xfrm>
             <a:off x="4544028" y="688605"/>
-            <a:ext cx="356584" cy="111601"/>
+            <a:ext cx="376733" cy="111601"/>
           </a:xfrm>
           <a:prstGeom prst="rect">
             <a:avLst/>
@@ -13331,7 +13331,7 @@
               <a:defRPr/>
             </a:pPr>
             <a:r>
-              <a:rPr lang="en-US" sz="950" b="false" i="false" u="none" strike="noStrike" kern="0">
+              <a:rPr lang="en-US" sz="950" b="true" i="false" u="none" strike="noStrike" kern="0">
                 <a:solidFill>
                   <a:srgbClr val="FFFFFF"/>
                 </a:solidFill>
@@ -13415,7 +13415,7 @@
         <p:spPr>
           <a:xfrm>
             <a:off x="5560028" y="688605"/>
-            <a:ext cx="417030" cy="111601"/>
+            <a:ext cx="456965" cy="111601"/>
           </a:xfrm>
           <a:prstGeom prst="rect">
             <a:avLst/>
@@ -13431,7 +13431,7 @@
               <a:defRPr/>
             </a:pPr>
             <a:r>
-              <a:rPr lang="en-US" sz="950" b="false" i="false" u="none" strike="noStrike" kern="0">
+              <a:rPr lang="en-US" sz="950" b="true" i="false" u="none" strike="noStrike" kern="0">
                 <a:solidFill>
                   <a:srgbClr val="FFFFFF"/>
                 </a:solidFill>
@@ -20603,7 +20603,7 @@
               <a:defRPr/>
             </a:pPr>
             <a:r>
-              <a:rPr lang="en-US" sz="1000" b="false" i="false" u="none" strike="noStrike" kern="0">
+              <a:rPr lang="en-US" sz="1000" b="true" i="false" u="none" strike="noStrike" kern="0">
                 <a:solidFill>
                   <a:srgbClr val="FFFFFF"/>
                 </a:solidFill>
@@ -20666,7 +20666,7 @@
         <p:spPr>
           <a:xfrm>
             <a:off x="1308100" y="5922039"/>
-            <a:ext cx="1194181" cy="117475"/>
+            <a:ext cx="1292733" cy="117475"/>
           </a:xfrm>
           <a:prstGeom prst="rect">
             <a:avLst/>
@@ -20682,7 +20682,7 @@
               <a:defRPr/>
             </a:pPr>
             <a:r>
-              <a:rPr lang="en-US" sz="1000" b="false" i="false" u="none" strike="noStrike" kern="0">
+              <a:rPr lang="en-US" sz="1000" b="true" i="false" u="none" strike="noStrike" kern="0">
                 <a:solidFill>
                   <a:srgbClr val="FFFFFF"/>
                 </a:solidFill>
@@ -20761,7 +20761,7 @@
               <a:defRPr/>
             </a:pPr>
             <a:r>
-              <a:rPr lang="en-US" sz="1000" b="false" i="false" u="none" strike="noStrike" kern="0">
+              <a:rPr lang="en-US" sz="1000" b="true" i="false" u="none" strike="noStrike" kern="0">
                 <a:solidFill>
                   <a:srgbClr val="FFFFFF"/>
                 </a:solidFill>
@@ -20840,7 +20840,7 @@
               <a:defRPr/>
             </a:pPr>
             <a:r>
-              <a:rPr lang="en-US" sz="1000" b="false" i="false" u="none" strike="noStrike" kern="0">
+              <a:rPr lang="en-US" sz="1000" b="true" i="false" u="none" strike="noStrike" kern="0">
                 <a:solidFill>
                   <a:srgbClr val="FFFFFF"/>
                 </a:solidFill>
@@ -20919,7 +20919,7 @@
               <a:defRPr/>
             </a:pPr>
             <a:r>
-              <a:rPr lang="en-US" sz="1000" b="false" i="false" u="none" strike="noStrike" kern="0">
+              <a:rPr lang="en-US" sz="1000" b="true" i="false" u="none" strike="noStrike" kern="0">
                 <a:solidFill>
                   <a:srgbClr val="FFFFFF"/>
                 </a:solidFill>
@@ -20985,7 +20985,7 @@
         <p:spPr>
           <a:xfrm>
             <a:off x="609600" y="6494335"/>
-            <a:ext cx="1266673" cy="129222"/>
+            <a:ext cx="1359852" cy="129222"/>
           </a:xfrm>
           <a:prstGeom prst="rect">
             <a:avLst/>
@@ -21010,7 +21010,7 @@
               <a:defRPr/>
             </a:pPr>
             <a:r>
-              <a:rPr lang="en-US" sz="1100" b="false" i="false" u="none" strike="noStrike" kern="0">
+              <a:rPr lang="en-US" sz="1100" b="true" i="false" u="none" strike="noStrike" kern="0">
                 <a:solidFill>
                   <a:srgbClr val="222632"/>
                 </a:solidFill>
@@ -21306,7 +21306,7 @@
         <p:spPr>
           <a:xfrm>
             <a:off x="2901000" y="6494335"/>
-            <a:ext cx="1220292" cy="129222"/>
+            <a:ext cx="1297686" cy="129222"/>
           </a:xfrm>
           <a:prstGeom prst="rect">
             <a:avLst/>
@@ -21331,7 +21331,7 @@
               <a:defRPr/>
             </a:pPr>
             <a:r>
-              <a:rPr lang="en-US" sz="1100" b="false" i="false" u="none" strike="noStrike" kern="0">
+              <a:rPr lang="en-US" sz="1100" b="true" i="false" u="none" strike="noStrike" kern="0">
                 <a:solidFill>
                   <a:srgbClr val="222632"/>
                 </a:solidFill>
@@ -21861,7 +21861,7 @@
         <p:spPr>
           <a:xfrm>
             <a:off x="5192400" y="6494335"/>
-            <a:ext cx="1266533" cy="129222"/>
+            <a:ext cx="1375359" cy="129222"/>
           </a:xfrm>
           <a:prstGeom prst="rect">
             <a:avLst/>
@@ -21886,7 +21886,7 @@
               <a:defRPr/>
             </a:pPr>
             <a:r>
-              <a:rPr lang="en-US" sz="1100" b="false" i="false" u="none" strike="noStrike" kern="0">
+              <a:rPr lang="en-US" sz="1100" b="true" i="false" u="none" strike="noStrike" kern="0">
                 <a:solidFill>
                   <a:srgbClr val="222632"/>
                 </a:solidFill>
@@ -23289,8 +23289,8 @@
         </p:nvSpPr>
         <p:spPr>
           <a:xfrm>
-            <a:off x="6689746" y="220377"/>
-            <a:ext cx="439725" cy="148590"/>
+            <a:off x="6543670" y="220377"/>
+            <a:ext cx="585800" cy="148590"/>
           </a:xfrm>
           <a:prstGeom prst="rect">
             <a:avLst/>
@@ -23312,7 +23312,7 @@
                 </a:solidFill>
                 <a:latin typeface="Arial"/>
               </a:rPr>
-              <a:t>Q2 2026</a:t>
+              <a:t>2026-08-02</a:t>
             </a:r>
             <a:endParaRPr lang="en-US" sz="1100"/>
           </a:p>
@@ -23348,7 +23348,7 @@
         <p:spPr>
           <a:xfrm>
             <a:off x="431800" y="10321827"/>
-            <a:ext cx="1684566" cy="148590"/>
+            <a:ext cx="1875219" cy="148590"/>
           </a:xfrm>
           <a:prstGeom prst="rect">
             <a:avLst/>
@@ -23370,7 +23370,7 @@
                 </a:solidFill>
                 <a:latin typeface="Arial"/>
               </a:rPr>
-              <a:t>GraphCompose — sample report</a:t>
+              <a:t>GraphCompose 2.1 — sample report</a:t>
             </a:r>
             <a:endParaRPr lang="en-US" sz="1100"/>
           </a:p>

--- a/assets/readme/examples/master-showcase.pptx
+++ b/assets/readme/examples/master-showcase.pptx
@@ -10640,8 +10640,8 @@
         </p:nvSpPr>
         <p:spPr>
           <a:xfrm>
-            <a:off x="6543670" y="220377"/>
-            <a:ext cx="585800" cy="148590"/>
+            <a:off x="6689746" y="220377"/>
+            <a:ext cx="439725" cy="148590"/>
           </a:xfrm>
           <a:prstGeom prst="rect">
             <a:avLst/>
@@ -10663,7 +10663,7 @@
                 </a:solidFill>
                 <a:latin typeface="Arial"/>
               </a:rPr>
-              <a:t>2026-08-02</a:t>
+              <a:t>Q2 2026</a:t>
             </a:r>
             <a:endParaRPr lang="en-US" sz="1100"/>
           </a:p>
@@ -10699,7 +10699,7 @@
         <p:spPr>
           <a:xfrm>
             <a:off x="431800" y="10321827"/>
-            <a:ext cx="1875219" cy="148590"/>
+            <a:ext cx="1684566" cy="148590"/>
           </a:xfrm>
           <a:prstGeom prst="rect">
             <a:avLst/>
@@ -10721,7 +10721,7 @@
                 </a:solidFill>
                 <a:latin typeface="Arial"/>
               </a:rPr>
-              <a:t>GraphCompose 2.1 — sample report</a:t>
+              <a:t>GraphCompose — sample report</a:t>
             </a:r>
             <a:endParaRPr lang="en-US" sz="1100"/>
           </a:p>
@@ -23289,8 +23289,8 @@
         </p:nvSpPr>
         <p:spPr>
           <a:xfrm>
-            <a:off x="6543670" y="220377"/>
-            <a:ext cx="585800" cy="148590"/>
+            <a:off x="6689746" y="220377"/>
+            <a:ext cx="439725" cy="148590"/>
           </a:xfrm>
           <a:prstGeom prst="rect">
             <a:avLst/>
@@ -23312,7 +23312,7 @@
                 </a:solidFill>
                 <a:latin typeface="Arial"/>
               </a:rPr>
-              <a:t>2026-08-02</a:t>
+              <a:t>Q2 2026</a:t>
             </a:r>
             <a:endParaRPr lang="en-US" sz="1100"/>
           </a:p>
@@ -23348,7 +23348,7 @@
         <p:spPr>
           <a:xfrm>
             <a:off x="431800" y="10321827"/>
-            <a:ext cx="1875219" cy="148590"/>
+            <a:ext cx="1684566" cy="148590"/>
           </a:xfrm>
           <a:prstGeom prst="rect">
             <a:avLst/>
@@ -23370,7 +23370,7 @@
                 </a:solidFill>
                 <a:latin typeface="Arial"/>
               </a:rPr>
-              <a:t>GraphCompose 2.1 — sample report</a:t>
+              <a:t>GraphCompose — sample report</a:t>
             </a:r>
             <a:endParaRPr lang="en-US" sz="1100"/>
           </a:p>

--- a/assets/readme/examples/master-showcase.pptx
+++ b/assets/readme/examples/master-showcase.pptx
@@ -3136,7 +3136,7 @@
         <p:spPr>
           <a:xfrm>
             <a:off x="711200" y="868784"/>
-            <a:ext cx="1093076" cy="99854"/>
+            <a:ext cx="1104951" cy="99854"/>
           </a:xfrm>
           <a:prstGeom prst="rect">
             <a:avLst/>
@@ -3161,7 +3161,7 @@
               <a:defRPr/>
             </a:pPr>
             <a:r>
-              <a:rPr lang="en-US" sz="850" b="false" i="false" u="none" strike="noStrike" kern="0">
+              <a:rPr lang="en-US" sz="850" b="true" i="false" u="none" strike="noStrike" kern="0">
                 <a:solidFill>
                   <a:srgbClr val="707480"/>
                 </a:solidFill>
@@ -4054,7 +4054,7 @@
         <p:spPr>
           <a:xfrm>
             <a:off x="635000" y="3142012"/>
-            <a:ext cx="544703" cy="129222"/>
+            <a:ext cx="606590" cy="129222"/>
           </a:xfrm>
           <a:prstGeom prst="rect">
             <a:avLst/>
@@ -4079,7 +4079,7 @@
               <a:defRPr/>
             </a:pPr>
             <a:r>
-              <a:rPr lang="en-US" sz="1100" b="false" i="false" u="none" strike="noStrike" kern="0">
+              <a:rPr lang="en-US" sz="1100" b="true" i="false" u="none" strike="noStrike" kern="0">
                 <a:solidFill>
                   <a:srgbClr val="222632"/>
                 </a:solidFill>
@@ -4978,7 +4978,7 @@
         <p:spPr>
           <a:xfrm>
             <a:off x="5695400" y="3071758"/>
-            <a:ext cx="385248" cy="99854"/>
+            <a:ext cx="415042" cy="99854"/>
           </a:xfrm>
           <a:prstGeom prst="rect">
             <a:avLst/>
@@ -5003,7 +5003,7 @@
               <a:defRPr/>
             </a:pPr>
             <a:r>
-              <a:rPr lang="en-US" sz="850" b="false" i="false" u="none" strike="noStrike" kern="0">
+              <a:rPr lang="en-US" sz="850" b="true" i="false" u="none" strike="noStrike" kern="0">
                 <a:solidFill>
                   <a:srgbClr val="707480"/>
                 </a:solidFill>
@@ -7255,7 +7255,7 @@
         <p:spPr>
           <a:xfrm>
             <a:off x="546100" y="7564290"/>
-            <a:ext cx="289624" cy="111601"/>
+            <a:ext cx="302895" cy="111601"/>
           </a:xfrm>
           <a:prstGeom prst="rect">
             <a:avLst/>
@@ -7271,7 +7271,7 @@
               <a:defRPr/>
             </a:pPr>
             <a:r>
-              <a:rPr lang="en-US" sz="950" b="false" i="false" u="none" strike="noStrike" kern="0">
+              <a:rPr lang="en-US" sz="950" b="true" i="false" u="none" strike="noStrike" kern="0">
                 <a:solidFill>
                   <a:srgbClr val="FFFFFF"/>
                 </a:solidFill>
@@ -7355,7 +7355,7 @@
         <p:spPr>
           <a:xfrm>
             <a:off x="1308100" y="7564290"/>
-            <a:ext cx="443814" cy="111601"/>
+            <a:ext cx="490747" cy="111601"/>
           </a:xfrm>
           <a:prstGeom prst="rect">
             <a:avLst/>
@@ -7371,7 +7371,7 @@
               <a:defRPr/>
             </a:pPr>
             <a:r>
-              <a:rPr lang="en-US" sz="950" b="false" i="false" u="none" strike="noStrike" kern="0">
+              <a:rPr lang="en-US" sz="950" b="true" i="false" u="none" strike="noStrike" kern="0">
                 <a:solidFill>
                   <a:srgbClr val="FFFFFF"/>
                 </a:solidFill>
@@ -7455,7 +7455,7 @@
         <p:spPr>
           <a:xfrm>
             <a:off x="3528028" y="7564290"/>
-            <a:ext cx="323044" cy="111601"/>
+            <a:ext cx="349828" cy="111601"/>
           </a:xfrm>
           <a:prstGeom prst="rect">
             <a:avLst/>
@@ -7471,7 +7471,7 @@
               <a:defRPr/>
             </a:pPr>
             <a:r>
-              <a:rPr lang="en-US" sz="950" b="false" i="false" u="none" strike="noStrike" kern="0">
+              <a:rPr lang="en-US" sz="950" b="true" i="false" u="none" strike="noStrike" kern="0">
                 <a:solidFill>
                   <a:srgbClr val="FFFFFF"/>
                 </a:solidFill>
@@ -7555,7 +7555,7 @@
         <p:spPr>
           <a:xfrm>
             <a:off x="4544028" y="7564290"/>
-            <a:ext cx="356584" cy="111601"/>
+            <a:ext cx="376733" cy="111601"/>
           </a:xfrm>
           <a:prstGeom prst="rect">
             <a:avLst/>
@@ -7571,7 +7571,7 @@
               <a:defRPr/>
             </a:pPr>
             <a:r>
-              <a:rPr lang="en-US" sz="950" b="false" i="false" u="none" strike="noStrike" kern="0">
+              <a:rPr lang="en-US" sz="950" b="true" i="false" u="none" strike="noStrike" kern="0">
                 <a:solidFill>
                   <a:srgbClr val="FFFFFF"/>
                 </a:solidFill>
@@ -7655,7 +7655,7 @@
         <p:spPr>
           <a:xfrm>
             <a:off x="5560028" y="7564290"/>
-            <a:ext cx="417030" cy="111601"/>
+            <a:ext cx="456965" cy="111601"/>
           </a:xfrm>
           <a:prstGeom prst="rect">
             <a:avLst/>
@@ -7671,7 +7671,7 @@
               <a:defRPr/>
             </a:pPr>
             <a:r>
-              <a:rPr lang="en-US" sz="950" b="false" i="false" u="none" strike="noStrike" kern="0">
+              <a:rPr lang="en-US" sz="950" b="true" i="false" u="none" strike="noStrike" kern="0">
                 <a:solidFill>
                   <a:srgbClr val="FFFFFF"/>
                 </a:solidFill>
@@ -13015,7 +13015,7 @@
         <p:spPr>
           <a:xfrm>
             <a:off x="546100" y="688605"/>
-            <a:ext cx="289624" cy="111601"/>
+            <a:ext cx="302895" cy="111601"/>
           </a:xfrm>
           <a:prstGeom prst="rect">
             <a:avLst/>
@@ -13031,7 +13031,7 @@
               <a:defRPr/>
             </a:pPr>
             <a:r>
-              <a:rPr lang="en-US" sz="950" b="false" i="false" u="none" strike="noStrike" kern="0">
+              <a:rPr lang="en-US" sz="950" b="true" i="false" u="none" strike="noStrike" kern="0">
                 <a:solidFill>
                   <a:srgbClr val="FFFFFF"/>
                 </a:solidFill>
@@ -13115,7 +13115,7 @@
         <p:spPr>
           <a:xfrm>
             <a:off x="1308100" y="688605"/>
-            <a:ext cx="443814" cy="111601"/>
+            <a:ext cx="490747" cy="111601"/>
           </a:xfrm>
           <a:prstGeom prst="rect">
             <a:avLst/>
@@ -13131,7 +13131,7 @@
               <a:defRPr/>
             </a:pPr>
             <a:r>
-              <a:rPr lang="en-US" sz="950" b="false" i="false" u="none" strike="noStrike" kern="0">
+              <a:rPr lang="en-US" sz="950" b="true" i="false" u="none" strike="noStrike" kern="0">
                 <a:solidFill>
                   <a:srgbClr val="FFFFFF"/>
                 </a:solidFill>
@@ -13215,7 +13215,7 @@
         <p:spPr>
           <a:xfrm>
             <a:off x="3528028" y="688605"/>
-            <a:ext cx="323044" cy="111601"/>
+            <a:ext cx="349828" cy="111601"/>
           </a:xfrm>
           <a:prstGeom prst="rect">
             <a:avLst/>
@@ -13231,7 +13231,7 @@
               <a:defRPr/>
             </a:pPr>
             <a:r>
-              <a:rPr lang="en-US" sz="950" b="false" i="false" u="none" strike="noStrike" kern="0">
+              <a:rPr lang="en-US" sz="950" b="true" i="false" u="none" strike="noStrike" kern="0">
                 <a:solidFill>
                   <a:srgbClr val="FFFFFF"/>
                 </a:solidFill>
@@ -13315,7 +13315,7 @@
         <p:spPr>
           <a:xfrm>
             <a:off x="4544028" y="688605"/>
-            <a:ext cx="356584" cy="111601"/>
+            <a:ext cx="376733" cy="111601"/>
           </a:xfrm>
           <a:prstGeom prst="rect">
             <a:avLst/>
@@ -13331,7 +13331,7 @@
               <a:defRPr/>
             </a:pPr>
             <a:r>
-              <a:rPr lang="en-US" sz="950" b="false" i="false" u="none" strike="noStrike" kern="0">
+              <a:rPr lang="en-US" sz="950" b="true" i="false" u="none" strike="noStrike" kern="0">
                 <a:solidFill>
                   <a:srgbClr val="FFFFFF"/>
                 </a:solidFill>
@@ -13415,7 +13415,7 @@
         <p:spPr>
           <a:xfrm>
             <a:off x="5560028" y="688605"/>
-            <a:ext cx="417030" cy="111601"/>
+            <a:ext cx="456965" cy="111601"/>
           </a:xfrm>
           <a:prstGeom prst="rect">
             <a:avLst/>
@@ -13431,7 +13431,7 @@
               <a:defRPr/>
             </a:pPr>
             <a:r>
-              <a:rPr lang="en-US" sz="950" b="false" i="false" u="none" strike="noStrike" kern="0">
+              <a:rPr lang="en-US" sz="950" b="true" i="false" u="none" strike="noStrike" kern="0">
                 <a:solidFill>
                   <a:srgbClr val="FFFFFF"/>
                 </a:solidFill>
@@ -20603,7 +20603,7 @@
               <a:defRPr/>
             </a:pPr>
             <a:r>
-              <a:rPr lang="en-US" sz="1000" b="false" i="false" u="none" strike="noStrike" kern="0">
+              <a:rPr lang="en-US" sz="1000" b="true" i="false" u="none" strike="noStrike" kern="0">
                 <a:solidFill>
                   <a:srgbClr val="FFFFFF"/>
                 </a:solidFill>
@@ -20666,7 +20666,7 @@
         <p:spPr>
           <a:xfrm>
             <a:off x="1308100" y="5922039"/>
-            <a:ext cx="1194181" cy="117475"/>
+            <a:ext cx="1292733" cy="117475"/>
           </a:xfrm>
           <a:prstGeom prst="rect">
             <a:avLst/>
@@ -20682,7 +20682,7 @@
               <a:defRPr/>
             </a:pPr>
             <a:r>
-              <a:rPr lang="en-US" sz="1000" b="false" i="false" u="none" strike="noStrike" kern="0">
+              <a:rPr lang="en-US" sz="1000" b="true" i="false" u="none" strike="noStrike" kern="0">
                 <a:solidFill>
                   <a:srgbClr val="FFFFFF"/>
                 </a:solidFill>
@@ -20761,7 +20761,7 @@
               <a:defRPr/>
             </a:pPr>
             <a:r>
-              <a:rPr lang="en-US" sz="1000" b="false" i="false" u="none" strike="noStrike" kern="0">
+              <a:rPr lang="en-US" sz="1000" b="true" i="false" u="none" strike="noStrike" kern="0">
                 <a:solidFill>
                   <a:srgbClr val="FFFFFF"/>
                 </a:solidFill>
@@ -20840,7 +20840,7 @@
               <a:defRPr/>
             </a:pPr>
             <a:r>
-              <a:rPr lang="en-US" sz="1000" b="false" i="false" u="none" strike="noStrike" kern="0">
+              <a:rPr lang="en-US" sz="1000" b="true" i="false" u="none" strike="noStrike" kern="0">
                 <a:solidFill>
                   <a:srgbClr val="FFFFFF"/>
                 </a:solidFill>
@@ -20919,7 +20919,7 @@
               <a:defRPr/>
             </a:pPr>
             <a:r>
-              <a:rPr lang="en-US" sz="1000" b="false" i="false" u="none" strike="noStrike" kern="0">
+              <a:rPr lang="en-US" sz="1000" b="true" i="false" u="none" strike="noStrike" kern="0">
                 <a:solidFill>
                   <a:srgbClr val="FFFFFF"/>
                 </a:solidFill>
@@ -20985,7 +20985,7 @@
         <p:spPr>
           <a:xfrm>
             <a:off x="609600" y="6494335"/>
-            <a:ext cx="1266673" cy="129222"/>
+            <a:ext cx="1359852" cy="129222"/>
           </a:xfrm>
           <a:prstGeom prst="rect">
             <a:avLst/>
@@ -21010,7 +21010,7 @@
               <a:defRPr/>
             </a:pPr>
             <a:r>
-              <a:rPr lang="en-US" sz="1100" b="false" i="false" u="none" strike="noStrike" kern="0">
+              <a:rPr lang="en-US" sz="1100" b="true" i="false" u="none" strike="noStrike" kern="0">
                 <a:solidFill>
                   <a:srgbClr val="222632"/>
                 </a:solidFill>
@@ -21306,7 +21306,7 @@
         <p:spPr>
           <a:xfrm>
             <a:off x="2901000" y="6494335"/>
-            <a:ext cx="1220292" cy="129222"/>
+            <a:ext cx="1297686" cy="129222"/>
           </a:xfrm>
           <a:prstGeom prst="rect">
             <a:avLst/>
@@ -21331,7 +21331,7 @@
               <a:defRPr/>
             </a:pPr>
             <a:r>
-              <a:rPr lang="en-US" sz="1100" b="false" i="false" u="none" strike="noStrike" kern="0">
+              <a:rPr lang="en-US" sz="1100" b="true" i="false" u="none" strike="noStrike" kern="0">
                 <a:solidFill>
                   <a:srgbClr val="222632"/>
                 </a:solidFill>
@@ -21861,7 +21861,7 @@
         <p:spPr>
           <a:xfrm>
             <a:off x="5192400" y="6494335"/>
-            <a:ext cx="1266533" cy="129222"/>
+            <a:ext cx="1375359" cy="129222"/>
           </a:xfrm>
           <a:prstGeom prst="rect">
             <a:avLst/>
@@ -21886,7 +21886,7 @@
               <a:defRPr/>
             </a:pPr>
             <a:r>
-              <a:rPr lang="en-US" sz="1100" b="false" i="false" u="none" strike="noStrike" kern="0">
+              <a:rPr lang="en-US" sz="1100" b="true" i="false" u="none" strike="noStrike" kern="0">
                 <a:solidFill>
                   <a:srgbClr val="222632"/>
                 </a:solidFill>
